--- a/lezione1.pptx
+++ b/lezione1.pptx
@@ -3,26 +3,29 @@
 <p:presentation xmlns:a="http://schemas.openxmlformats.org/drawingml/2006/main" xmlns:r="http://schemas.openxmlformats.org/officeDocument/2006/relationships" xmlns:p="http://schemas.openxmlformats.org/presentationml/2006/main" saveSubsetFonts="1" autoCompressPictures="0">
   <p:sldMasterIdLst>
     <p:sldMasterId id="2147483648" r:id="rId1"/>
+    <p:sldMasterId id="2147483650" r:id="rId2"/>
   </p:sldMasterIdLst>
+  <p:notesMasterIdLst>
+    <p:notesMasterId r:id="rId19"/>
+  </p:notesMasterIdLst>
   <p:sldIdLst>
-    <p:sldId id="256" r:id="rId2"/>
-    <p:sldId id="257" r:id="rId3"/>
-    <p:sldId id="258" r:id="rId4"/>
-    <p:sldId id="259" r:id="rId5"/>
-    <p:sldId id="260" r:id="rId6"/>
-    <p:sldId id="261" r:id="rId7"/>
-    <p:sldId id="262" r:id="rId8"/>
-    <p:sldId id="263" r:id="rId9"/>
-    <p:sldId id="264" r:id="rId10"/>
-    <p:sldId id="265" r:id="rId11"/>
-    <p:sldId id="266" r:id="rId12"/>
-    <p:sldId id="267" r:id="rId13"/>
-    <p:sldId id="268" r:id="rId14"/>
-    <p:sldId id="269" r:id="rId15"/>
+    <p:sldId id="270" r:id="rId3"/>
+    <p:sldId id="293" r:id="rId4"/>
+    <p:sldId id="257" r:id="rId5"/>
+    <p:sldId id="258" r:id="rId6"/>
+    <p:sldId id="259" r:id="rId7"/>
+    <p:sldId id="260" r:id="rId8"/>
+    <p:sldId id="261" r:id="rId9"/>
+    <p:sldId id="262" r:id="rId10"/>
+    <p:sldId id="263" r:id="rId11"/>
+    <p:sldId id="264" r:id="rId12"/>
+    <p:sldId id="265" r:id="rId13"/>
+    <p:sldId id="266" r:id="rId14"/>
+    <p:sldId id="267" r:id="rId15"/>
+    <p:sldId id="268" r:id="rId16"/>
+    <p:sldId id="269" r:id="rId17"/>
+    <p:sldId id="294" r:id="rId18"/>
   </p:sldIdLst>
-  <p:notesMasterIdLst>
-    <p:notesMasterId r:id="rId16"/>
-  </p:notesMasterIdLst>
   <p:sldSz cx="12192000" cy="6858000"/>
   <p:notesSz cx="6858000" cy="12192000"/>
   <p:defaultTextStyle>
@@ -117,6 +120,11 @@
       </a:defRPr>
     </a:lvl9pPr>
   </p:defaultTextStyle>
+  <p:extLst>
+    <p:ext uri="{EFAFB233-063F-42B5-8137-9DF3F51BA10A}">
+      <p15:sldGuideLst xmlns:p15="http://schemas.microsoft.com/office/powerpoint/2012/main"/>
+    </p:ext>
+  </p:extLst>
 </p:presentation>
 </file>
 
@@ -142,234 +150,10 @@
           <a:chExt cx="0" cy="0"/>
         </a:xfrm>
       </p:grpSpPr>
-      <p:sp>
-        <p:nvSpPr>
-          <p:cNvPr id="2" name="Header Placeholder 1"/>
-          <p:cNvSpPr>
-            <a:spLocks noGrp="1"/>
-          </p:cNvSpPr>
-          <p:nvPr>
-            <p:ph type="hdr" sz="quarter"/>
-          </p:nvPr>
-        </p:nvSpPr>
-        <p:spPr>
-          <a:xfrm>
-            <a:off x="0" y="0"/>
-            <a:ext cx="2971800" cy="458788"/>
-          </a:xfrm>
-          <a:prstGeom prst="rect">
-            <a:avLst/>
-          </a:prstGeom>
-        </p:spPr>
-        <p:txBody>
-          <a:bodyPr vert="horz" lIns="91440" tIns="45720" rIns="91440" bIns="45720" rtlCol="0"/>
-          <a:lstStyle>
-            <a:lvl1pPr algn="l">
-              <a:defRPr sz="1200"/>
-            </a:lvl1pPr>
-          </a:lstStyle>
-          <a:p>
-            <a:endParaRPr lang="en-US"/>
-          </a:p>
-        </p:txBody>
-      </p:sp>
-      <p:sp>
-        <p:nvSpPr>
-          <p:cNvPr id="3" name="Date Placeholder 2"/>
-          <p:cNvSpPr>
-            <a:spLocks noGrp="1"/>
-          </p:cNvSpPr>
-          <p:nvPr>
-            <p:ph type="dt" idx="1"/>
-          </p:nvPr>
-        </p:nvSpPr>
-        <p:spPr>
-          <a:xfrm>
-            <a:off x="3884613" y="0"/>
-            <a:ext cx="2971800" cy="458788"/>
-          </a:xfrm>
-          <a:prstGeom prst="rect">
-            <a:avLst/>
-          </a:prstGeom>
-        </p:spPr>
-        <p:txBody>
-          <a:bodyPr vert="horz" lIns="91440" tIns="45720" rIns="91440" bIns="45720" rtlCol="0"/>
-          <a:lstStyle>
-            <a:lvl1pPr algn="r">
-              <a:defRPr sz="1200"/>
-            </a:lvl1pPr>
-          </a:lstStyle>
-          <a:p>
-            <a:fld id="{5282F153-3F37-0F45-9E97-73ACFA13230C}" type="datetimeFigureOut">
-              <a:rPr lang="en-US"/>
-              <a:t>7/23/19</a:t>
-            </a:fld>
-            <a:endParaRPr lang="en-US"/>
-          </a:p>
-        </p:txBody>
-      </p:sp>
-      <p:sp>
-        <p:nvSpPr>
-          <p:cNvPr id="4" name="Slide Image Placeholder 3"/>
-          <p:cNvSpPr>
-            <a:spLocks noGrp="1" noRot="1" noChangeAspect="1"/>
-          </p:cNvSpPr>
-          <p:nvPr>
-            <p:ph type="sldImg" idx="2"/>
-          </p:nvPr>
-        </p:nvSpPr>
-        <p:spPr>
-          <a:xfrm>
-            <a:off x="685800" y="1143000"/>
-            <a:ext cx="5486400" cy="3086100"/>
-          </a:xfrm>
-          <a:prstGeom prst="rect">
-            <a:avLst/>
-          </a:prstGeom>
-          <a:noFill/>
-          <a:ln w="12700">
-            <a:solidFill>
-              <a:prstClr val="black"/>
-            </a:solidFill>
-          </a:ln>
-        </p:spPr>
-        <p:txBody>
-          <a:bodyPr vert="horz" lIns="91440" tIns="45720" rIns="91440" bIns="45720" rtlCol="0" anchor="ctr"/>
-          <a:lstStyle/>
-          <a:p>
-            <a:endParaRPr lang="en-US"/>
-          </a:p>
-        </p:txBody>
-      </p:sp>
-      <p:sp>
-        <p:nvSpPr>
-          <p:cNvPr id="5" name="Notes Placeholder 4"/>
-          <p:cNvSpPr>
-            <a:spLocks noGrp="1"/>
-          </p:cNvSpPr>
-          <p:nvPr>
-            <p:ph type="body" sz="quarter" idx="3"/>
-          </p:nvPr>
-        </p:nvSpPr>
-        <p:spPr>
-          <a:xfrm>
-            <a:off x="685800" y="4400550"/>
-            <a:ext cx="5486400" cy="3600450"/>
-          </a:xfrm>
-          <a:prstGeom prst="rect">
-            <a:avLst/>
-          </a:prstGeom>
-        </p:spPr>
-        <p:txBody>
-          <a:bodyPr vert="horz" lIns="91440" tIns="45720" rIns="91440" bIns="45720" rtlCol="0"/>
-          <a:lstStyle/>
-          <a:p>
-            <a:pPr lvl="0"/>
-            <a:r>
-              <a:rPr lang="en-US"/>
-              <a:t>Click to edit Master text styles</a:t>
-            </a:r>
-          </a:p>
-          <a:p>
-            <a:pPr lvl="1"/>
-            <a:r>
-              <a:rPr lang="en-US"/>
-              <a:t>Second level</a:t>
-            </a:r>
-          </a:p>
-          <a:p>
-            <a:pPr lvl="2"/>
-            <a:r>
-              <a:rPr lang="en-US"/>
-              <a:t>Third level</a:t>
-            </a:r>
-          </a:p>
-          <a:p>
-            <a:pPr lvl="3"/>
-            <a:r>
-              <a:rPr lang="en-US"/>
-              <a:t>Fourth level</a:t>
-            </a:r>
-          </a:p>
-          <a:p>
-            <a:pPr lvl="4"/>
-            <a:r>
-              <a:rPr lang="en-US"/>
-              <a:t>Fifth level</a:t>
-            </a:r>
-          </a:p>
-        </p:txBody>
-      </p:sp>
-      <p:sp>
-        <p:nvSpPr>
-          <p:cNvPr id="6" name="Footer Placeholder 5"/>
-          <p:cNvSpPr>
-            <a:spLocks noGrp="1"/>
-          </p:cNvSpPr>
-          <p:nvPr>
-            <p:ph type="ftr" sz="quarter" idx="4"/>
-          </p:nvPr>
-        </p:nvSpPr>
-        <p:spPr>
-          <a:xfrm>
-            <a:off x="0" y="8685213"/>
-            <a:ext cx="2971800" cy="458787"/>
-          </a:xfrm>
-          <a:prstGeom prst="rect">
-            <a:avLst/>
-          </a:prstGeom>
-        </p:spPr>
-        <p:txBody>
-          <a:bodyPr vert="horz" lIns="91440" tIns="45720" rIns="91440" bIns="45720" rtlCol="0" anchor="b"/>
-          <a:lstStyle>
-            <a:lvl1pPr algn="l">
-              <a:defRPr sz="1200"/>
-            </a:lvl1pPr>
-          </a:lstStyle>
-          <a:p>
-            <a:endParaRPr lang="en-US"/>
-          </a:p>
-        </p:txBody>
-      </p:sp>
-      <p:sp>
-        <p:nvSpPr>
-          <p:cNvPr id="7" name="Slide Number Placeholder 6"/>
-          <p:cNvSpPr>
-            <a:spLocks noGrp="1"/>
-          </p:cNvSpPr>
-          <p:nvPr>
-            <p:ph type="sldNum" sz="quarter" idx="5"/>
-          </p:nvPr>
-        </p:nvSpPr>
-        <p:spPr>
-          <a:xfrm>
-            <a:off x="3884613" y="8685213"/>
-            <a:ext cx="2971800" cy="458787"/>
-          </a:xfrm>
-          <a:prstGeom prst="rect">
-            <a:avLst/>
-          </a:prstGeom>
-        </p:spPr>
-        <p:txBody>
-          <a:bodyPr vert="horz" lIns="91440" tIns="45720" rIns="91440" bIns="45720" rtlCol="0" anchor="b"/>
-          <a:lstStyle>
-            <a:lvl1pPr algn="r">
-              <a:defRPr sz="1200"/>
-            </a:lvl1pPr>
-          </a:lstStyle>
-          <a:p>
-            <a:fld id="{CE5E9CC1-C706-0F49-92D6-E571CC5EEA8F}" type="slidenum">
-              <a:rPr lang="en-US"/>
-              <a:t>‹#›</a:t>
-            </a:fld>
-            <a:endParaRPr lang="en-US"/>
-          </a:p>
-        </p:txBody>
-      </p:sp>
     </p:spTree>
     <p:extLst>
       <p:ext uri="{BB962C8B-B14F-4D97-AF65-F5344CB8AC3E}">
-        <p14:creationId xmlns:p14="http://schemas.microsoft.com/office/powerpoint/2010/main" val="1024086991"/>
+        <p14:creationId xmlns:p14="http://schemas.microsoft.com/office/powerpoint/2010/main" val="309808360"/>
       </p:ext>
     </p:extLst>
   </p:cSld>
@@ -513,10 +297,6 @@
           <a:bodyPr/>
           <a:lstStyle/>
           <a:p>
-            <a:r>
-              <a:rPr lang="en-US" dirty="0"/>
-              <a:t/>
-            </a:r>
             <a:endParaRPr lang="en-US" dirty="0"/>
           </a:p>
         </p:txBody>
@@ -538,7 +318,7 @@
           <a:p>
             <a:fld id="{F7021451-1387-4CA6-816F-3879F97B5CBC}" type="slidenum">
               <a:rPr lang="en-US"/>
-              <a:t>1</a:t>
+              <a:t>3</a:t>
             </a:fld>
             <a:endParaRPr lang="en-US"/>
           </a:p>
@@ -601,10 +381,6 @@
           <a:bodyPr/>
           <a:lstStyle/>
           <a:p>
-            <a:r>
-              <a:rPr lang="en-US" dirty="0"/>
-              <a:t/>
-            </a:r>
             <a:endParaRPr lang="en-US" dirty="0"/>
           </a:p>
         </p:txBody>
@@ -626,7 +402,7 @@
           <a:p>
             <a:fld id="{F7021451-1387-4CA6-816F-3879F97B5CBC}" type="slidenum">
               <a:rPr lang="en-US"/>
-              <a:t>10</a:t>
+              <a:t>12</a:t>
             </a:fld>
             <a:endParaRPr lang="en-US"/>
           </a:p>
@@ -689,10 +465,6 @@
           <a:bodyPr/>
           <a:lstStyle/>
           <a:p>
-            <a:r>
-              <a:rPr lang="en-US" dirty="0"/>
-              <a:t/>
-            </a:r>
             <a:endParaRPr lang="en-US" dirty="0"/>
           </a:p>
         </p:txBody>
@@ -714,7 +486,7 @@
           <a:p>
             <a:fld id="{F7021451-1387-4CA6-816F-3879F97B5CBC}" type="slidenum">
               <a:rPr lang="en-US"/>
-              <a:t>11</a:t>
+              <a:t>13</a:t>
             </a:fld>
             <a:endParaRPr lang="en-US"/>
           </a:p>
@@ -777,10 +549,6 @@
           <a:bodyPr/>
           <a:lstStyle/>
           <a:p>
-            <a:r>
-              <a:rPr lang="en-US" dirty="0"/>
-              <a:t/>
-            </a:r>
             <a:endParaRPr lang="en-US" dirty="0"/>
           </a:p>
         </p:txBody>
@@ -802,7 +570,7 @@
           <a:p>
             <a:fld id="{F7021451-1387-4CA6-816F-3879F97B5CBC}" type="slidenum">
               <a:rPr lang="en-US"/>
-              <a:t>12</a:t>
+              <a:t>14</a:t>
             </a:fld>
             <a:endParaRPr lang="en-US"/>
           </a:p>
@@ -865,10 +633,6 @@
           <a:bodyPr/>
           <a:lstStyle/>
           <a:p>
-            <a:r>
-              <a:rPr lang="en-US" dirty="0"/>
-              <a:t/>
-            </a:r>
             <a:endParaRPr lang="en-US" dirty="0"/>
           </a:p>
         </p:txBody>
@@ -890,95 +654,7 @@
           <a:p>
             <a:fld id="{F7021451-1387-4CA6-816F-3879F97B5CBC}" type="slidenum">
               <a:rPr lang="en-US"/>
-              <a:t>13</a:t>
-            </a:fld>
-            <a:endParaRPr lang="en-US"/>
-          </a:p>
-        </p:txBody>
-      </p:sp>
-    </p:spTree>
-    <p:extLst>
-      <p:ext uri="{BB962C8B-B14F-4D97-AF65-F5344CB8AC3E}">
-        <p14:creationId xmlns:p14="http://schemas.microsoft.com/office/powerpoint/2010/main" val="1024086991"/>
-      </p:ext>
-    </p:extLst>
-  </p:cSld>
-  <p:clrMapOvr>
-    <a:masterClrMapping/>
-  </p:clrMapOvr>
-</p:notes>
-</file>
-
-<file path=ppt/notesSlides/notesSlide14.xml><?xml version="1.0" encoding="utf-8"?>
-<p:notes xmlns:a="http://schemas.openxmlformats.org/drawingml/2006/main" xmlns:r="http://schemas.openxmlformats.org/officeDocument/2006/relationships" xmlns:p="http://schemas.openxmlformats.org/presentationml/2006/main">
-  <p:cSld>
-    <p:spTree>
-      <p:nvGrpSpPr>
-        <p:cNvPr id="1" name=""/>
-        <p:cNvGrpSpPr/>
-        <p:nvPr/>
-      </p:nvGrpSpPr>
-      <p:grpSpPr>
-        <a:xfrm>
-          <a:off x="0" y="0"/>
-          <a:ext cx="0" cy="0"/>
-          <a:chOff x="0" y="0"/>
-          <a:chExt cx="0" cy="0"/>
-        </a:xfrm>
-      </p:grpSpPr>
-      <p:sp>
-        <p:nvSpPr>
-          <p:cNvPr id="2" name="Slide Image Placeholder 1"/>
-          <p:cNvSpPr>
-            <a:spLocks noGrp="1" noRot="1" noChangeAspect="1"/>
-          </p:cNvSpPr>
-          <p:nvPr>
-            <p:ph type="sldImg"/>
-          </p:nvPr>
-        </p:nvSpPr>
-        <p:spPr/>
-      </p:sp>
-      <p:sp>
-        <p:nvSpPr>
-          <p:cNvPr id="3" name="Notes Placeholder 2"/>
-          <p:cNvSpPr>
-            <a:spLocks noGrp="1"/>
-          </p:cNvSpPr>
-          <p:nvPr>
-            <p:ph type="body" idx="1"/>
-          </p:nvPr>
-        </p:nvSpPr>
-        <p:spPr/>
-        <p:txBody>
-          <a:bodyPr/>
-          <a:lstStyle/>
-          <a:p>
-            <a:r>
-              <a:rPr lang="en-US" dirty="0"/>
-              <a:t/>
-            </a:r>
-            <a:endParaRPr lang="en-US" dirty="0"/>
-          </a:p>
-        </p:txBody>
-      </p:sp>
-      <p:sp>
-        <p:nvSpPr>
-          <p:cNvPr id="4" name="Slide Number Placeholder 3"/>
-          <p:cNvSpPr>
-            <a:spLocks noGrp="1"/>
-          </p:cNvSpPr>
-          <p:nvPr>
-            <p:ph type="sldNum" sz="quarter" idx="10"/>
-          </p:nvPr>
-        </p:nvSpPr>
-        <p:spPr/>
-        <p:txBody>
-          <a:bodyPr/>
-          <a:lstStyle/>
-          <a:p>
-            <a:fld id="{F7021451-1387-4CA6-816F-3879F97B5CBC}" type="slidenum">
-              <a:rPr lang="en-US"/>
-              <a:t>14</a:t>
+              <a:t>15</a:t>
             </a:fld>
             <a:endParaRPr lang="en-US"/>
           </a:p>
@@ -1041,10 +717,6 @@
           <a:bodyPr/>
           <a:lstStyle/>
           <a:p>
-            <a:r>
-              <a:rPr lang="en-US" dirty="0"/>
-              <a:t/>
-            </a:r>
             <a:endParaRPr lang="en-US" dirty="0"/>
           </a:p>
         </p:txBody>
@@ -1066,7 +738,7 @@
           <a:p>
             <a:fld id="{F7021451-1387-4CA6-816F-3879F97B5CBC}" type="slidenum">
               <a:rPr lang="en-US"/>
-              <a:t>2</a:t>
+              <a:t>4</a:t>
             </a:fld>
             <a:endParaRPr lang="en-US"/>
           </a:p>
@@ -1129,10 +801,6 @@
           <a:bodyPr/>
           <a:lstStyle/>
           <a:p>
-            <a:r>
-              <a:rPr lang="en-US" dirty="0"/>
-              <a:t/>
-            </a:r>
             <a:endParaRPr lang="en-US" dirty="0"/>
           </a:p>
         </p:txBody>
@@ -1154,7 +822,7 @@
           <a:p>
             <a:fld id="{F7021451-1387-4CA6-816F-3879F97B5CBC}" type="slidenum">
               <a:rPr lang="en-US"/>
-              <a:t>3</a:t>
+              <a:t>5</a:t>
             </a:fld>
             <a:endParaRPr lang="en-US"/>
           </a:p>
@@ -1217,10 +885,6 @@
           <a:bodyPr/>
           <a:lstStyle/>
           <a:p>
-            <a:r>
-              <a:rPr lang="en-US" dirty="0"/>
-              <a:t/>
-            </a:r>
             <a:endParaRPr lang="en-US" dirty="0"/>
           </a:p>
         </p:txBody>
@@ -1242,7 +906,7 @@
           <a:p>
             <a:fld id="{F7021451-1387-4CA6-816F-3879F97B5CBC}" type="slidenum">
               <a:rPr lang="en-US"/>
-              <a:t>4</a:t>
+              <a:t>6</a:t>
             </a:fld>
             <a:endParaRPr lang="en-US"/>
           </a:p>
@@ -1305,10 +969,6 @@
           <a:bodyPr/>
           <a:lstStyle/>
           <a:p>
-            <a:r>
-              <a:rPr lang="en-US" dirty="0"/>
-              <a:t/>
-            </a:r>
             <a:endParaRPr lang="en-US" dirty="0"/>
           </a:p>
         </p:txBody>
@@ -1330,7 +990,7 @@
           <a:p>
             <a:fld id="{F7021451-1387-4CA6-816F-3879F97B5CBC}" type="slidenum">
               <a:rPr lang="en-US"/>
-              <a:t>5</a:t>
+              <a:t>7</a:t>
             </a:fld>
             <a:endParaRPr lang="en-US"/>
           </a:p>
@@ -1393,10 +1053,6 @@
           <a:bodyPr/>
           <a:lstStyle/>
           <a:p>
-            <a:r>
-              <a:rPr lang="en-US" dirty="0"/>
-              <a:t/>
-            </a:r>
             <a:endParaRPr lang="en-US" dirty="0"/>
           </a:p>
         </p:txBody>
@@ -1418,7 +1074,7 @@
           <a:p>
             <a:fld id="{F7021451-1387-4CA6-816F-3879F97B5CBC}" type="slidenum">
               <a:rPr lang="en-US"/>
-              <a:t>6</a:t>
+              <a:t>8</a:t>
             </a:fld>
             <a:endParaRPr lang="en-US"/>
           </a:p>
@@ -1481,10 +1137,6 @@
           <a:bodyPr/>
           <a:lstStyle/>
           <a:p>
-            <a:r>
-              <a:rPr lang="en-US" dirty="0"/>
-              <a:t/>
-            </a:r>
             <a:endParaRPr lang="en-US" dirty="0"/>
           </a:p>
         </p:txBody>
@@ -1506,7 +1158,7 @@
           <a:p>
             <a:fld id="{F7021451-1387-4CA6-816F-3879F97B5CBC}" type="slidenum">
               <a:rPr lang="en-US"/>
-              <a:t>7</a:t>
+              <a:t>9</a:t>
             </a:fld>
             <a:endParaRPr lang="en-US"/>
           </a:p>
@@ -1569,10 +1221,6 @@
           <a:bodyPr/>
           <a:lstStyle/>
           <a:p>
-            <a:r>
-              <a:rPr lang="en-US" dirty="0"/>
-              <a:t/>
-            </a:r>
             <a:endParaRPr lang="en-US" dirty="0"/>
           </a:p>
         </p:txBody>
@@ -1594,7 +1242,7 @@
           <a:p>
             <a:fld id="{F7021451-1387-4CA6-816F-3879F97B5CBC}" type="slidenum">
               <a:rPr lang="en-US"/>
-              <a:t>8</a:t>
+              <a:t>10</a:t>
             </a:fld>
             <a:endParaRPr lang="en-US"/>
           </a:p>
@@ -1657,10 +1305,6 @@
           <a:bodyPr/>
           <a:lstStyle/>
           <a:p>
-            <a:r>
-              <a:rPr lang="en-US" dirty="0"/>
-              <a:t/>
-            </a:r>
             <a:endParaRPr lang="en-US" dirty="0"/>
           </a:p>
         </p:txBody>
@@ -1682,7 +1326,7 @@
           <a:p>
             <a:fld id="{F7021451-1387-4CA6-816F-3879F97B5CBC}" type="slidenum">
               <a:rPr lang="en-US"/>
-              <a:t>9</a:t>
+              <a:t>11</a:t>
             </a:fld>
             <a:endParaRPr lang="en-US"/>
           </a:p>
@@ -1731,9 +1375,2478 @@
 </p:sldLayout>
 </file>
 
+<file path=ppt/slideLayouts/slideLayout10.xml><?xml version="1.0" encoding="utf-8"?>
+<p:sldLayout xmlns:a="http://schemas.openxmlformats.org/drawingml/2006/main" xmlns:r="http://schemas.openxmlformats.org/officeDocument/2006/relationships" xmlns:p="http://schemas.openxmlformats.org/presentationml/2006/main" type="picTx" preserve="1">
+  <p:cSld name="Picture with Caption">
+    <p:spTree>
+      <p:nvGrpSpPr>
+        <p:cNvPr id="1" name=""/>
+        <p:cNvGrpSpPr/>
+        <p:nvPr/>
+      </p:nvGrpSpPr>
+      <p:grpSpPr>
+        <a:xfrm>
+          <a:off x="0" y="0"/>
+          <a:ext cx="0" cy="0"/>
+          <a:chOff x="0" y="0"/>
+          <a:chExt cx="0" cy="0"/>
+        </a:xfrm>
+      </p:grpSpPr>
+      <p:sp>
+        <p:nvSpPr>
+          <p:cNvPr id="2" name="Title 1"/>
+          <p:cNvSpPr>
+            <a:spLocks noGrp="1"/>
+          </p:cNvSpPr>
+          <p:nvPr>
+            <p:ph type="title"/>
+          </p:nvPr>
+        </p:nvSpPr>
+        <p:spPr>
+          <a:xfrm>
+            <a:off x="1194859" y="3200400"/>
+            <a:ext cx="3657600" cy="377825"/>
+          </a:xfrm>
+        </p:spPr>
+        <p:txBody>
+          <a:bodyPr anchor="b"/>
+          <a:lstStyle>
+            <a:lvl1pPr algn="l">
+              <a:defRPr sz="1333" b="1"/>
+            </a:lvl1pPr>
+          </a:lstStyle>
+          <a:p>
+            <a:r>
+              <a:rPr lang="en-US"/>
+              <a:t>Click to edit Master title style</a:t>
+            </a:r>
+          </a:p>
+        </p:txBody>
+      </p:sp>
+      <p:sp>
+        <p:nvSpPr>
+          <p:cNvPr id="3" name="Picture Placeholder 2"/>
+          <p:cNvSpPr>
+            <a:spLocks noGrp="1"/>
+          </p:cNvSpPr>
+          <p:nvPr>
+            <p:ph type="pic" idx="1"/>
+          </p:nvPr>
+        </p:nvSpPr>
+        <p:spPr>
+          <a:xfrm>
+            <a:off x="1194859" y="408517"/>
+            <a:ext cx="3657600" cy="2743200"/>
+          </a:xfrm>
+        </p:spPr>
+        <p:txBody>
+          <a:bodyPr/>
+          <a:lstStyle>
+            <a:lvl1pPr marL="0" indent="0">
+              <a:buNone/>
+              <a:defRPr sz="2133"/>
+            </a:lvl1pPr>
+            <a:lvl2pPr marL="304815" indent="0">
+              <a:buNone/>
+              <a:defRPr sz="1867"/>
+            </a:lvl2pPr>
+            <a:lvl3pPr marL="609630" indent="0">
+              <a:buNone/>
+              <a:defRPr sz="1600"/>
+            </a:lvl3pPr>
+            <a:lvl4pPr marL="914446" indent="0">
+              <a:buNone/>
+              <a:defRPr sz="1333"/>
+            </a:lvl4pPr>
+            <a:lvl5pPr marL="1219261" indent="0">
+              <a:buNone/>
+              <a:defRPr sz="1333"/>
+            </a:lvl5pPr>
+            <a:lvl6pPr marL="1524076" indent="0">
+              <a:buNone/>
+              <a:defRPr sz="1333"/>
+            </a:lvl6pPr>
+            <a:lvl7pPr marL="1828891" indent="0">
+              <a:buNone/>
+              <a:defRPr sz="1333"/>
+            </a:lvl7pPr>
+            <a:lvl8pPr marL="2133707" indent="0">
+              <a:buNone/>
+              <a:defRPr sz="1333"/>
+            </a:lvl8pPr>
+            <a:lvl9pPr marL="2438522" indent="0">
+              <a:buNone/>
+              <a:defRPr sz="1333"/>
+            </a:lvl9pPr>
+          </a:lstStyle>
+          <a:p>
+            <a:endParaRPr lang="en-US"/>
+          </a:p>
+        </p:txBody>
+      </p:sp>
+      <p:sp>
+        <p:nvSpPr>
+          <p:cNvPr id="4" name="Text Placeholder 3"/>
+          <p:cNvSpPr>
+            <a:spLocks noGrp="1"/>
+          </p:cNvSpPr>
+          <p:nvPr>
+            <p:ph type="body" sz="half" idx="2"/>
+          </p:nvPr>
+        </p:nvSpPr>
+        <p:spPr>
+          <a:xfrm>
+            <a:off x="1194859" y="3578225"/>
+            <a:ext cx="3657600" cy="536575"/>
+          </a:xfrm>
+        </p:spPr>
+        <p:txBody>
+          <a:bodyPr/>
+          <a:lstStyle>
+            <a:lvl1pPr marL="0" indent="0">
+              <a:buNone/>
+              <a:defRPr sz="933"/>
+            </a:lvl1pPr>
+            <a:lvl2pPr marL="304815" indent="0">
+              <a:buNone/>
+              <a:defRPr sz="800"/>
+            </a:lvl2pPr>
+            <a:lvl3pPr marL="609630" indent="0">
+              <a:buNone/>
+              <a:defRPr sz="667"/>
+            </a:lvl3pPr>
+            <a:lvl4pPr marL="914446" indent="0">
+              <a:buNone/>
+              <a:defRPr sz="600"/>
+            </a:lvl4pPr>
+            <a:lvl5pPr marL="1219261" indent="0">
+              <a:buNone/>
+              <a:defRPr sz="600"/>
+            </a:lvl5pPr>
+            <a:lvl6pPr marL="1524076" indent="0">
+              <a:buNone/>
+              <a:defRPr sz="600"/>
+            </a:lvl6pPr>
+            <a:lvl7pPr marL="1828891" indent="0">
+              <a:buNone/>
+              <a:defRPr sz="600"/>
+            </a:lvl7pPr>
+            <a:lvl8pPr marL="2133707" indent="0">
+              <a:buNone/>
+              <a:defRPr sz="600"/>
+            </a:lvl8pPr>
+            <a:lvl9pPr marL="2438522" indent="0">
+              <a:buNone/>
+              <a:defRPr sz="600"/>
+            </a:lvl9pPr>
+          </a:lstStyle>
+          <a:p>
+            <a:pPr lvl="0"/>
+            <a:r>
+              <a:rPr lang="en-US"/>
+              <a:t>Click to edit Master text styles</a:t>
+            </a:r>
+          </a:p>
+        </p:txBody>
+      </p:sp>
+      <p:sp>
+        <p:nvSpPr>
+          <p:cNvPr id="5" name="Date Placeholder 4"/>
+          <p:cNvSpPr>
+            <a:spLocks noGrp="1"/>
+          </p:cNvSpPr>
+          <p:nvPr>
+            <p:ph type="dt" sz="half" idx="10"/>
+          </p:nvPr>
+        </p:nvSpPr>
+        <p:spPr/>
+        <p:txBody>
+          <a:bodyPr/>
+          <a:lstStyle/>
+          <a:p>
+            <a:fld id="{1D8BD707-D9CF-40AE-B4C6-C98DA3205C09}" type="datetimeFigureOut">
+              <a:rPr lang="en-US" smtClean="0"/>
+              <a:pPr/>
+              <a:t>4/8/2026</a:t>
+            </a:fld>
+            <a:endParaRPr lang="en-US"/>
+          </a:p>
+        </p:txBody>
+      </p:sp>
+      <p:sp>
+        <p:nvSpPr>
+          <p:cNvPr id="6" name="Footer Placeholder 5"/>
+          <p:cNvSpPr>
+            <a:spLocks noGrp="1"/>
+          </p:cNvSpPr>
+          <p:nvPr>
+            <p:ph type="ftr" sz="quarter" idx="11"/>
+          </p:nvPr>
+        </p:nvSpPr>
+        <p:spPr/>
+        <p:txBody>
+          <a:bodyPr/>
+          <a:lstStyle/>
+          <a:p>
+            <a:endParaRPr lang="en-US"/>
+          </a:p>
+        </p:txBody>
+      </p:sp>
+      <p:sp>
+        <p:nvSpPr>
+          <p:cNvPr id="7" name="Slide Number Placeholder 6"/>
+          <p:cNvSpPr>
+            <a:spLocks noGrp="1"/>
+          </p:cNvSpPr>
+          <p:nvPr>
+            <p:ph type="sldNum" sz="quarter" idx="12"/>
+          </p:nvPr>
+        </p:nvSpPr>
+        <p:spPr/>
+        <p:txBody>
+          <a:bodyPr/>
+          <a:lstStyle/>
+          <a:p>
+            <a:fld id="{B6F15528-21DE-4FAA-801E-634DDDAF4B2B}" type="slidenum">
+              <a:rPr lang="en-US" smtClean="0"/>
+              <a:pPr/>
+              <a:t>‹N›</a:t>
+            </a:fld>
+            <a:endParaRPr lang="en-US"/>
+          </a:p>
+        </p:txBody>
+      </p:sp>
+    </p:spTree>
+    <p:extLst>
+      <p:ext uri="{BB962C8B-B14F-4D97-AF65-F5344CB8AC3E}">
+        <p14:creationId xmlns:p14="http://schemas.microsoft.com/office/powerpoint/2010/main" val="3226296530"/>
+      </p:ext>
+    </p:extLst>
+  </p:cSld>
+  <p:clrMapOvr>
+    <a:masterClrMapping/>
+  </p:clrMapOvr>
+</p:sldLayout>
+</file>
+
+<file path=ppt/slideLayouts/slideLayout11.xml><?xml version="1.0" encoding="utf-8"?>
+<p:sldLayout xmlns:a="http://schemas.openxmlformats.org/drawingml/2006/main" xmlns:r="http://schemas.openxmlformats.org/officeDocument/2006/relationships" xmlns:p="http://schemas.openxmlformats.org/presentationml/2006/main" type="vertTx" preserve="1">
+  <p:cSld name="Title and Vertical Text">
+    <p:spTree>
+      <p:nvGrpSpPr>
+        <p:cNvPr id="1" name=""/>
+        <p:cNvGrpSpPr/>
+        <p:nvPr/>
+      </p:nvGrpSpPr>
+      <p:grpSpPr>
+        <a:xfrm>
+          <a:off x="0" y="0"/>
+          <a:ext cx="0" cy="0"/>
+          <a:chOff x="0" y="0"/>
+          <a:chExt cx="0" cy="0"/>
+        </a:xfrm>
+      </p:grpSpPr>
+      <p:sp>
+        <p:nvSpPr>
+          <p:cNvPr id="2" name="Title 1"/>
+          <p:cNvSpPr>
+            <a:spLocks noGrp="1"/>
+          </p:cNvSpPr>
+          <p:nvPr>
+            <p:ph type="title"/>
+          </p:nvPr>
+        </p:nvSpPr>
+        <p:spPr/>
+        <p:txBody>
+          <a:bodyPr/>
+          <a:lstStyle/>
+          <a:p>
+            <a:r>
+              <a:rPr lang="en-US"/>
+              <a:t>Click to edit Master title style</a:t>
+            </a:r>
+          </a:p>
+        </p:txBody>
+      </p:sp>
+      <p:sp>
+        <p:nvSpPr>
+          <p:cNvPr id="3" name="Vertical Text Placeholder 2"/>
+          <p:cNvSpPr>
+            <a:spLocks noGrp="1"/>
+          </p:cNvSpPr>
+          <p:nvPr>
+            <p:ph type="body" orient="vert" idx="1"/>
+          </p:nvPr>
+        </p:nvSpPr>
+        <p:spPr/>
+        <p:txBody>
+          <a:bodyPr vert="eaVert"/>
+          <a:lstStyle/>
+          <a:p>
+            <a:pPr lvl="0"/>
+            <a:r>
+              <a:rPr lang="en-US"/>
+              <a:t>Click to edit Master text styles</a:t>
+            </a:r>
+          </a:p>
+          <a:p>
+            <a:pPr lvl="1"/>
+            <a:r>
+              <a:rPr lang="en-US"/>
+              <a:t>Second level</a:t>
+            </a:r>
+          </a:p>
+          <a:p>
+            <a:pPr lvl="2"/>
+            <a:r>
+              <a:rPr lang="en-US"/>
+              <a:t>Third level</a:t>
+            </a:r>
+          </a:p>
+          <a:p>
+            <a:pPr lvl="3"/>
+            <a:r>
+              <a:rPr lang="en-US"/>
+              <a:t>Fourth level</a:t>
+            </a:r>
+          </a:p>
+          <a:p>
+            <a:pPr lvl="4"/>
+            <a:r>
+              <a:rPr lang="en-US"/>
+              <a:t>Fifth level</a:t>
+            </a:r>
+          </a:p>
+        </p:txBody>
+      </p:sp>
+      <p:sp>
+        <p:nvSpPr>
+          <p:cNvPr id="4" name="Date Placeholder 3"/>
+          <p:cNvSpPr>
+            <a:spLocks noGrp="1"/>
+          </p:cNvSpPr>
+          <p:nvPr>
+            <p:ph type="dt" sz="half" idx="10"/>
+          </p:nvPr>
+        </p:nvSpPr>
+        <p:spPr/>
+        <p:txBody>
+          <a:bodyPr/>
+          <a:lstStyle/>
+          <a:p>
+            <a:fld id="{1D8BD707-D9CF-40AE-B4C6-C98DA3205C09}" type="datetimeFigureOut">
+              <a:rPr lang="en-US" smtClean="0"/>
+              <a:pPr/>
+              <a:t>4/8/2026</a:t>
+            </a:fld>
+            <a:endParaRPr lang="en-US"/>
+          </a:p>
+        </p:txBody>
+      </p:sp>
+      <p:sp>
+        <p:nvSpPr>
+          <p:cNvPr id="5" name="Footer Placeholder 4"/>
+          <p:cNvSpPr>
+            <a:spLocks noGrp="1"/>
+          </p:cNvSpPr>
+          <p:nvPr>
+            <p:ph type="ftr" sz="quarter" idx="11"/>
+          </p:nvPr>
+        </p:nvSpPr>
+        <p:spPr/>
+        <p:txBody>
+          <a:bodyPr/>
+          <a:lstStyle/>
+          <a:p>
+            <a:endParaRPr lang="en-US"/>
+          </a:p>
+        </p:txBody>
+      </p:sp>
+      <p:sp>
+        <p:nvSpPr>
+          <p:cNvPr id="6" name="Slide Number Placeholder 5"/>
+          <p:cNvSpPr>
+            <a:spLocks noGrp="1"/>
+          </p:cNvSpPr>
+          <p:nvPr>
+            <p:ph type="sldNum" sz="quarter" idx="12"/>
+          </p:nvPr>
+        </p:nvSpPr>
+        <p:spPr/>
+        <p:txBody>
+          <a:bodyPr/>
+          <a:lstStyle/>
+          <a:p>
+            <a:fld id="{B6F15528-21DE-4FAA-801E-634DDDAF4B2B}" type="slidenum">
+              <a:rPr lang="en-US" smtClean="0"/>
+              <a:pPr/>
+              <a:t>‹N›</a:t>
+            </a:fld>
+            <a:endParaRPr lang="en-US"/>
+          </a:p>
+        </p:txBody>
+      </p:sp>
+    </p:spTree>
+    <p:extLst>
+      <p:ext uri="{BB962C8B-B14F-4D97-AF65-F5344CB8AC3E}">
+        <p14:creationId xmlns:p14="http://schemas.microsoft.com/office/powerpoint/2010/main" val="2588437087"/>
+      </p:ext>
+    </p:extLst>
+  </p:cSld>
+  <p:clrMapOvr>
+    <a:masterClrMapping/>
+  </p:clrMapOvr>
+</p:sldLayout>
+</file>
+
+<file path=ppt/slideLayouts/slideLayout12.xml><?xml version="1.0" encoding="utf-8"?>
+<p:sldLayout xmlns:a="http://schemas.openxmlformats.org/drawingml/2006/main" xmlns:r="http://schemas.openxmlformats.org/officeDocument/2006/relationships" xmlns:p="http://schemas.openxmlformats.org/presentationml/2006/main" type="vertTitleAndTx" preserve="1">
+  <p:cSld name="Vertical Title and Text">
+    <p:spTree>
+      <p:nvGrpSpPr>
+        <p:cNvPr id="1" name=""/>
+        <p:cNvGrpSpPr/>
+        <p:nvPr/>
+      </p:nvGrpSpPr>
+      <p:grpSpPr>
+        <a:xfrm>
+          <a:off x="0" y="0"/>
+          <a:ext cx="0" cy="0"/>
+          <a:chOff x="0" y="0"/>
+          <a:chExt cx="0" cy="0"/>
+        </a:xfrm>
+      </p:grpSpPr>
+      <p:sp>
+        <p:nvSpPr>
+          <p:cNvPr id="2" name="Vertical Title 1"/>
+          <p:cNvSpPr>
+            <a:spLocks noGrp="1"/>
+          </p:cNvSpPr>
+          <p:nvPr>
+            <p:ph type="title" orient="vert"/>
+          </p:nvPr>
+        </p:nvSpPr>
+        <p:spPr>
+          <a:xfrm>
+            <a:off x="4419600" y="183092"/>
+            <a:ext cx="1371600" cy="3901017"/>
+          </a:xfrm>
+        </p:spPr>
+        <p:txBody>
+          <a:bodyPr vert="eaVert"/>
+          <a:lstStyle/>
+          <a:p>
+            <a:r>
+              <a:rPr lang="en-US"/>
+              <a:t>Click to edit Master title style</a:t>
+            </a:r>
+          </a:p>
+        </p:txBody>
+      </p:sp>
+      <p:sp>
+        <p:nvSpPr>
+          <p:cNvPr id="3" name="Vertical Text Placeholder 2"/>
+          <p:cNvSpPr>
+            <a:spLocks noGrp="1"/>
+          </p:cNvSpPr>
+          <p:nvPr>
+            <p:ph type="body" orient="vert" idx="1"/>
+          </p:nvPr>
+        </p:nvSpPr>
+        <p:spPr>
+          <a:xfrm>
+            <a:off x="304800" y="183092"/>
+            <a:ext cx="4013200" cy="3901017"/>
+          </a:xfrm>
+        </p:spPr>
+        <p:txBody>
+          <a:bodyPr vert="eaVert"/>
+          <a:lstStyle/>
+          <a:p>
+            <a:pPr lvl="0"/>
+            <a:r>
+              <a:rPr lang="en-US"/>
+              <a:t>Click to edit Master text styles</a:t>
+            </a:r>
+          </a:p>
+          <a:p>
+            <a:pPr lvl="1"/>
+            <a:r>
+              <a:rPr lang="en-US"/>
+              <a:t>Second level</a:t>
+            </a:r>
+          </a:p>
+          <a:p>
+            <a:pPr lvl="2"/>
+            <a:r>
+              <a:rPr lang="en-US"/>
+              <a:t>Third level</a:t>
+            </a:r>
+          </a:p>
+          <a:p>
+            <a:pPr lvl="3"/>
+            <a:r>
+              <a:rPr lang="en-US"/>
+              <a:t>Fourth level</a:t>
+            </a:r>
+          </a:p>
+          <a:p>
+            <a:pPr lvl="4"/>
+            <a:r>
+              <a:rPr lang="en-US"/>
+              <a:t>Fifth level</a:t>
+            </a:r>
+          </a:p>
+        </p:txBody>
+      </p:sp>
+      <p:sp>
+        <p:nvSpPr>
+          <p:cNvPr id="4" name="Date Placeholder 3"/>
+          <p:cNvSpPr>
+            <a:spLocks noGrp="1"/>
+          </p:cNvSpPr>
+          <p:nvPr>
+            <p:ph type="dt" sz="half" idx="10"/>
+          </p:nvPr>
+        </p:nvSpPr>
+        <p:spPr/>
+        <p:txBody>
+          <a:bodyPr/>
+          <a:lstStyle/>
+          <a:p>
+            <a:fld id="{1D8BD707-D9CF-40AE-B4C6-C98DA3205C09}" type="datetimeFigureOut">
+              <a:rPr lang="en-US" smtClean="0"/>
+              <a:pPr/>
+              <a:t>4/8/2026</a:t>
+            </a:fld>
+            <a:endParaRPr lang="en-US"/>
+          </a:p>
+        </p:txBody>
+      </p:sp>
+      <p:sp>
+        <p:nvSpPr>
+          <p:cNvPr id="5" name="Footer Placeholder 4"/>
+          <p:cNvSpPr>
+            <a:spLocks noGrp="1"/>
+          </p:cNvSpPr>
+          <p:nvPr>
+            <p:ph type="ftr" sz="quarter" idx="11"/>
+          </p:nvPr>
+        </p:nvSpPr>
+        <p:spPr/>
+        <p:txBody>
+          <a:bodyPr/>
+          <a:lstStyle/>
+          <a:p>
+            <a:endParaRPr lang="en-US"/>
+          </a:p>
+        </p:txBody>
+      </p:sp>
+      <p:sp>
+        <p:nvSpPr>
+          <p:cNvPr id="6" name="Slide Number Placeholder 5"/>
+          <p:cNvSpPr>
+            <a:spLocks noGrp="1"/>
+          </p:cNvSpPr>
+          <p:nvPr>
+            <p:ph type="sldNum" sz="quarter" idx="12"/>
+          </p:nvPr>
+        </p:nvSpPr>
+        <p:spPr/>
+        <p:txBody>
+          <a:bodyPr/>
+          <a:lstStyle/>
+          <a:p>
+            <a:fld id="{B6F15528-21DE-4FAA-801E-634DDDAF4B2B}" type="slidenum">
+              <a:rPr lang="en-US" smtClean="0"/>
+              <a:pPr/>
+              <a:t>‹N›</a:t>
+            </a:fld>
+            <a:endParaRPr lang="en-US"/>
+          </a:p>
+        </p:txBody>
+      </p:sp>
+    </p:spTree>
+    <p:extLst>
+      <p:ext uri="{BB962C8B-B14F-4D97-AF65-F5344CB8AC3E}">
+        <p14:creationId xmlns:p14="http://schemas.microsoft.com/office/powerpoint/2010/main" val="279464198"/>
+      </p:ext>
+    </p:extLst>
+  </p:cSld>
+  <p:clrMapOvr>
+    <a:masterClrMapping/>
+  </p:clrMapOvr>
+</p:sldLayout>
+</file>
+
+<file path=ppt/slideLayouts/slideLayout2.xml><?xml version="1.0" encoding="utf-8"?>
+<p:sldLayout xmlns:a="http://schemas.openxmlformats.org/drawingml/2006/main" xmlns:r="http://schemas.openxmlformats.org/officeDocument/2006/relationships" xmlns:p="http://schemas.openxmlformats.org/presentationml/2006/main" type="title" preserve="1">
+  <p:cSld name="Title Slide">
+    <p:spTree>
+      <p:nvGrpSpPr>
+        <p:cNvPr id="1" name=""/>
+        <p:cNvGrpSpPr/>
+        <p:nvPr/>
+      </p:nvGrpSpPr>
+      <p:grpSpPr>
+        <a:xfrm>
+          <a:off x="0" y="0"/>
+          <a:ext cx="0" cy="0"/>
+          <a:chOff x="0" y="0"/>
+          <a:chExt cx="0" cy="0"/>
+        </a:xfrm>
+      </p:grpSpPr>
+      <p:sp>
+        <p:nvSpPr>
+          <p:cNvPr id="2" name="Title 1"/>
+          <p:cNvSpPr>
+            <a:spLocks noGrp="1"/>
+          </p:cNvSpPr>
+          <p:nvPr>
+            <p:ph type="ctrTitle"/>
+          </p:nvPr>
+        </p:nvSpPr>
+        <p:spPr>
+          <a:xfrm>
+            <a:off x="457200" y="1420283"/>
+            <a:ext cx="5181600" cy="980017"/>
+          </a:xfrm>
+        </p:spPr>
+        <p:txBody>
+          <a:bodyPr/>
+          <a:lstStyle/>
+          <a:p>
+            <a:r>
+              <a:rPr lang="en-US"/>
+              <a:t>Click to edit Master title style</a:t>
+            </a:r>
+          </a:p>
+        </p:txBody>
+      </p:sp>
+      <p:sp>
+        <p:nvSpPr>
+          <p:cNvPr id="3" name="Subtitle 2"/>
+          <p:cNvSpPr>
+            <a:spLocks noGrp="1"/>
+          </p:cNvSpPr>
+          <p:nvPr>
+            <p:ph type="subTitle" idx="1"/>
+          </p:nvPr>
+        </p:nvSpPr>
+        <p:spPr>
+          <a:xfrm>
+            <a:off x="914400" y="2590800"/>
+            <a:ext cx="4267200" cy="1168400"/>
+          </a:xfrm>
+        </p:spPr>
+        <p:txBody>
+          <a:bodyPr/>
+          <a:lstStyle>
+            <a:lvl1pPr marL="0" indent="0" algn="ctr">
+              <a:buNone/>
+              <a:defRPr>
+                <a:solidFill>
+                  <a:schemeClr val="tx1">
+                    <a:tint val="75000"/>
+                  </a:schemeClr>
+                </a:solidFill>
+              </a:defRPr>
+            </a:lvl1pPr>
+            <a:lvl2pPr marL="304815" indent="0" algn="ctr">
+              <a:buNone/>
+              <a:defRPr>
+                <a:solidFill>
+                  <a:schemeClr val="tx1">
+                    <a:tint val="75000"/>
+                  </a:schemeClr>
+                </a:solidFill>
+              </a:defRPr>
+            </a:lvl2pPr>
+            <a:lvl3pPr marL="609630" indent="0" algn="ctr">
+              <a:buNone/>
+              <a:defRPr>
+                <a:solidFill>
+                  <a:schemeClr val="tx1">
+                    <a:tint val="75000"/>
+                  </a:schemeClr>
+                </a:solidFill>
+              </a:defRPr>
+            </a:lvl3pPr>
+            <a:lvl4pPr marL="914446" indent="0" algn="ctr">
+              <a:buNone/>
+              <a:defRPr>
+                <a:solidFill>
+                  <a:schemeClr val="tx1">
+                    <a:tint val="75000"/>
+                  </a:schemeClr>
+                </a:solidFill>
+              </a:defRPr>
+            </a:lvl4pPr>
+            <a:lvl5pPr marL="1219261" indent="0" algn="ctr">
+              <a:buNone/>
+              <a:defRPr>
+                <a:solidFill>
+                  <a:schemeClr val="tx1">
+                    <a:tint val="75000"/>
+                  </a:schemeClr>
+                </a:solidFill>
+              </a:defRPr>
+            </a:lvl5pPr>
+            <a:lvl6pPr marL="1524076" indent="0" algn="ctr">
+              <a:buNone/>
+              <a:defRPr>
+                <a:solidFill>
+                  <a:schemeClr val="tx1">
+                    <a:tint val="75000"/>
+                  </a:schemeClr>
+                </a:solidFill>
+              </a:defRPr>
+            </a:lvl6pPr>
+            <a:lvl7pPr marL="1828891" indent="0" algn="ctr">
+              <a:buNone/>
+              <a:defRPr>
+                <a:solidFill>
+                  <a:schemeClr val="tx1">
+                    <a:tint val="75000"/>
+                  </a:schemeClr>
+                </a:solidFill>
+              </a:defRPr>
+            </a:lvl7pPr>
+            <a:lvl8pPr marL="2133707" indent="0" algn="ctr">
+              <a:buNone/>
+              <a:defRPr>
+                <a:solidFill>
+                  <a:schemeClr val="tx1">
+                    <a:tint val="75000"/>
+                  </a:schemeClr>
+                </a:solidFill>
+              </a:defRPr>
+            </a:lvl8pPr>
+            <a:lvl9pPr marL="2438522" indent="0" algn="ctr">
+              <a:buNone/>
+              <a:defRPr>
+                <a:solidFill>
+                  <a:schemeClr val="tx1">
+                    <a:tint val="75000"/>
+                  </a:schemeClr>
+                </a:solidFill>
+              </a:defRPr>
+            </a:lvl9pPr>
+          </a:lstStyle>
+          <a:p>
+            <a:r>
+              <a:rPr lang="en-US"/>
+              <a:t>Click to edit Master subtitle style</a:t>
+            </a:r>
+          </a:p>
+        </p:txBody>
+      </p:sp>
+      <p:sp>
+        <p:nvSpPr>
+          <p:cNvPr id="4" name="Date Placeholder 3"/>
+          <p:cNvSpPr>
+            <a:spLocks noGrp="1"/>
+          </p:cNvSpPr>
+          <p:nvPr>
+            <p:ph type="dt" sz="half" idx="10"/>
+          </p:nvPr>
+        </p:nvSpPr>
+        <p:spPr/>
+        <p:txBody>
+          <a:bodyPr/>
+          <a:lstStyle/>
+          <a:p>
+            <a:fld id="{1D8BD707-D9CF-40AE-B4C6-C98DA3205C09}" type="datetimeFigureOut">
+              <a:rPr lang="en-US" smtClean="0"/>
+              <a:pPr/>
+              <a:t>4/8/2026</a:t>
+            </a:fld>
+            <a:endParaRPr lang="en-US"/>
+          </a:p>
+        </p:txBody>
+      </p:sp>
+      <p:sp>
+        <p:nvSpPr>
+          <p:cNvPr id="5" name="Footer Placeholder 4"/>
+          <p:cNvSpPr>
+            <a:spLocks noGrp="1"/>
+          </p:cNvSpPr>
+          <p:nvPr>
+            <p:ph type="ftr" sz="quarter" idx="11"/>
+          </p:nvPr>
+        </p:nvSpPr>
+        <p:spPr/>
+        <p:txBody>
+          <a:bodyPr/>
+          <a:lstStyle/>
+          <a:p>
+            <a:endParaRPr lang="en-US"/>
+          </a:p>
+        </p:txBody>
+      </p:sp>
+      <p:sp>
+        <p:nvSpPr>
+          <p:cNvPr id="6" name="Slide Number Placeholder 5"/>
+          <p:cNvSpPr>
+            <a:spLocks noGrp="1"/>
+          </p:cNvSpPr>
+          <p:nvPr>
+            <p:ph type="sldNum" sz="quarter" idx="12"/>
+          </p:nvPr>
+        </p:nvSpPr>
+        <p:spPr/>
+        <p:txBody>
+          <a:bodyPr/>
+          <a:lstStyle/>
+          <a:p>
+            <a:fld id="{B6F15528-21DE-4FAA-801E-634DDDAF4B2B}" type="slidenum">
+              <a:rPr lang="en-US" smtClean="0"/>
+              <a:pPr/>
+              <a:t>‹N›</a:t>
+            </a:fld>
+            <a:endParaRPr lang="en-US"/>
+          </a:p>
+        </p:txBody>
+      </p:sp>
+    </p:spTree>
+    <p:extLst>
+      <p:ext uri="{BB962C8B-B14F-4D97-AF65-F5344CB8AC3E}">
+        <p14:creationId xmlns:p14="http://schemas.microsoft.com/office/powerpoint/2010/main" val="1799621486"/>
+      </p:ext>
+    </p:extLst>
+  </p:cSld>
+  <p:clrMapOvr>
+    <a:masterClrMapping/>
+  </p:clrMapOvr>
+</p:sldLayout>
+</file>
+
+<file path=ppt/slideLayouts/slideLayout3.xml><?xml version="1.0" encoding="utf-8"?>
+<p:sldLayout xmlns:a="http://schemas.openxmlformats.org/drawingml/2006/main" xmlns:r="http://schemas.openxmlformats.org/officeDocument/2006/relationships" xmlns:p="http://schemas.openxmlformats.org/presentationml/2006/main" type="obj" preserve="1">
+  <p:cSld name="Title and Content">
+    <p:spTree>
+      <p:nvGrpSpPr>
+        <p:cNvPr id="1" name=""/>
+        <p:cNvGrpSpPr/>
+        <p:nvPr/>
+      </p:nvGrpSpPr>
+      <p:grpSpPr>
+        <a:xfrm>
+          <a:off x="0" y="0"/>
+          <a:ext cx="0" cy="0"/>
+          <a:chOff x="0" y="0"/>
+          <a:chExt cx="0" cy="0"/>
+        </a:xfrm>
+      </p:grpSpPr>
+      <p:sp>
+        <p:nvSpPr>
+          <p:cNvPr id="2" name="Title 1"/>
+          <p:cNvSpPr>
+            <a:spLocks noGrp="1"/>
+          </p:cNvSpPr>
+          <p:nvPr>
+            <p:ph type="title"/>
+          </p:nvPr>
+        </p:nvSpPr>
+        <p:spPr/>
+        <p:txBody>
+          <a:bodyPr/>
+          <a:lstStyle/>
+          <a:p>
+            <a:r>
+              <a:rPr lang="en-US"/>
+              <a:t>Click to edit Master title style</a:t>
+            </a:r>
+          </a:p>
+        </p:txBody>
+      </p:sp>
+      <p:sp>
+        <p:nvSpPr>
+          <p:cNvPr id="3" name="Content Placeholder 2"/>
+          <p:cNvSpPr>
+            <a:spLocks noGrp="1"/>
+          </p:cNvSpPr>
+          <p:nvPr>
+            <p:ph idx="1"/>
+          </p:nvPr>
+        </p:nvSpPr>
+        <p:spPr/>
+        <p:txBody>
+          <a:bodyPr/>
+          <a:lstStyle/>
+          <a:p>
+            <a:pPr lvl="0"/>
+            <a:r>
+              <a:rPr lang="en-US"/>
+              <a:t>Click to edit Master text styles</a:t>
+            </a:r>
+          </a:p>
+          <a:p>
+            <a:pPr lvl="1"/>
+            <a:r>
+              <a:rPr lang="en-US"/>
+              <a:t>Second level</a:t>
+            </a:r>
+          </a:p>
+          <a:p>
+            <a:pPr lvl="2"/>
+            <a:r>
+              <a:rPr lang="en-US"/>
+              <a:t>Third level</a:t>
+            </a:r>
+          </a:p>
+          <a:p>
+            <a:pPr lvl="3"/>
+            <a:r>
+              <a:rPr lang="en-US"/>
+              <a:t>Fourth level</a:t>
+            </a:r>
+          </a:p>
+          <a:p>
+            <a:pPr lvl="4"/>
+            <a:r>
+              <a:rPr lang="en-US"/>
+              <a:t>Fifth level</a:t>
+            </a:r>
+          </a:p>
+        </p:txBody>
+      </p:sp>
+      <p:sp>
+        <p:nvSpPr>
+          <p:cNvPr id="4" name="Date Placeholder 3"/>
+          <p:cNvSpPr>
+            <a:spLocks noGrp="1"/>
+          </p:cNvSpPr>
+          <p:nvPr>
+            <p:ph type="dt" sz="half" idx="10"/>
+          </p:nvPr>
+        </p:nvSpPr>
+        <p:spPr/>
+        <p:txBody>
+          <a:bodyPr/>
+          <a:lstStyle/>
+          <a:p>
+            <a:fld id="{1D8BD707-D9CF-40AE-B4C6-C98DA3205C09}" type="datetimeFigureOut">
+              <a:rPr lang="en-US" smtClean="0"/>
+              <a:pPr/>
+              <a:t>4/8/2026</a:t>
+            </a:fld>
+            <a:endParaRPr lang="en-US"/>
+          </a:p>
+        </p:txBody>
+      </p:sp>
+      <p:sp>
+        <p:nvSpPr>
+          <p:cNvPr id="5" name="Footer Placeholder 4"/>
+          <p:cNvSpPr>
+            <a:spLocks noGrp="1"/>
+          </p:cNvSpPr>
+          <p:nvPr>
+            <p:ph type="ftr" sz="quarter" idx="11"/>
+          </p:nvPr>
+        </p:nvSpPr>
+        <p:spPr/>
+        <p:txBody>
+          <a:bodyPr/>
+          <a:lstStyle/>
+          <a:p>
+            <a:endParaRPr lang="en-US"/>
+          </a:p>
+        </p:txBody>
+      </p:sp>
+      <p:sp>
+        <p:nvSpPr>
+          <p:cNvPr id="6" name="Slide Number Placeholder 5"/>
+          <p:cNvSpPr>
+            <a:spLocks noGrp="1"/>
+          </p:cNvSpPr>
+          <p:nvPr>
+            <p:ph type="sldNum" sz="quarter" idx="12"/>
+          </p:nvPr>
+        </p:nvSpPr>
+        <p:spPr/>
+        <p:txBody>
+          <a:bodyPr/>
+          <a:lstStyle/>
+          <a:p>
+            <a:fld id="{B6F15528-21DE-4FAA-801E-634DDDAF4B2B}" type="slidenum">
+              <a:rPr lang="en-US" smtClean="0"/>
+              <a:pPr/>
+              <a:t>‹N›</a:t>
+            </a:fld>
+            <a:endParaRPr lang="en-US"/>
+          </a:p>
+        </p:txBody>
+      </p:sp>
+    </p:spTree>
+    <p:extLst>
+      <p:ext uri="{BB962C8B-B14F-4D97-AF65-F5344CB8AC3E}">
+        <p14:creationId xmlns:p14="http://schemas.microsoft.com/office/powerpoint/2010/main" val="1653448235"/>
+      </p:ext>
+    </p:extLst>
+  </p:cSld>
+  <p:clrMapOvr>
+    <a:masterClrMapping/>
+  </p:clrMapOvr>
+</p:sldLayout>
+</file>
+
+<file path=ppt/slideLayouts/slideLayout4.xml><?xml version="1.0" encoding="utf-8"?>
+<p:sldLayout xmlns:a="http://schemas.openxmlformats.org/drawingml/2006/main" xmlns:r="http://schemas.openxmlformats.org/officeDocument/2006/relationships" xmlns:p="http://schemas.openxmlformats.org/presentationml/2006/main" type="secHead" preserve="1">
+  <p:cSld name="Section Header">
+    <p:spTree>
+      <p:nvGrpSpPr>
+        <p:cNvPr id="1" name=""/>
+        <p:cNvGrpSpPr/>
+        <p:nvPr/>
+      </p:nvGrpSpPr>
+      <p:grpSpPr>
+        <a:xfrm>
+          <a:off x="0" y="0"/>
+          <a:ext cx="0" cy="0"/>
+          <a:chOff x="0" y="0"/>
+          <a:chExt cx="0" cy="0"/>
+        </a:xfrm>
+      </p:grpSpPr>
+      <p:sp>
+        <p:nvSpPr>
+          <p:cNvPr id="2" name="Title 1"/>
+          <p:cNvSpPr>
+            <a:spLocks noGrp="1"/>
+          </p:cNvSpPr>
+          <p:nvPr>
+            <p:ph type="title"/>
+          </p:nvPr>
+        </p:nvSpPr>
+        <p:spPr>
+          <a:xfrm>
+            <a:off x="481542" y="2937934"/>
+            <a:ext cx="5181600" cy="908050"/>
+          </a:xfrm>
+        </p:spPr>
+        <p:txBody>
+          <a:bodyPr anchor="t"/>
+          <a:lstStyle>
+            <a:lvl1pPr algn="l">
+              <a:defRPr sz="2667" b="1" cap="all"/>
+            </a:lvl1pPr>
+          </a:lstStyle>
+          <a:p>
+            <a:r>
+              <a:rPr lang="en-US"/>
+              <a:t>Click to edit Master title style</a:t>
+            </a:r>
+          </a:p>
+        </p:txBody>
+      </p:sp>
+      <p:sp>
+        <p:nvSpPr>
+          <p:cNvPr id="3" name="Text Placeholder 2"/>
+          <p:cNvSpPr>
+            <a:spLocks noGrp="1"/>
+          </p:cNvSpPr>
+          <p:nvPr>
+            <p:ph type="body" idx="1"/>
+          </p:nvPr>
+        </p:nvSpPr>
+        <p:spPr>
+          <a:xfrm>
+            <a:off x="481542" y="1937809"/>
+            <a:ext cx="5181600" cy="1000125"/>
+          </a:xfrm>
+        </p:spPr>
+        <p:txBody>
+          <a:bodyPr anchor="b"/>
+          <a:lstStyle>
+            <a:lvl1pPr marL="0" indent="0">
+              <a:buNone/>
+              <a:defRPr sz="1333">
+                <a:solidFill>
+                  <a:schemeClr val="tx1">
+                    <a:tint val="75000"/>
+                  </a:schemeClr>
+                </a:solidFill>
+              </a:defRPr>
+            </a:lvl1pPr>
+            <a:lvl2pPr marL="304815" indent="0">
+              <a:buNone/>
+              <a:defRPr sz="1200">
+                <a:solidFill>
+                  <a:schemeClr val="tx1">
+                    <a:tint val="75000"/>
+                  </a:schemeClr>
+                </a:solidFill>
+              </a:defRPr>
+            </a:lvl2pPr>
+            <a:lvl3pPr marL="609630" indent="0">
+              <a:buNone/>
+              <a:defRPr sz="1067">
+                <a:solidFill>
+                  <a:schemeClr val="tx1">
+                    <a:tint val="75000"/>
+                  </a:schemeClr>
+                </a:solidFill>
+              </a:defRPr>
+            </a:lvl3pPr>
+            <a:lvl4pPr marL="914446" indent="0">
+              <a:buNone/>
+              <a:defRPr sz="933">
+                <a:solidFill>
+                  <a:schemeClr val="tx1">
+                    <a:tint val="75000"/>
+                  </a:schemeClr>
+                </a:solidFill>
+              </a:defRPr>
+            </a:lvl4pPr>
+            <a:lvl5pPr marL="1219261" indent="0">
+              <a:buNone/>
+              <a:defRPr sz="933">
+                <a:solidFill>
+                  <a:schemeClr val="tx1">
+                    <a:tint val="75000"/>
+                  </a:schemeClr>
+                </a:solidFill>
+              </a:defRPr>
+            </a:lvl5pPr>
+            <a:lvl6pPr marL="1524076" indent="0">
+              <a:buNone/>
+              <a:defRPr sz="933">
+                <a:solidFill>
+                  <a:schemeClr val="tx1">
+                    <a:tint val="75000"/>
+                  </a:schemeClr>
+                </a:solidFill>
+              </a:defRPr>
+            </a:lvl6pPr>
+            <a:lvl7pPr marL="1828891" indent="0">
+              <a:buNone/>
+              <a:defRPr sz="933">
+                <a:solidFill>
+                  <a:schemeClr val="tx1">
+                    <a:tint val="75000"/>
+                  </a:schemeClr>
+                </a:solidFill>
+              </a:defRPr>
+            </a:lvl7pPr>
+            <a:lvl8pPr marL="2133707" indent="0">
+              <a:buNone/>
+              <a:defRPr sz="933">
+                <a:solidFill>
+                  <a:schemeClr val="tx1">
+                    <a:tint val="75000"/>
+                  </a:schemeClr>
+                </a:solidFill>
+              </a:defRPr>
+            </a:lvl8pPr>
+            <a:lvl9pPr marL="2438522" indent="0">
+              <a:buNone/>
+              <a:defRPr sz="933">
+                <a:solidFill>
+                  <a:schemeClr val="tx1">
+                    <a:tint val="75000"/>
+                  </a:schemeClr>
+                </a:solidFill>
+              </a:defRPr>
+            </a:lvl9pPr>
+          </a:lstStyle>
+          <a:p>
+            <a:pPr lvl="0"/>
+            <a:r>
+              <a:rPr lang="en-US"/>
+              <a:t>Click to edit Master text styles</a:t>
+            </a:r>
+          </a:p>
+        </p:txBody>
+      </p:sp>
+      <p:sp>
+        <p:nvSpPr>
+          <p:cNvPr id="4" name="Date Placeholder 3"/>
+          <p:cNvSpPr>
+            <a:spLocks noGrp="1"/>
+          </p:cNvSpPr>
+          <p:nvPr>
+            <p:ph type="dt" sz="half" idx="10"/>
+          </p:nvPr>
+        </p:nvSpPr>
+        <p:spPr/>
+        <p:txBody>
+          <a:bodyPr/>
+          <a:lstStyle/>
+          <a:p>
+            <a:fld id="{1D8BD707-D9CF-40AE-B4C6-C98DA3205C09}" type="datetimeFigureOut">
+              <a:rPr lang="en-US" smtClean="0"/>
+              <a:pPr/>
+              <a:t>4/8/2026</a:t>
+            </a:fld>
+            <a:endParaRPr lang="en-US"/>
+          </a:p>
+        </p:txBody>
+      </p:sp>
+      <p:sp>
+        <p:nvSpPr>
+          <p:cNvPr id="5" name="Footer Placeholder 4"/>
+          <p:cNvSpPr>
+            <a:spLocks noGrp="1"/>
+          </p:cNvSpPr>
+          <p:nvPr>
+            <p:ph type="ftr" sz="quarter" idx="11"/>
+          </p:nvPr>
+        </p:nvSpPr>
+        <p:spPr/>
+        <p:txBody>
+          <a:bodyPr/>
+          <a:lstStyle/>
+          <a:p>
+            <a:endParaRPr lang="en-US"/>
+          </a:p>
+        </p:txBody>
+      </p:sp>
+      <p:sp>
+        <p:nvSpPr>
+          <p:cNvPr id="6" name="Slide Number Placeholder 5"/>
+          <p:cNvSpPr>
+            <a:spLocks noGrp="1"/>
+          </p:cNvSpPr>
+          <p:nvPr>
+            <p:ph type="sldNum" sz="quarter" idx="12"/>
+          </p:nvPr>
+        </p:nvSpPr>
+        <p:spPr/>
+        <p:txBody>
+          <a:bodyPr/>
+          <a:lstStyle/>
+          <a:p>
+            <a:fld id="{B6F15528-21DE-4FAA-801E-634DDDAF4B2B}" type="slidenum">
+              <a:rPr lang="en-US" smtClean="0"/>
+              <a:pPr/>
+              <a:t>‹N›</a:t>
+            </a:fld>
+            <a:endParaRPr lang="en-US"/>
+          </a:p>
+        </p:txBody>
+      </p:sp>
+    </p:spTree>
+    <p:extLst>
+      <p:ext uri="{BB962C8B-B14F-4D97-AF65-F5344CB8AC3E}">
+        <p14:creationId xmlns:p14="http://schemas.microsoft.com/office/powerpoint/2010/main" val="3033646140"/>
+      </p:ext>
+    </p:extLst>
+  </p:cSld>
+  <p:clrMapOvr>
+    <a:masterClrMapping/>
+  </p:clrMapOvr>
+</p:sldLayout>
+</file>
+
+<file path=ppt/slideLayouts/slideLayout5.xml><?xml version="1.0" encoding="utf-8"?>
+<p:sldLayout xmlns:a="http://schemas.openxmlformats.org/drawingml/2006/main" xmlns:r="http://schemas.openxmlformats.org/officeDocument/2006/relationships" xmlns:p="http://schemas.openxmlformats.org/presentationml/2006/main" type="twoObj" preserve="1">
+  <p:cSld name="Two Content">
+    <p:spTree>
+      <p:nvGrpSpPr>
+        <p:cNvPr id="1" name=""/>
+        <p:cNvGrpSpPr/>
+        <p:nvPr/>
+      </p:nvGrpSpPr>
+      <p:grpSpPr>
+        <a:xfrm>
+          <a:off x="0" y="0"/>
+          <a:ext cx="0" cy="0"/>
+          <a:chOff x="0" y="0"/>
+          <a:chExt cx="0" cy="0"/>
+        </a:xfrm>
+      </p:grpSpPr>
+      <p:sp>
+        <p:nvSpPr>
+          <p:cNvPr id="2" name="Title 1"/>
+          <p:cNvSpPr>
+            <a:spLocks noGrp="1"/>
+          </p:cNvSpPr>
+          <p:nvPr>
+            <p:ph type="title"/>
+          </p:nvPr>
+        </p:nvSpPr>
+        <p:spPr/>
+        <p:txBody>
+          <a:bodyPr/>
+          <a:lstStyle/>
+          <a:p>
+            <a:r>
+              <a:rPr lang="en-US"/>
+              <a:t>Click to edit Master title style</a:t>
+            </a:r>
+          </a:p>
+        </p:txBody>
+      </p:sp>
+      <p:sp>
+        <p:nvSpPr>
+          <p:cNvPr id="3" name="Content Placeholder 2"/>
+          <p:cNvSpPr>
+            <a:spLocks noGrp="1"/>
+          </p:cNvSpPr>
+          <p:nvPr>
+            <p:ph sz="half" idx="1"/>
+          </p:nvPr>
+        </p:nvSpPr>
+        <p:spPr>
+          <a:xfrm>
+            <a:off x="304800" y="1066800"/>
+            <a:ext cx="2692400" cy="3017309"/>
+          </a:xfrm>
+        </p:spPr>
+        <p:txBody>
+          <a:bodyPr/>
+          <a:lstStyle>
+            <a:lvl1pPr>
+              <a:defRPr sz="1867"/>
+            </a:lvl1pPr>
+            <a:lvl2pPr>
+              <a:defRPr sz="1600"/>
+            </a:lvl2pPr>
+            <a:lvl3pPr>
+              <a:defRPr sz="1333"/>
+            </a:lvl3pPr>
+            <a:lvl4pPr>
+              <a:defRPr sz="1200"/>
+            </a:lvl4pPr>
+            <a:lvl5pPr>
+              <a:defRPr sz="1200"/>
+            </a:lvl5pPr>
+            <a:lvl6pPr>
+              <a:defRPr sz="1200"/>
+            </a:lvl6pPr>
+            <a:lvl7pPr>
+              <a:defRPr sz="1200"/>
+            </a:lvl7pPr>
+            <a:lvl8pPr>
+              <a:defRPr sz="1200"/>
+            </a:lvl8pPr>
+            <a:lvl9pPr>
+              <a:defRPr sz="1200"/>
+            </a:lvl9pPr>
+          </a:lstStyle>
+          <a:p>
+            <a:pPr lvl="0"/>
+            <a:r>
+              <a:rPr lang="en-US"/>
+              <a:t>Click to edit Master text styles</a:t>
+            </a:r>
+          </a:p>
+          <a:p>
+            <a:pPr lvl="1"/>
+            <a:r>
+              <a:rPr lang="en-US"/>
+              <a:t>Second level</a:t>
+            </a:r>
+          </a:p>
+          <a:p>
+            <a:pPr lvl="2"/>
+            <a:r>
+              <a:rPr lang="en-US"/>
+              <a:t>Third level</a:t>
+            </a:r>
+          </a:p>
+          <a:p>
+            <a:pPr lvl="3"/>
+            <a:r>
+              <a:rPr lang="en-US"/>
+              <a:t>Fourth level</a:t>
+            </a:r>
+          </a:p>
+          <a:p>
+            <a:pPr lvl="4"/>
+            <a:r>
+              <a:rPr lang="en-US"/>
+              <a:t>Fifth level</a:t>
+            </a:r>
+          </a:p>
+        </p:txBody>
+      </p:sp>
+      <p:sp>
+        <p:nvSpPr>
+          <p:cNvPr id="4" name="Content Placeholder 3"/>
+          <p:cNvSpPr>
+            <a:spLocks noGrp="1"/>
+          </p:cNvSpPr>
+          <p:nvPr>
+            <p:ph sz="half" idx="2"/>
+          </p:nvPr>
+        </p:nvSpPr>
+        <p:spPr>
+          <a:xfrm>
+            <a:off x="3098800" y="1066800"/>
+            <a:ext cx="2692400" cy="3017309"/>
+          </a:xfrm>
+        </p:spPr>
+        <p:txBody>
+          <a:bodyPr/>
+          <a:lstStyle>
+            <a:lvl1pPr>
+              <a:defRPr sz="1867"/>
+            </a:lvl1pPr>
+            <a:lvl2pPr>
+              <a:defRPr sz="1600"/>
+            </a:lvl2pPr>
+            <a:lvl3pPr>
+              <a:defRPr sz="1333"/>
+            </a:lvl3pPr>
+            <a:lvl4pPr>
+              <a:defRPr sz="1200"/>
+            </a:lvl4pPr>
+            <a:lvl5pPr>
+              <a:defRPr sz="1200"/>
+            </a:lvl5pPr>
+            <a:lvl6pPr>
+              <a:defRPr sz="1200"/>
+            </a:lvl6pPr>
+            <a:lvl7pPr>
+              <a:defRPr sz="1200"/>
+            </a:lvl7pPr>
+            <a:lvl8pPr>
+              <a:defRPr sz="1200"/>
+            </a:lvl8pPr>
+            <a:lvl9pPr>
+              <a:defRPr sz="1200"/>
+            </a:lvl9pPr>
+          </a:lstStyle>
+          <a:p>
+            <a:pPr lvl="0"/>
+            <a:r>
+              <a:rPr lang="en-US"/>
+              <a:t>Click to edit Master text styles</a:t>
+            </a:r>
+          </a:p>
+          <a:p>
+            <a:pPr lvl="1"/>
+            <a:r>
+              <a:rPr lang="en-US"/>
+              <a:t>Second level</a:t>
+            </a:r>
+          </a:p>
+          <a:p>
+            <a:pPr lvl="2"/>
+            <a:r>
+              <a:rPr lang="en-US"/>
+              <a:t>Third level</a:t>
+            </a:r>
+          </a:p>
+          <a:p>
+            <a:pPr lvl="3"/>
+            <a:r>
+              <a:rPr lang="en-US"/>
+              <a:t>Fourth level</a:t>
+            </a:r>
+          </a:p>
+          <a:p>
+            <a:pPr lvl="4"/>
+            <a:r>
+              <a:rPr lang="en-US"/>
+              <a:t>Fifth level</a:t>
+            </a:r>
+          </a:p>
+        </p:txBody>
+      </p:sp>
+      <p:sp>
+        <p:nvSpPr>
+          <p:cNvPr id="5" name="Date Placeholder 4"/>
+          <p:cNvSpPr>
+            <a:spLocks noGrp="1"/>
+          </p:cNvSpPr>
+          <p:nvPr>
+            <p:ph type="dt" sz="half" idx="10"/>
+          </p:nvPr>
+        </p:nvSpPr>
+        <p:spPr/>
+        <p:txBody>
+          <a:bodyPr/>
+          <a:lstStyle/>
+          <a:p>
+            <a:fld id="{1D8BD707-D9CF-40AE-B4C6-C98DA3205C09}" type="datetimeFigureOut">
+              <a:rPr lang="en-US" smtClean="0"/>
+              <a:pPr/>
+              <a:t>4/8/2026</a:t>
+            </a:fld>
+            <a:endParaRPr lang="en-US"/>
+          </a:p>
+        </p:txBody>
+      </p:sp>
+      <p:sp>
+        <p:nvSpPr>
+          <p:cNvPr id="6" name="Footer Placeholder 5"/>
+          <p:cNvSpPr>
+            <a:spLocks noGrp="1"/>
+          </p:cNvSpPr>
+          <p:nvPr>
+            <p:ph type="ftr" sz="quarter" idx="11"/>
+          </p:nvPr>
+        </p:nvSpPr>
+        <p:spPr/>
+        <p:txBody>
+          <a:bodyPr/>
+          <a:lstStyle/>
+          <a:p>
+            <a:endParaRPr lang="en-US"/>
+          </a:p>
+        </p:txBody>
+      </p:sp>
+      <p:sp>
+        <p:nvSpPr>
+          <p:cNvPr id="7" name="Slide Number Placeholder 6"/>
+          <p:cNvSpPr>
+            <a:spLocks noGrp="1"/>
+          </p:cNvSpPr>
+          <p:nvPr>
+            <p:ph type="sldNum" sz="quarter" idx="12"/>
+          </p:nvPr>
+        </p:nvSpPr>
+        <p:spPr/>
+        <p:txBody>
+          <a:bodyPr/>
+          <a:lstStyle/>
+          <a:p>
+            <a:fld id="{B6F15528-21DE-4FAA-801E-634DDDAF4B2B}" type="slidenum">
+              <a:rPr lang="en-US" smtClean="0"/>
+              <a:pPr/>
+              <a:t>‹N›</a:t>
+            </a:fld>
+            <a:endParaRPr lang="en-US"/>
+          </a:p>
+        </p:txBody>
+      </p:sp>
+    </p:spTree>
+    <p:extLst>
+      <p:ext uri="{BB962C8B-B14F-4D97-AF65-F5344CB8AC3E}">
+        <p14:creationId xmlns:p14="http://schemas.microsoft.com/office/powerpoint/2010/main" val="3859312789"/>
+      </p:ext>
+    </p:extLst>
+  </p:cSld>
+  <p:clrMapOvr>
+    <a:masterClrMapping/>
+  </p:clrMapOvr>
+</p:sldLayout>
+</file>
+
+<file path=ppt/slideLayouts/slideLayout6.xml><?xml version="1.0" encoding="utf-8"?>
+<p:sldLayout xmlns:a="http://schemas.openxmlformats.org/drawingml/2006/main" xmlns:r="http://schemas.openxmlformats.org/officeDocument/2006/relationships" xmlns:p="http://schemas.openxmlformats.org/presentationml/2006/main" type="twoTxTwoObj" preserve="1">
+  <p:cSld name="Comparison">
+    <p:spTree>
+      <p:nvGrpSpPr>
+        <p:cNvPr id="1" name=""/>
+        <p:cNvGrpSpPr/>
+        <p:nvPr/>
+      </p:nvGrpSpPr>
+      <p:grpSpPr>
+        <a:xfrm>
+          <a:off x="0" y="0"/>
+          <a:ext cx="0" cy="0"/>
+          <a:chOff x="0" y="0"/>
+          <a:chExt cx="0" cy="0"/>
+        </a:xfrm>
+      </p:grpSpPr>
+      <p:sp>
+        <p:nvSpPr>
+          <p:cNvPr id="2" name="Title 1"/>
+          <p:cNvSpPr>
+            <a:spLocks noGrp="1"/>
+          </p:cNvSpPr>
+          <p:nvPr>
+            <p:ph type="title"/>
+          </p:nvPr>
+        </p:nvSpPr>
+        <p:spPr/>
+        <p:txBody>
+          <a:bodyPr/>
+          <a:lstStyle>
+            <a:lvl1pPr>
+              <a:defRPr/>
+            </a:lvl1pPr>
+          </a:lstStyle>
+          <a:p>
+            <a:r>
+              <a:rPr lang="en-US"/>
+              <a:t>Click to edit Master title style</a:t>
+            </a:r>
+          </a:p>
+        </p:txBody>
+      </p:sp>
+      <p:sp>
+        <p:nvSpPr>
+          <p:cNvPr id="3" name="Text Placeholder 2"/>
+          <p:cNvSpPr>
+            <a:spLocks noGrp="1"/>
+          </p:cNvSpPr>
+          <p:nvPr>
+            <p:ph type="body" idx="1"/>
+          </p:nvPr>
+        </p:nvSpPr>
+        <p:spPr>
+          <a:xfrm>
+            <a:off x="304800" y="1023409"/>
+            <a:ext cx="2693459" cy="426508"/>
+          </a:xfrm>
+        </p:spPr>
+        <p:txBody>
+          <a:bodyPr anchor="b"/>
+          <a:lstStyle>
+            <a:lvl1pPr marL="0" indent="0">
+              <a:buNone/>
+              <a:defRPr sz="1600" b="1"/>
+            </a:lvl1pPr>
+            <a:lvl2pPr marL="304815" indent="0">
+              <a:buNone/>
+              <a:defRPr sz="1333" b="1"/>
+            </a:lvl2pPr>
+            <a:lvl3pPr marL="609630" indent="0">
+              <a:buNone/>
+              <a:defRPr sz="1200" b="1"/>
+            </a:lvl3pPr>
+            <a:lvl4pPr marL="914446" indent="0">
+              <a:buNone/>
+              <a:defRPr sz="1067" b="1"/>
+            </a:lvl4pPr>
+            <a:lvl5pPr marL="1219261" indent="0">
+              <a:buNone/>
+              <a:defRPr sz="1067" b="1"/>
+            </a:lvl5pPr>
+            <a:lvl6pPr marL="1524076" indent="0">
+              <a:buNone/>
+              <a:defRPr sz="1067" b="1"/>
+            </a:lvl6pPr>
+            <a:lvl7pPr marL="1828891" indent="0">
+              <a:buNone/>
+              <a:defRPr sz="1067" b="1"/>
+            </a:lvl7pPr>
+            <a:lvl8pPr marL="2133707" indent="0">
+              <a:buNone/>
+              <a:defRPr sz="1067" b="1"/>
+            </a:lvl8pPr>
+            <a:lvl9pPr marL="2438522" indent="0">
+              <a:buNone/>
+              <a:defRPr sz="1067" b="1"/>
+            </a:lvl9pPr>
+          </a:lstStyle>
+          <a:p>
+            <a:pPr lvl="0"/>
+            <a:r>
+              <a:rPr lang="en-US"/>
+              <a:t>Click to edit Master text styles</a:t>
+            </a:r>
+          </a:p>
+        </p:txBody>
+      </p:sp>
+      <p:sp>
+        <p:nvSpPr>
+          <p:cNvPr id="4" name="Content Placeholder 3"/>
+          <p:cNvSpPr>
+            <a:spLocks noGrp="1"/>
+          </p:cNvSpPr>
+          <p:nvPr>
+            <p:ph sz="half" idx="2"/>
+          </p:nvPr>
+        </p:nvSpPr>
+        <p:spPr>
+          <a:xfrm>
+            <a:off x="304800" y="1449917"/>
+            <a:ext cx="2693459" cy="2634192"/>
+          </a:xfrm>
+        </p:spPr>
+        <p:txBody>
+          <a:bodyPr/>
+          <a:lstStyle>
+            <a:lvl1pPr>
+              <a:defRPr sz="1600"/>
+            </a:lvl1pPr>
+            <a:lvl2pPr>
+              <a:defRPr sz="1333"/>
+            </a:lvl2pPr>
+            <a:lvl3pPr>
+              <a:defRPr sz="1200"/>
+            </a:lvl3pPr>
+            <a:lvl4pPr>
+              <a:defRPr sz="1067"/>
+            </a:lvl4pPr>
+            <a:lvl5pPr>
+              <a:defRPr sz="1067"/>
+            </a:lvl5pPr>
+            <a:lvl6pPr>
+              <a:defRPr sz="1067"/>
+            </a:lvl6pPr>
+            <a:lvl7pPr>
+              <a:defRPr sz="1067"/>
+            </a:lvl7pPr>
+            <a:lvl8pPr>
+              <a:defRPr sz="1067"/>
+            </a:lvl8pPr>
+            <a:lvl9pPr>
+              <a:defRPr sz="1067"/>
+            </a:lvl9pPr>
+          </a:lstStyle>
+          <a:p>
+            <a:pPr lvl="0"/>
+            <a:r>
+              <a:rPr lang="en-US"/>
+              <a:t>Click to edit Master text styles</a:t>
+            </a:r>
+          </a:p>
+          <a:p>
+            <a:pPr lvl="1"/>
+            <a:r>
+              <a:rPr lang="en-US"/>
+              <a:t>Second level</a:t>
+            </a:r>
+          </a:p>
+          <a:p>
+            <a:pPr lvl="2"/>
+            <a:r>
+              <a:rPr lang="en-US"/>
+              <a:t>Third level</a:t>
+            </a:r>
+          </a:p>
+          <a:p>
+            <a:pPr lvl="3"/>
+            <a:r>
+              <a:rPr lang="en-US"/>
+              <a:t>Fourth level</a:t>
+            </a:r>
+          </a:p>
+          <a:p>
+            <a:pPr lvl="4"/>
+            <a:r>
+              <a:rPr lang="en-US"/>
+              <a:t>Fifth level</a:t>
+            </a:r>
+          </a:p>
+        </p:txBody>
+      </p:sp>
+      <p:sp>
+        <p:nvSpPr>
+          <p:cNvPr id="5" name="Text Placeholder 4"/>
+          <p:cNvSpPr>
+            <a:spLocks noGrp="1"/>
+          </p:cNvSpPr>
+          <p:nvPr>
+            <p:ph type="body" sz="quarter" idx="3"/>
+          </p:nvPr>
+        </p:nvSpPr>
+        <p:spPr>
+          <a:xfrm>
+            <a:off x="3096684" y="1023409"/>
+            <a:ext cx="2694517" cy="426508"/>
+          </a:xfrm>
+        </p:spPr>
+        <p:txBody>
+          <a:bodyPr anchor="b"/>
+          <a:lstStyle>
+            <a:lvl1pPr marL="0" indent="0">
+              <a:buNone/>
+              <a:defRPr sz="1600" b="1"/>
+            </a:lvl1pPr>
+            <a:lvl2pPr marL="304815" indent="0">
+              <a:buNone/>
+              <a:defRPr sz="1333" b="1"/>
+            </a:lvl2pPr>
+            <a:lvl3pPr marL="609630" indent="0">
+              <a:buNone/>
+              <a:defRPr sz="1200" b="1"/>
+            </a:lvl3pPr>
+            <a:lvl4pPr marL="914446" indent="0">
+              <a:buNone/>
+              <a:defRPr sz="1067" b="1"/>
+            </a:lvl4pPr>
+            <a:lvl5pPr marL="1219261" indent="0">
+              <a:buNone/>
+              <a:defRPr sz="1067" b="1"/>
+            </a:lvl5pPr>
+            <a:lvl6pPr marL="1524076" indent="0">
+              <a:buNone/>
+              <a:defRPr sz="1067" b="1"/>
+            </a:lvl6pPr>
+            <a:lvl7pPr marL="1828891" indent="0">
+              <a:buNone/>
+              <a:defRPr sz="1067" b="1"/>
+            </a:lvl7pPr>
+            <a:lvl8pPr marL="2133707" indent="0">
+              <a:buNone/>
+              <a:defRPr sz="1067" b="1"/>
+            </a:lvl8pPr>
+            <a:lvl9pPr marL="2438522" indent="0">
+              <a:buNone/>
+              <a:defRPr sz="1067" b="1"/>
+            </a:lvl9pPr>
+          </a:lstStyle>
+          <a:p>
+            <a:pPr lvl="0"/>
+            <a:r>
+              <a:rPr lang="en-US"/>
+              <a:t>Click to edit Master text styles</a:t>
+            </a:r>
+          </a:p>
+        </p:txBody>
+      </p:sp>
+      <p:sp>
+        <p:nvSpPr>
+          <p:cNvPr id="6" name="Content Placeholder 5"/>
+          <p:cNvSpPr>
+            <a:spLocks noGrp="1"/>
+          </p:cNvSpPr>
+          <p:nvPr>
+            <p:ph sz="quarter" idx="4"/>
+          </p:nvPr>
+        </p:nvSpPr>
+        <p:spPr>
+          <a:xfrm>
+            <a:off x="3096684" y="1449917"/>
+            <a:ext cx="2694517" cy="2634192"/>
+          </a:xfrm>
+        </p:spPr>
+        <p:txBody>
+          <a:bodyPr/>
+          <a:lstStyle>
+            <a:lvl1pPr>
+              <a:defRPr sz="1600"/>
+            </a:lvl1pPr>
+            <a:lvl2pPr>
+              <a:defRPr sz="1333"/>
+            </a:lvl2pPr>
+            <a:lvl3pPr>
+              <a:defRPr sz="1200"/>
+            </a:lvl3pPr>
+            <a:lvl4pPr>
+              <a:defRPr sz="1067"/>
+            </a:lvl4pPr>
+            <a:lvl5pPr>
+              <a:defRPr sz="1067"/>
+            </a:lvl5pPr>
+            <a:lvl6pPr>
+              <a:defRPr sz="1067"/>
+            </a:lvl6pPr>
+            <a:lvl7pPr>
+              <a:defRPr sz="1067"/>
+            </a:lvl7pPr>
+            <a:lvl8pPr>
+              <a:defRPr sz="1067"/>
+            </a:lvl8pPr>
+            <a:lvl9pPr>
+              <a:defRPr sz="1067"/>
+            </a:lvl9pPr>
+          </a:lstStyle>
+          <a:p>
+            <a:pPr lvl="0"/>
+            <a:r>
+              <a:rPr lang="en-US"/>
+              <a:t>Click to edit Master text styles</a:t>
+            </a:r>
+          </a:p>
+          <a:p>
+            <a:pPr lvl="1"/>
+            <a:r>
+              <a:rPr lang="en-US"/>
+              <a:t>Second level</a:t>
+            </a:r>
+          </a:p>
+          <a:p>
+            <a:pPr lvl="2"/>
+            <a:r>
+              <a:rPr lang="en-US"/>
+              <a:t>Third level</a:t>
+            </a:r>
+          </a:p>
+          <a:p>
+            <a:pPr lvl="3"/>
+            <a:r>
+              <a:rPr lang="en-US"/>
+              <a:t>Fourth level</a:t>
+            </a:r>
+          </a:p>
+          <a:p>
+            <a:pPr lvl="4"/>
+            <a:r>
+              <a:rPr lang="en-US"/>
+              <a:t>Fifth level</a:t>
+            </a:r>
+          </a:p>
+        </p:txBody>
+      </p:sp>
+      <p:sp>
+        <p:nvSpPr>
+          <p:cNvPr id="7" name="Date Placeholder 6"/>
+          <p:cNvSpPr>
+            <a:spLocks noGrp="1"/>
+          </p:cNvSpPr>
+          <p:nvPr>
+            <p:ph type="dt" sz="half" idx="10"/>
+          </p:nvPr>
+        </p:nvSpPr>
+        <p:spPr/>
+        <p:txBody>
+          <a:bodyPr/>
+          <a:lstStyle/>
+          <a:p>
+            <a:fld id="{1D8BD707-D9CF-40AE-B4C6-C98DA3205C09}" type="datetimeFigureOut">
+              <a:rPr lang="en-US" smtClean="0"/>
+              <a:pPr/>
+              <a:t>4/8/2026</a:t>
+            </a:fld>
+            <a:endParaRPr lang="en-US"/>
+          </a:p>
+        </p:txBody>
+      </p:sp>
+      <p:sp>
+        <p:nvSpPr>
+          <p:cNvPr id="8" name="Footer Placeholder 7"/>
+          <p:cNvSpPr>
+            <a:spLocks noGrp="1"/>
+          </p:cNvSpPr>
+          <p:nvPr>
+            <p:ph type="ftr" sz="quarter" idx="11"/>
+          </p:nvPr>
+        </p:nvSpPr>
+        <p:spPr/>
+        <p:txBody>
+          <a:bodyPr/>
+          <a:lstStyle/>
+          <a:p>
+            <a:endParaRPr lang="en-US"/>
+          </a:p>
+        </p:txBody>
+      </p:sp>
+      <p:sp>
+        <p:nvSpPr>
+          <p:cNvPr id="9" name="Slide Number Placeholder 8"/>
+          <p:cNvSpPr>
+            <a:spLocks noGrp="1"/>
+          </p:cNvSpPr>
+          <p:nvPr>
+            <p:ph type="sldNum" sz="quarter" idx="12"/>
+          </p:nvPr>
+        </p:nvSpPr>
+        <p:spPr/>
+        <p:txBody>
+          <a:bodyPr/>
+          <a:lstStyle/>
+          <a:p>
+            <a:fld id="{B6F15528-21DE-4FAA-801E-634DDDAF4B2B}" type="slidenum">
+              <a:rPr lang="en-US" smtClean="0"/>
+              <a:pPr/>
+              <a:t>‹N›</a:t>
+            </a:fld>
+            <a:endParaRPr lang="en-US"/>
+          </a:p>
+        </p:txBody>
+      </p:sp>
+    </p:spTree>
+    <p:extLst>
+      <p:ext uri="{BB962C8B-B14F-4D97-AF65-F5344CB8AC3E}">
+        <p14:creationId xmlns:p14="http://schemas.microsoft.com/office/powerpoint/2010/main" val="1642797844"/>
+      </p:ext>
+    </p:extLst>
+  </p:cSld>
+  <p:clrMapOvr>
+    <a:masterClrMapping/>
+  </p:clrMapOvr>
+</p:sldLayout>
+</file>
+
+<file path=ppt/slideLayouts/slideLayout7.xml><?xml version="1.0" encoding="utf-8"?>
+<p:sldLayout xmlns:a="http://schemas.openxmlformats.org/drawingml/2006/main" xmlns:r="http://schemas.openxmlformats.org/officeDocument/2006/relationships" xmlns:p="http://schemas.openxmlformats.org/presentationml/2006/main" type="titleOnly" preserve="1">
+  <p:cSld name="Title Only">
+    <p:spTree>
+      <p:nvGrpSpPr>
+        <p:cNvPr id="1" name=""/>
+        <p:cNvGrpSpPr/>
+        <p:nvPr/>
+      </p:nvGrpSpPr>
+      <p:grpSpPr>
+        <a:xfrm>
+          <a:off x="0" y="0"/>
+          <a:ext cx="0" cy="0"/>
+          <a:chOff x="0" y="0"/>
+          <a:chExt cx="0" cy="0"/>
+        </a:xfrm>
+      </p:grpSpPr>
+      <p:sp>
+        <p:nvSpPr>
+          <p:cNvPr id="2" name="Title 1"/>
+          <p:cNvSpPr>
+            <a:spLocks noGrp="1"/>
+          </p:cNvSpPr>
+          <p:nvPr>
+            <p:ph type="title"/>
+          </p:nvPr>
+        </p:nvSpPr>
+        <p:spPr/>
+        <p:txBody>
+          <a:bodyPr/>
+          <a:lstStyle/>
+          <a:p>
+            <a:r>
+              <a:rPr lang="en-US"/>
+              <a:t>Click to edit Master title style</a:t>
+            </a:r>
+          </a:p>
+        </p:txBody>
+      </p:sp>
+      <p:sp>
+        <p:nvSpPr>
+          <p:cNvPr id="3" name="Date Placeholder 2"/>
+          <p:cNvSpPr>
+            <a:spLocks noGrp="1"/>
+          </p:cNvSpPr>
+          <p:nvPr>
+            <p:ph type="dt" sz="half" idx="10"/>
+          </p:nvPr>
+        </p:nvSpPr>
+        <p:spPr/>
+        <p:txBody>
+          <a:bodyPr/>
+          <a:lstStyle/>
+          <a:p>
+            <a:fld id="{1D8BD707-D9CF-40AE-B4C6-C98DA3205C09}" type="datetimeFigureOut">
+              <a:rPr lang="en-US" smtClean="0"/>
+              <a:pPr/>
+              <a:t>4/8/2026</a:t>
+            </a:fld>
+            <a:endParaRPr lang="en-US"/>
+          </a:p>
+        </p:txBody>
+      </p:sp>
+      <p:sp>
+        <p:nvSpPr>
+          <p:cNvPr id="4" name="Footer Placeholder 3"/>
+          <p:cNvSpPr>
+            <a:spLocks noGrp="1"/>
+          </p:cNvSpPr>
+          <p:nvPr>
+            <p:ph type="ftr" sz="quarter" idx="11"/>
+          </p:nvPr>
+        </p:nvSpPr>
+        <p:spPr/>
+        <p:txBody>
+          <a:bodyPr/>
+          <a:lstStyle/>
+          <a:p>
+            <a:endParaRPr lang="en-US"/>
+          </a:p>
+        </p:txBody>
+      </p:sp>
+      <p:sp>
+        <p:nvSpPr>
+          <p:cNvPr id="5" name="Slide Number Placeholder 4"/>
+          <p:cNvSpPr>
+            <a:spLocks noGrp="1"/>
+          </p:cNvSpPr>
+          <p:nvPr>
+            <p:ph type="sldNum" sz="quarter" idx="12"/>
+          </p:nvPr>
+        </p:nvSpPr>
+        <p:spPr/>
+        <p:txBody>
+          <a:bodyPr/>
+          <a:lstStyle/>
+          <a:p>
+            <a:fld id="{B6F15528-21DE-4FAA-801E-634DDDAF4B2B}" type="slidenum">
+              <a:rPr lang="en-US" smtClean="0"/>
+              <a:pPr/>
+              <a:t>‹N›</a:t>
+            </a:fld>
+            <a:endParaRPr lang="en-US"/>
+          </a:p>
+        </p:txBody>
+      </p:sp>
+    </p:spTree>
+    <p:extLst>
+      <p:ext uri="{BB962C8B-B14F-4D97-AF65-F5344CB8AC3E}">
+        <p14:creationId xmlns:p14="http://schemas.microsoft.com/office/powerpoint/2010/main" val="3553424525"/>
+      </p:ext>
+    </p:extLst>
+  </p:cSld>
+  <p:clrMapOvr>
+    <a:masterClrMapping/>
+  </p:clrMapOvr>
+</p:sldLayout>
+</file>
+
+<file path=ppt/slideLayouts/slideLayout8.xml><?xml version="1.0" encoding="utf-8"?>
+<p:sldLayout xmlns:a="http://schemas.openxmlformats.org/drawingml/2006/main" xmlns:r="http://schemas.openxmlformats.org/officeDocument/2006/relationships" xmlns:p="http://schemas.openxmlformats.org/presentationml/2006/main" type="blank" preserve="1">
+  <p:cSld name="Blank">
+    <p:spTree>
+      <p:nvGrpSpPr>
+        <p:cNvPr id="1" name=""/>
+        <p:cNvGrpSpPr/>
+        <p:nvPr/>
+      </p:nvGrpSpPr>
+      <p:grpSpPr>
+        <a:xfrm>
+          <a:off x="0" y="0"/>
+          <a:ext cx="0" cy="0"/>
+          <a:chOff x="0" y="0"/>
+          <a:chExt cx="0" cy="0"/>
+        </a:xfrm>
+      </p:grpSpPr>
+      <p:sp>
+        <p:nvSpPr>
+          <p:cNvPr id="2" name="Date Placeholder 1"/>
+          <p:cNvSpPr>
+            <a:spLocks noGrp="1"/>
+          </p:cNvSpPr>
+          <p:nvPr>
+            <p:ph type="dt" sz="half" idx="10"/>
+          </p:nvPr>
+        </p:nvSpPr>
+        <p:spPr/>
+        <p:txBody>
+          <a:bodyPr/>
+          <a:lstStyle/>
+          <a:p>
+            <a:fld id="{1D8BD707-D9CF-40AE-B4C6-C98DA3205C09}" type="datetimeFigureOut">
+              <a:rPr lang="en-US" smtClean="0"/>
+              <a:pPr/>
+              <a:t>4/8/2026</a:t>
+            </a:fld>
+            <a:endParaRPr lang="en-US"/>
+          </a:p>
+        </p:txBody>
+      </p:sp>
+      <p:sp>
+        <p:nvSpPr>
+          <p:cNvPr id="3" name="Footer Placeholder 2"/>
+          <p:cNvSpPr>
+            <a:spLocks noGrp="1"/>
+          </p:cNvSpPr>
+          <p:nvPr>
+            <p:ph type="ftr" sz="quarter" idx="11"/>
+          </p:nvPr>
+        </p:nvSpPr>
+        <p:spPr/>
+        <p:txBody>
+          <a:bodyPr/>
+          <a:lstStyle/>
+          <a:p>
+            <a:endParaRPr lang="en-US"/>
+          </a:p>
+        </p:txBody>
+      </p:sp>
+      <p:sp>
+        <p:nvSpPr>
+          <p:cNvPr id="4" name="Slide Number Placeholder 3"/>
+          <p:cNvSpPr>
+            <a:spLocks noGrp="1"/>
+          </p:cNvSpPr>
+          <p:nvPr>
+            <p:ph type="sldNum" sz="quarter" idx="12"/>
+          </p:nvPr>
+        </p:nvSpPr>
+        <p:spPr/>
+        <p:txBody>
+          <a:bodyPr/>
+          <a:lstStyle/>
+          <a:p>
+            <a:fld id="{B6F15528-21DE-4FAA-801E-634DDDAF4B2B}" type="slidenum">
+              <a:rPr lang="en-US" smtClean="0"/>
+              <a:pPr/>
+              <a:t>‹N›</a:t>
+            </a:fld>
+            <a:endParaRPr lang="en-US"/>
+          </a:p>
+        </p:txBody>
+      </p:sp>
+    </p:spTree>
+    <p:extLst>
+      <p:ext uri="{BB962C8B-B14F-4D97-AF65-F5344CB8AC3E}">
+        <p14:creationId xmlns:p14="http://schemas.microsoft.com/office/powerpoint/2010/main" val="2767924525"/>
+      </p:ext>
+    </p:extLst>
+  </p:cSld>
+  <p:clrMapOvr>
+    <a:masterClrMapping/>
+  </p:clrMapOvr>
+</p:sldLayout>
+</file>
+
+<file path=ppt/slideLayouts/slideLayout9.xml><?xml version="1.0" encoding="utf-8"?>
+<p:sldLayout xmlns:a="http://schemas.openxmlformats.org/drawingml/2006/main" xmlns:r="http://schemas.openxmlformats.org/officeDocument/2006/relationships" xmlns:p="http://schemas.openxmlformats.org/presentationml/2006/main" type="objTx" preserve="1">
+  <p:cSld name="Content with Caption">
+    <p:spTree>
+      <p:nvGrpSpPr>
+        <p:cNvPr id="1" name=""/>
+        <p:cNvGrpSpPr/>
+        <p:nvPr/>
+      </p:nvGrpSpPr>
+      <p:grpSpPr>
+        <a:xfrm>
+          <a:off x="0" y="0"/>
+          <a:ext cx="0" cy="0"/>
+          <a:chOff x="0" y="0"/>
+          <a:chExt cx="0" cy="0"/>
+        </a:xfrm>
+      </p:grpSpPr>
+      <p:sp>
+        <p:nvSpPr>
+          <p:cNvPr id="2" name="Title 1"/>
+          <p:cNvSpPr>
+            <a:spLocks noGrp="1"/>
+          </p:cNvSpPr>
+          <p:nvPr>
+            <p:ph type="title"/>
+          </p:nvPr>
+        </p:nvSpPr>
+        <p:spPr>
+          <a:xfrm>
+            <a:off x="304800" y="182033"/>
+            <a:ext cx="2005542" cy="774700"/>
+          </a:xfrm>
+        </p:spPr>
+        <p:txBody>
+          <a:bodyPr anchor="b"/>
+          <a:lstStyle>
+            <a:lvl1pPr algn="l">
+              <a:defRPr sz="1333" b="1"/>
+            </a:lvl1pPr>
+          </a:lstStyle>
+          <a:p>
+            <a:r>
+              <a:rPr lang="en-US"/>
+              <a:t>Click to edit Master title style</a:t>
+            </a:r>
+          </a:p>
+        </p:txBody>
+      </p:sp>
+      <p:sp>
+        <p:nvSpPr>
+          <p:cNvPr id="3" name="Content Placeholder 2"/>
+          <p:cNvSpPr>
+            <a:spLocks noGrp="1"/>
+          </p:cNvSpPr>
+          <p:nvPr>
+            <p:ph idx="1"/>
+          </p:nvPr>
+        </p:nvSpPr>
+        <p:spPr>
+          <a:xfrm>
+            <a:off x="2383367" y="182034"/>
+            <a:ext cx="3407833" cy="3902075"/>
+          </a:xfrm>
+        </p:spPr>
+        <p:txBody>
+          <a:bodyPr/>
+          <a:lstStyle>
+            <a:lvl1pPr>
+              <a:defRPr sz="2133"/>
+            </a:lvl1pPr>
+            <a:lvl2pPr>
+              <a:defRPr sz="1867"/>
+            </a:lvl2pPr>
+            <a:lvl3pPr>
+              <a:defRPr sz="1600"/>
+            </a:lvl3pPr>
+            <a:lvl4pPr>
+              <a:defRPr sz="1333"/>
+            </a:lvl4pPr>
+            <a:lvl5pPr>
+              <a:defRPr sz="1333"/>
+            </a:lvl5pPr>
+            <a:lvl6pPr>
+              <a:defRPr sz="1333"/>
+            </a:lvl6pPr>
+            <a:lvl7pPr>
+              <a:defRPr sz="1333"/>
+            </a:lvl7pPr>
+            <a:lvl8pPr>
+              <a:defRPr sz="1333"/>
+            </a:lvl8pPr>
+            <a:lvl9pPr>
+              <a:defRPr sz="1333"/>
+            </a:lvl9pPr>
+          </a:lstStyle>
+          <a:p>
+            <a:pPr lvl="0"/>
+            <a:r>
+              <a:rPr lang="en-US"/>
+              <a:t>Click to edit Master text styles</a:t>
+            </a:r>
+          </a:p>
+          <a:p>
+            <a:pPr lvl="1"/>
+            <a:r>
+              <a:rPr lang="en-US"/>
+              <a:t>Second level</a:t>
+            </a:r>
+          </a:p>
+          <a:p>
+            <a:pPr lvl="2"/>
+            <a:r>
+              <a:rPr lang="en-US"/>
+              <a:t>Third level</a:t>
+            </a:r>
+          </a:p>
+          <a:p>
+            <a:pPr lvl="3"/>
+            <a:r>
+              <a:rPr lang="en-US"/>
+              <a:t>Fourth level</a:t>
+            </a:r>
+          </a:p>
+          <a:p>
+            <a:pPr lvl="4"/>
+            <a:r>
+              <a:rPr lang="en-US"/>
+              <a:t>Fifth level</a:t>
+            </a:r>
+          </a:p>
+        </p:txBody>
+      </p:sp>
+      <p:sp>
+        <p:nvSpPr>
+          <p:cNvPr id="4" name="Text Placeholder 3"/>
+          <p:cNvSpPr>
+            <a:spLocks noGrp="1"/>
+          </p:cNvSpPr>
+          <p:nvPr>
+            <p:ph type="body" sz="half" idx="2"/>
+          </p:nvPr>
+        </p:nvSpPr>
+        <p:spPr>
+          <a:xfrm>
+            <a:off x="304800" y="956734"/>
+            <a:ext cx="2005542" cy="3127375"/>
+          </a:xfrm>
+        </p:spPr>
+        <p:txBody>
+          <a:bodyPr/>
+          <a:lstStyle>
+            <a:lvl1pPr marL="0" indent="0">
+              <a:buNone/>
+              <a:defRPr sz="933"/>
+            </a:lvl1pPr>
+            <a:lvl2pPr marL="304815" indent="0">
+              <a:buNone/>
+              <a:defRPr sz="800"/>
+            </a:lvl2pPr>
+            <a:lvl3pPr marL="609630" indent="0">
+              <a:buNone/>
+              <a:defRPr sz="667"/>
+            </a:lvl3pPr>
+            <a:lvl4pPr marL="914446" indent="0">
+              <a:buNone/>
+              <a:defRPr sz="600"/>
+            </a:lvl4pPr>
+            <a:lvl5pPr marL="1219261" indent="0">
+              <a:buNone/>
+              <a:defRPr sz="600"/>
+            </a:lvl5pPr>
+            <a:lvl6pPr marL="1524076" indent="0">
+              <a:buNone/>
+              <a:defRPr sz="600"/>
+            </a:lvl6pPr>
+            <a:lvl7pPr marL="1828891" indent="0">
+              <a:buNone/>
+              <a:defRPr sz="600"/>
+            </a:lvl7pPr>
+            <a:lvl8pPr marL="2133707" indent="0">
+              <a:buNone/>
+              <a:defRPr sz="600"/>
+            </a:lvl8pPr>
+            <a:lvl9pPr marL="2438522" indent="0">
+              <a:buNone/>
+              <a:defRPr sz="600"/>
+            </a:lvl9pPr>
+          </a:lstStyle>
+          <a:p>
+            <a:pPr lvl="0"/>
+            <a:r>
+              <a:rPr lang="en-US"/>
+              <a:t>Click to edit Master text styles</a:t>
+            </a:r>
+          </a:p>
+        </p:txBody>
+      </p:sp>
+      <p:sp>
+        <p:nvSpPr>
+          <p:cNvPr id="5" name="Date Placeholder 4"/>
+          <p:cNvSpPr>
+            <a:spLocks noGrp="1"/>
+          </p:cNvSpPr>
+          <p:nvPr>
+            <p:ph type="dt" sz="half" idx="10"/>
+          </p:nvPr>
+        </p:nvSpPr>
+        <p:spPr/>
+        <p:txBody>
+          <a:bodyPr/>
+          <a:lstStyle/>
+          <a:p>
+            <a:fld id="{1D8BD707-D9CF-40AE-B4C6-C98DA3205C09}" type="datetimeFigureOut">
+              <a:rPr lang="en-US" smtClean="0"/>
+              <a:pPr/>
+              <a:t>4/8/2026</a:t>
+            </a:fld>
+            <a:endParaRPr lang="en-US"/>
+          </a:p>
+        </p:txBody>
+      </p:sp>
+      <p:sp>
+        <p:nvSpPr>
+          <p:cNvPr id="6" name="Footer Placeholder 5"/>
+          <p:cNvSpPr>
+            <a:spLocks noGrp="1"/>
+          </p:cNvSpPr>
+          <p:nvPr>
+            <p:ph type="ftr" sz="quarter" idx="11"/>
+          </p:nvPr>
+        </p:nvSpPr>
+        <p:spPr/>
+        <p:txBody>
+          <a:bodyPr/>
+          <a:lstStyle/>
+          <a:p>
+            <a:endParaRPr lang="en-US"/>
+          </a:p>
+        </p:txBody>
+      </p:sp>
+      <p:sp>
+        <p:nvSpPr>
+          <p:cNvPr id="7" name="Slide Number Placeholder 6"/>
+          <p:cNvSpPr>
+            <a:spLocks noGrp="1"/>
+          </p:cNvSpPr>
+          <p:nvPr>
+            <p:ph type="sldNum" sz="quarter" idx="12"/>
+          </p:nvPr>
+        </p:nvSpPr>
+        <p:spPr/>
+        <p:txBody>
+          <a:bodyPr/>
+          <a:lstStyle/>
+          <a:p>
+            <a:fld id="{B6F15528-21DE-4FAA-801E-634DDDAF4B2B}" type="slidenum">
+              <a:rPr lang="en-US" smtClean="0"/>
+              <a:pPr/>
+              <a:t>‹N›</a:t>
+            </a:fld>
+            <a:endParaRPr lang="en-US"/>
+          </a:p>
+        </p:txBody>
+      </p:sp>
+    </p:spTree>
+    <p:extLst>
+      <p:ext uri="{BB962C8B-B14F-4D97-AF65-F5344CB8AC3E}">
+        <p14:creationId xmlns:p14="http://schemas.microsoft.com/office/powerpoint/2010/main" val="110556580"/>
+      </p:ext>
+    </p:extLst>
+  </p:cSld>
+  <p:clrMapOvr>
+    <a:masterClrMapping/>
+  </p:clrMapOvr>
+</p:sldLayout>
+</file>
+
 <file path=ppt/slideMasters/slideMaster1.xml><?xml version="1.0" encoding="utf-8"?>
 <p:sldMaster xmlns:a="http://schemas.openxmlformats.org/drawingml/2006/main" xmlns:r="http://schemas.openxmlformats.org/officeDocument/2006/relationships" xmlns:p="http://schemas.openxmlformats.org/presentationml/2006/main">
   <p:cSld>
+    <p:bg>
+      <p:bgRef idx="1001">
+        <a:schemeClr val="bg1"/>
+      </p:bgRef>
+    </p:bg>
     <p:spTree>
       <p:nvGrpSpPr>
         <p:cNvPr id="1" name=""/>
@@ -2008,22 +4121,13 @@
 </p:sldMaster>
 </file>
 
-<file path=ppt/slides/slide1.xml><?xml version="1.0" encoding="utf-8"?>
-<p:sld xmlns:a="http://schemas.openxmlformats.org/drawingml/2006/main" xmlns:r="http://schemas.openxmlformats.org/officeDocument/2006/relationships" xmlns:p="http://schemas.openxmlformats.org/presentationml/2006/main">
-  <p:cSld name="Slide 1">
+<file path=ppt/slideMasters/slideMaster2.xml><?xml version="1.0" encoding="utf-8"?>
+<p:sldMaster xmlns:a="http://schemas.openxmlformats.org/drawingml/2006/main" xmlns:r="http://schemas.openxmlformats.org/officeDocument/2006/relationships" xmlns:p="http://schemas.openxmlformats.org/presentationml/2006/main">
+  <p:cSld>
     <p:bg>
-      <p:bgPr>
-        <a:blipFill dpi="0" rotWithShape="1">
-          <a:blip r:embed="rId1">
-            <a:lum/>
-          </a:blip>
-          <a:srcRect/>
-          <a:stretch>
-            <a:fillRect/>
-          </a:stretch>
-        </a:blipFill>
-        <a:effectLst/>
-      </p:bgPr>
+      <p:bgRef idx="1001">
+        <a:schemeClr val="bg1"/>
+      </p:bgRef>
     </p:bg>
     <p:spTree>
       <p:nvGrpSpPr>
@@ -2039,6 +4143,1424 @@
           <a:chExt cx="0" cy="0"/>
         </a:xfrm>
       </p:grpSpPr>
+      <p:sp>
+        <p:nvSpPr>
+          <p:cNvPr id="2" name="Title Placeholder 1"/>
+          <p:cNvSpPr>
+            <a:spLocks noGrp="1"/>
+          </p:cNvSpPr>
+          <p:nvPr>
+            <p:ph type="title"/>
+          </p:nvPr>
+        </p:nvSpPr>
+        <p:spPr>
+          <a:xfrm>
+            <a:off x="304800" y="183092"/>
+            <a:ext cx="5486400" cy="762000"/>
+          </a:xfrm>
+          <a:prstGeom prst="rect">
+            <a:avLst/>
+          </a:prstGeom>
+        </p:spPr>
+        <p:txBody>
+          <a:bodyPr vert="horz" lIns="91440" tIns="45720" rIns="91440" bIns="45720" rtlCol="0" anchor="ctr">
+            <a:normAutofit/>
+          </a:bodyPr>
+          <a:lstStyle/>
+          <a:p>
+            <a:r>
+              <a:rPr lang="en-US"/>
+              <a:t>Click to edit Master title style</a:t>
+            </a:r>
+          </a:p>
+        </p:txBody>
+      </p:sp>
+      <p:sp>
+        <p:nvSpPr>
+          <p:cNvPr id="3" name="Text Placeholder 2"/>
+          <p:cNvSpPr>
+            <a:spLocks noGrp="1"/>
+          </p:cNvSpPr>
+          <p:nvPr>
+            <p:ph type="body" idx="1"/>
+          </p:nvPr>
+        </p:nvSpPr>
+        <p:spPr>
+          <a:xfrm>
+            <a:off x="304800" y="1066800"/>
+            <a:ext cx="5486400" cy="3017309"/>
+          </a:xfrm>
+          <a:prstGeom prst="rect">
+            <a:avLst/>
+          </a:prstGeom>
+        </p:spPr>
+        <p:txBody>
+          <a:bodyPr vert="horz" lIns="91440" tIns="45720" rIns="91440" bIns="45720" rtlCol="0">
+            <a:normAutofit/>
+          </a:bodyPr>
+          <a:lstStyle/>
+          <a:p>
+            <a:pPr lvl="0"/>
+            <a:r>
+              <a:rPr lang="en-US"/>
+              <a:t>Click to edit Master text styles</a:t>
+            </a:r>
+          </a:p>
+          <a:p>
+            <a:pPr lvl="1"/>
+            <a:r>
+              <a:rPr lang="en-US"/>
+              <a:t>Second level</a:t>
+            </a:r>
+          </a:p>
+          <a:p>
+            <a:pPr lvl="2"/>
+            <a:r>
+              <a:rPr lang="en-US"/>
+              <a:t>Third level</a:t>
+            </a:r>
+          </a:p>
+          <a:p>
+            <a:pPr lvl="3"/>
+            <a:r>
+              <a:rPr lang="en-US"/>
+              <a:t>Fourth level</a:t>
+            </a:r>
+          </a:p>
+          <a:p>
+            <a:pPr lvl="4"/>
+            <a:r>
+              <a:rPr lang="en-US"/>
+              <a:t>Fifth level</a:t>
+            </a:r>
+          </a:p>
+        </p:txBody>
+      </p:sp>
+      <p:sp>
+        <p:nvSpPr>
+          <p:cNvPr id="4" name="Date Placeholder 3"/>
+          <p:cNvSpPr>
+            <a:spLocks noGrp="1"/>
+          </p:cNvSpPr>
+          <p:nvPr>
+            <p:ph type="dt" sz="half" idx="2"/>
+          </p:nvPr>
+        </p:nvSpPr>
+        <p:spPr>
+          <a:xfrm>
+            <a:off x="304800" y="4237567"/>
+            <a:ext cx="1422400" cy="243417"/>
+          </a:xfrm>
+          <a:prstGeom prst="rect">
+            <a:avLst/>
+          </a:prstGeom>
+        </p:spPr>
+        <p:txBody>
+          <a:bodyPr vert="horz" lIns="91440" tIns="45720" rIns="91440" bIns="45720" rtlCol="0" anchor="ctr"/>
+          <a:lstStyle>
+            <a:lvl1pPr algn="l">
+              <a:defRPr sz="800">
+                <a:solidFill>
+                  <a:schemeClr val="tx1">
+                    <a:tint val="75000"/>
+                  </a:schemeClr>
+                </a:solidFill>
+              </a:defRPr>
+            </a:lvl1pPr>
+          </a:lstStyle>
+          <a:p>
+            <a:fld id="{1D8BD707-D9CF-40AE-B4C6-C98DA3205C09}" type="datetimeFigureOut">
+              <a:rPr lang="en-US" smtClean="0"/>
+              <a:pPr/>
+              <a:t>4/8/2026</a:t>
+            </a:fld>
+            <a:endParaRPr lang="en-US"/>
+          </a:p>
+        </p:txBody>
+      </p:sp>
+      <p:sp>
+        <p:nvSpPr>
+          <p:cNvPr id="5" name="Footer Placeholder 4"/>
+          <p:cNvSpPr>
+            <a:spLocks noGrp="1"/>
+          </p:cNvSpPr>
+          <p:nvPr>
+            <p:ph type="ftr" sz="quarter" idx="3"/>
+          </p:nvPr>
+        </p:nvSpPr>
+        <p:spPr>
+          <a:xfrm>
+            <a:off x="2082800" y="4237567"/>
+            <a:ext cx="1930400" cy="243417"/>
+          </a:xfrm>
+          <a:prstGeom prst="rect">
+            <a:avLst/>
+          </a:prstGeom>
+        </p:spPr>
+        <p:txBody>
+          <a:bodyPr vert="horz" lIns="91440" tIns="45720" rIns="91440" bIns="45720" rtlCol="0" anchor="ctr"/>
+          <a:lstStyle>
+            <a:lvl1pPr algn="ctr">
+              <a:defRPr sz="800">
+                <a:solidFill>
+                  <a:schemeClr val="tx1">
+                    <a:tint val="75000"/>
+                  </a:schemeClr>
+                </a:solidFill>
+              </a:defRPr>
+            </a:lvl1pPr>
+          </a:lstStyle>
+          <a:p>
+            <a:endParaRPr lang="en-US"/>
+          </a:p>
+        </p:txBody>
+      </p:sp>
+      <p:sp>
+        <p:nvSpPr>
+          <p:cNvPr id="6" name="Slide Number Placeholder 5"/>
+          <p:cNvSpPr>
+            <a:spLocks noGrp="1"/>
+          </p:cNvSpPr>
+          <p:nvPr>
+            <p:ph type="sldNum" sz="quarter" idx="4"/>
+          </p:nvPr>
+        </p:nvSpPr>
+        <p:spPr>
+          <a:xfrm>
+            <a:off x="4368800" y="4237567"/>
+            <a:ext cx="1422400" cy="243417"/>
+          </a:xfrm>
+          <a:prstGeom prst="rect">
+            <a:avLst/>
+          </a:prstGeom>
+        </p:spPr>
+        <p:txBody>
+          <a:bodyPr vert="horz" lIns="91440" tIns="45720" rIns="91440" bIns="45720" rtlCol="0" anchor="ctr"/>
+          <a:lstStyle>
+            <a:lvl1pPr algn="r">
+              <a:defRPr sz="800">
+                <a:solidFill>
+                  <a:schemeClr val="tx1">
+                    <a:tint val="75000"/>
+                  </a:schemeClr>
+                </a:solidFill>
+              </a:defRPr>
+            </a:lvl1pPr>
+          </a:lstStyle>
+          <a:p>
+            <a:fld id="{B6F15528-21DE-4FAA-801E-634DDDAF4B2B}" type="slidenum">
+              <a:rPr lang="en-US" smtClean="0"/>
+              <a:pPr/>
+              <a:t>‹N›</a:t>
+            </a:fld>
+            <a:endParaRPr lang="en-US"/>
+          </a:p>
+        </p:txBody>
+      </p:sp>
+    </p:spTree>
+    <p:extLst>
+      <p:ext uri="{BB962C8B-B14F-4D97-AF65-F5344CB8AC3E}">
+        <p14:creationId xmlns:p14="http://schemas.microsoft.com/office/powerpoint/2010/main" val="55818864"/>
+      </p:ext>
+    </p:extLst>
+  </p:cSld>
+  <p:clrMap bg1="lt1" tx1="dk1" bg2="lt2" tx2="dk2" accent1="accent1" accent2="accent2" accent3="accent3" accent4="accent4" accent5="accent5" accent6="accent6" hlink="hlink" folHlink="folHlink"/>
+  <p:sldLayoutIdLst>
+    <p:sldLayoutId id="2147483651" r:id="rId1"/>
+    <p:sldLayoutId id="2147483652" r:id="rId2"/>
+    <p:sldLayoutId id="2147483653" r:id="rId3"/>
+    <p:sldLayoutId id="2147483654" r:id="rId4"/>
+    <p:sldLayoutId id="2147483655" r:id="rId5"/>
+    <p:sldLayoutId id="2147483656" r:id="rId6"/>
+    <p:sldLayoutId id="2147483657" r:id="rId7"/>
+    <p:sldLayoutId id="2147483658" r:id="rId8"/>
+    <p:sldLayoutId id="2147483659" r:id="rId9"/>
+    <p:sldLayoutId id="2147483660" r:id="rId10"/>
+    <p:sldLayoutId id="2147483661" r:id="rId11"/>
+  </p:sldLayoutIdLst>
+  <p:txStyles>
+    <p:titleStyle>
+      <a:lvl1pPr algn="ctr" defTabSz="609630" rtl="0" eaLnBrk="1" latinLnBrk="0" hangingPunct="1">
+        <a:spcBef>
+          <a:spcPct val="0"/>
+        </a:spcBef>
+        <a:buNone/>
+        <a:defRPr sz="2933" kern="1200">
+          <a:solidFill>
+            <a:schemeClr val="tx1"/>
+          </a:solidFill>
+          <a:latin typeface="+mj-lt"/>
+          <a:ea typeface="+mj-ea"/>
+          <a:cs typeface="+mj-cs"/>
+        </a:defRPr>
+      </a:lvl1pPr>
+    </p:titleStyle>
+    <p:bodyStyle>
+      <a:lvl1pPr marL="228611" indent="-228611" algn="l" defTabSz="609630" rtl="0" eaLnBrk="1" latinLnBrk="0" hangingPunct="1">
+        <a:spcBef>
+          <a:spcPct val="20000"/>
+        </a:spcBef>
+        <a:buFont typeface="Arial" pitchFamily="34" charset="0"/>
+        <a:buChar char="•"/>
+        <a:defRPr sz="2133" kern="1200">
+          <a:solidFill>
+            <a:schemeClr val="tx1"/>
+          </a:solidFill>
+          <a:latin typeface="+mn-lt"/>
+          <a:ea typeface="+mn-ea"/>
+          <a:cs typeface="+mn-cs"/>
+        </a:defRPr>
+      </a:lvl1pPr>
+      <a:lvl2pPr marL="495325" indent="-190510" algn="l" defTabSz="609630" rtl="0" eaLnBrk="1" latinLnBrk="0" hangingPunct="1">
+        <a:spcBef>
+          <a:spcPct val="20000"/>
+        </a:spcBef>
+        <a:buFont typeface="Arial" pitchFamily="34" charset="0"/>
+        <a:buChar char="–"/>
+        <a:defRPr sz="1867" kern="1200">
+          <a:solidFill>
+            <a:schemeClr val="tx1"/>
+          </a:solidFill>
+          <a:latin typeface="+mn-lt"/>
+          <a:ea typeface="+mn-ea"/>
+          <a:cs typeface="+mn-cs"/>
+        </a:defRPr>
+      </a:lvl2pPr>
+      <a:lvl3pPr marL="762038" indent="-152408" algn="l" defTabSz="609630" rtl="0" eaLnBrk="1" latinLnBrk="0" hangingPunct="1">
+        <a:spcBef>
+          <a:spcPct val="20000"/>
+        </a:spcBef>
+        <a:buFont typeface="Arial" pitchFamily="34" charset="0"/>
+        <a:buChar char="•"/>
+        <a:defRPr sz="1600" kern="1200">
+          <a:solidFill>
+            <a:schemeClr val="tx1"/>
+          </a:solidFill>
+          <a:latin typeface="+mn-lt"/>
+          <a:ea typeface="+mn-ea"/>
+          <a:cs typeface="+mn-cs"/>
+        </a:defRPr>
+      </a:lvl3pPr>
+      <a:lvl4pPr marL="1066853" indent="-152408" algn="l" defTabSz="609630" rtl="0" eaLnBrk="1" latinLnBrk="0" hangingPunct="1">
+        <a:spcBef>
+          <a:spcPct val="20000"/>
+        </a:spcBef>
+        <a:buFont typeface="Arial" pitchFamily="34" charset="0"/>
+        <a:buChar char="–"/>
+        <a:defRPr sz="1333" kern="1200">
+          <a:solidFill>
+            <a:schemeClr val="tx1"/>
+          </a:solidFill>
+          <a:latin typeface="+mn-lt"/>
+          <a:ea typeface="+mn-ea"/>
+          <a:cs typeface="+mn-cs"/>
+        </a:defRPr>
+      </a:lvl4pPr>
+      <a:lvl5pPr marL="1371669" indent="-152408" algn="l" defTabSz="609630" rtl="0" eaLnBrk="1" latinLnBrk="0" hangingPunct="1">
+        <a:spcBef>
+          <a:spcPct val="20000"/>
+        </a:spcBef>
+        <a:buFont typeface="Arial" pitchFamily="34" charset="0"/>
+        <a:buChar char="»"/>
+        <a:defRPr sz="1333" kern="1200">
+          <a:solidFill>
+            <a:schemeClr val="tx1"/>
+          </a:solidFill>
+          <a:latin typeface="+mn-lt"/>
+          <a:ea typeface="+mn-ea"/>
+          <a:cs typeface="+mn-cs"/>
+        </a:defRPr>
+      </a:lvl5pPr>
+      <a:lvl6pPr marL="1676484" indent="-152408" algn="l" defTabSz="609630" rtl="0" eaLnBrk="1" latinLnBrk="0" hangingPunct="1">
+        <a:spcBef>
+          <a:spcPct val="20000"/>
+        </a:spcBef>
+        <a:buFont typeface="Arial" pitchFamily="34" charset="0"/>
+        <a:buChar char="•"/>
+        <a:defRPr sz="1333" kern="1200">
+          <a:solidFill>
+            <a:schemeClr val="tx1"/>
+          </a:solidFill>
+          <a:latin typeface="+mn-lt"/>
+          <a:ea typeface="+mn-ea"/>
+          <a:cs typeface="+mn-cs"/>
+        </a:defRPr>
+      </a:lvl6pPr>
+      <a:lvl7pPr marL="1981299" indent="-152408" algn="l" defTabSz="609630" rtl="0" eaLnBrk="1" latinLnBrk="0" hangingPunct="1">
+        <a:spcBef>
+          <a:spcPct val="20000"/>
+        </a:spcBef>
+        <a:buFont typeface="Arial" pitchFamily="34" charset="0"/>
+        <a:buChar char="•"/>
+        <a:defRPr sz="1333" kern="1200">
+          <a:solidFill>
+            <a:schemeClr val="tx1"/>
+          </a:solidFill>
+          <a:latin typeface="+mn-lt"/>
+          <a:ea typeface="+mn-ea"/>
+          <a:cs typeface="+mn-cs"/>
+        </a:defRPr>
+      </a:lvl7pPr>
+      <a:lvl8pPr marL="2286114" indent="-152408" algn="l" defTabSz="609630" rtl="0" eaLnBrk="1" latinLnBrk="0" hangingPunct="1">
+        <a:spcBef>
+          <a:spcPct val="20000"/>
+        </a:spcBef>
+        <a:buFont typeface="Arial" pitchFamily="34" charset="0"/>
+        <a:buChar char="•"/>
+        <a:defRPr sz="1333" kern="1200">
+          <a:solidFill>
+            <a:schemeClr val="tx1"/>
+          </a:solidFill>
+          <a:latin typeface="+mn-lt"/>
+          <a:ea typeface="+mn-ea"/>
+          <a:cs typeface="+mn-cs"/>
+        </a:defRPr>
+      </a:lvl8pPr>
+      <a:lvl9pPr marL="2590930" indent="-152408" algn="l" defTabSz="609630" rtl="0" eaLnBrk="1" latinLnBrk="0" hangingPunct="1">
+        <a:spcBef>
+          <a:spcPct val="20000"/>
+        </a:spcBef>
+        <a:buFont typeface="Arial" pitchFamily="34" charset="0"/>
+        <a:buChar char="•"/>
+        <a:defRPr sz="1333" kern="1200">
+          <a:solidFill>
+            <a:schemeClr val="tx1"/>
+          </a:solidFill>
+          <a:latin typeface="+mn-lt"/>
+          <a:ea typeface="+mn-ea"/>
+          <a:cs typeface="+mn-cs"/>
+        </a:defRPr>
+      </a:lvl9pPr>
+    </p:bodyStyle>
+    <p:otherStyle>
+      <a:defPPr>
+        <a:defRPr lang="en-US"/>
+      </a:defPPr>
+      <a:lvl1pPr marL="0" algn="l" defTabSz="609630" rtl="0" eaLnBrk="1" latinLnBrk="0" hangingPunct="1">
+        <a:defRPr sz="1200" kern="1200">
+          <a:solidFill>
+            <a:schemeClr val="tx1"/>
+          </a:solidFill>
+          <a:latin typeface="+mn-lt"/>
+          <a:ea typeface="+mn-ea"/>
+          <a:cs typeface="+mn-cs"/>
+        </a:defRPr>
+      </a:lvl1pPr>
+      <a:lvl2pPr marL="304815" algn="l" defTabSz="609630" rtl="0" eaLnBrk="1" latinLnBrk="0" hangingPunct="1">
+        <a:defRPr sz="1200" kern="1200">
+          <a:solidFill>
+            <a:schemeClr val="tx1"/>
+          </a:solidFill>
+          <a:latin typeface="+mn-lt"/>
+          <a:ea typeface="+mn-ea"/>
+          <a:cs typeface="+mn-cs"/>
+        </a:defRPr>
+      </a:lvl2pPr>
+      <a:lvl3pPr marL="609630" algn="l" defTabSz="609630" rtl="0" eaLnBrk="1" latinLnBrk="0" hangingPunct="1">
+        <a:defRPr sz="1200" kern="1200">
+          <a:solidFill>
+            <a:schemeClr val="tx1"/>
+          </a:solidFill>
+          <a:latin typeface="+mn-lt"/>
+          <a:ea typeface="+mn-ea"/>
+          <a:cs typeface="+mn-cs"/>
+        </a:defRPr>
+      </a:lvl3pPr>
+      <a:lvl4pPr marL="914446" algn="l" defTabSz="609630" rtl="0" eaLnBrk="1" latinLnBrk="0" hangingPunct="1">
+        <a:defRPr sz="1200" kern="1200">
+          <a:solidFill>
+            <a:schemeClr val="tx1"/>
+          </a:solidFill>
+          <a:latin typeface="+mn-lt"/>
+          <a:ea typeface="+mn-ea"/>
+          <a:cs typeface="+mn-cs"/>
+        </a:defRPr>
+      </a:lvl4pPr>
+      <a:lvl5pPr marL="1219261" algn="l" defTabSz="609630" rtl="0" eaLnBrk="1" latinLnBrk="0" hangingPunct="1">
+        <a:defRPr sz="1200" kern="1200">
+          <a:solidFill>
+            <a:schemeClr val="tx1"/>
+          </a:solidFill>
+          <a:latin typeface="+mn-lt"/>
+          <a:ea typeface="+mn-ea"/>
+          <a:cs typeface="+mn-cs"/>
+        </a:defRPr>
+      </a:lvl5pPr>
+      <a:lvl6pPr marL="1524076" algn="l" defTabSz="609630" rtl="0" eaLnBrk="1" latinLnBrk="0" hangingPunct="1">
+        <a:defRPr sz="1200" kern="1200">
+          <a:solidFill>
+            <a:schemeClr val="tx1"/>
+          </a:solidFill>
+          <a:latin typeface="+mn-lt"/>
+          <a:ea typeface="+mn-ea"/>
+          <a:cs typeface="+mn-cs"/>
+        </a:defRPr>
+      </a:lvl6pPr>
+      <a:lvl7pPr marL="1828891" algn="l" defTabSz="609630" rtl="0" eaLnBrk="1" latinLnBrk="0" hangingPunct="1">
+        <a:defRPr sz="1200" kern="1200">
+          <a:solidFill>
+            <a:schemeClr val="tx1"/>
+          </a:solidFill>
+          <a:latin typeface="+mn-lt"/>
+          <a:ea typeface="+mn-ea"/>
+          <a:cs typeface="+mn-cs"/>
+        </a:defRPr>
+      </a:lvl7pPr>
+      <a:lvl8pPr marL="2133707" algn="l" defTabSz="609630" rtl="0" eaLnBrk="1" latinLnBrk="0" hangingPunct="1">
+        <a:defRPr sz="1200" kern="1200">
+          <a:solidFill>
+            <a:schemeClr val="tx1"/>
+          </a:solidFill>
+          <a:latin typeface="+mn-lt"/>
+          <a:ea typeface="+mn-ea"/>
+          <a:cs typeface="+mn-cs"/>
+        </a:defRPr>
+      </a:lvl8pPr>
+      <a:lvl9pPr marL="2438522" algn="l" defTabSz="609630" rtl="0" eaLnBrk="1" latinLnBrk="0" hangingPunct="1">
+        <a:defRPr sz="1200" kern="1200">
+          <a:solidFill>
+            <a:schemeClr val="tx1"/>
+          </a:solidFill>
+          <a:latin typeface="+mn-lt"/>
+          <a:ea typeface="+mn-ea"/>
+          <a:cs typeface="+mn-cs"/>
+        </a:defRPr>
+      </a:lvl9pPr>
+    </p:otherStyle>
+  </p:txStyles>
+</p:sldMaster>
+</file>
+
+<file path=ppt/slides/slide1.xml><?xml version="1.0" encoding="utf-8"?>
+<p:sld xmlns:a="http://schemas.openxmlformats.org/drawingml/2006/main" xmlns:r="http://schemas.openxmlformats.org/officeDocument/2006/relationships" xmlns:p="http://schemas.openxmlformats.org/presentationml/2006/main">
+  <p:cSld>
+    <p:spTree>
+      <p:nvGrpSpPr>
+        <p:cNvPr id="1" name=""/>
+        <p:cNvGrpSpPr/>
+        <p:nvPr/>
+      </p:nvGrpSpPr>
+      <p:grpSpPr>
+        <a:xfrm>
+          <a:off x="0" y="0"/>
+          <a:ext cx="0" cy="0"/>
+          <a:chOff x="0" y="0"/>
+          <a:chExt cx="0" cy="0"/>
+        </a:xfrm>
+      </p:grpSpPr>
+      <p:sp>
+        <p:nvSpPr>
+          <p:cNvPr id="2" name="Freeform 2"/>
+          <p:cNvSpPr/>
+          <p:nvPr/>
+        </p:nvSpPr>
+        <p:spPr>
+          <a:xfrm>
+            <a:off x="0" y="0"/>
+            <a:ext cx="12192000" cy="6858000"/>
+          </a:xfrm>
+          <a:custGeom>
+            <a:avLst/>
+            <a:gdLst/>
+            <a:ahLst/>
+            <a:cxnLst/>
+            <a:rect l="l" t="t" r="r" b="b"/>
+            <a:pathLst>
+              <a:path w="18288000" h="10287000">
+                <a:moveTo>
+                  <a:pt x="0" y="0"/>
+                </a:moveTo>
+                <a:lnTo>
+                  <a:pt x="18288000" y="0"/>
+                </a:lnTo>
+                <a:lnTo>
+                  <a:pt x="18288000" y="10287000"/>
+                </a:lnTo>
+                <a:lnTo>
+                  <a:pt x="0" y="10287000"/>
+                </a:lnTo>
+                <a:lnTo>
+                  <a:pt x="0" y="0"/>
+                </a:lnTo>
+                <a:close/>
+              </a:path>
+            </a:pathLst>
+          </a:custGeom>
+          <a:blipFill>
+            <a:blip r:embed="rId2"/>
+            <a:stretch>
+              <a:fillRect/>
+            </a:stretch>
+          </a:blipFill>
+        </p:spPr>
+        <p:txBody>
+          <a:bodyPr/>
+          <a:lstStyle/>
+          <a:p>
+            <a:pPr marL="0" marR="0" lvl="0" indent="0" algn="l" defTabSz="609630" rtl="0" eaLnBrk="1" fontAlgn="auto" latinLnBrk="0" hangingPunct="1">
+              <a:lnSpc>
+                <a:spcPct val="100000"/>
+              </a:lnSpc>
+              <a:spcBef>
+                <a:spcPts val="0"/>
+              </a:spcBef>
+              <a:spcAft>
+                <a:spcPts val="0"/>
+              </a:spcAft>
+              <a:buClrTx/>
+              <a:buSzTx/>
+              <a:buFontTx/>
+              <a:buNone/>
+              <a:tabLst/>
+              <a:defRPr/>
+            </a:pPr>
+            <a:endParaRPr kumimoji="0" lang="it-IT" sz="1200" b="0" i="0" u="none" strike="noStrike" kern="1200" cap="none" spc="0" normalizeH="0" baseline="0" noProof="0">
+              <a:ln>
+                <a:noFill/>
+              </a:ln>
+              <a:solidFill>
+                <a:prstClr val="black"/>
+              </a:solidFill>
+              <a:effectLst/>
+              <a:uLnTx/>
+              <a:uFillTx/>
+              <a:latin typeface="Calibri"/>
+              <a:ea typeface="+mn-ea"/>
+              <a:cs typeface="+mn-cs"/>
+            </a:endParaRPr>
+          </a:p>
+        </p:txBody>
+      </p:sp>
+      <p:sp>
+        <p:nvSpPr>
+          <p:cNvPr id="3" name="Freeform 3"/>
+          <p:cNvSpPr/>
+          <p:nvPr/>
+        </p:nvSpPr>
+        <p:spPr>
+          <a:xfrm>
+            <a:off x="8477436" y="273051"/>
+            <a:ext cx="1768351" cy="1768351"/>
+          </a:xfrm>
+          <a:custGeom>
+            <a:avLst/>
+            <a:gdLst/>
+            <a:ahLst/>
+            <a:cxnLst/>
+            <a:rect l="l" t="t" r="r" b="b"/>
+            <a:pathLst>
+              <a:path w="2652527" h="2652527">
+                <a:moveTo>
+                  <a:pt x="0" y="0"/>
+                </a:moveTo>
+                <a:lnTo>
+                  <a:pt x="2652527" y="0"/>
+                </a:lnTo>
+                <a:lnTo>
+                  <a:pt x="2652527" y="2652527"/>
+                </a:lnTo>
+                <a:lnTo>
+                  <a:pt x="0" y="2652527"/>
+                </a:lnTo>
+                <a:lnTo>
+                  <a:pt x="0" y="0"/>
+                </a:lnTo>
+                <a:close/>
+              </a:path>
+            </a:pathLst>
+          </a:custGeom>
+          <a:blipFill>
+            <a:blip r:embed="rId3"/>
+            <a:stretch>
+              <a:fillRect/>
+            </a:stretch>
+          </a:blipFill>
+        </p:spPr>
+        <p:txBody>
+          <a:bodyPr/>
+          <a:lstStyle/>
+          <a:p>
+            <a:pPr marL="0" marR="0" lvl="0" indent="0" algn="l" defTabSz="609630" rtl="0" eaLnBrk="1" fontAlgn="auto" latinLnBrk="0" hangingPunct="1">
+              <a:lnSpc>
+                <a:spcPct val="100000"/>
+              </a:lnSpc>
+              <a:spcBef>
+                <a:spcPts val="0"/>
+              </a:spcBef>
+              <a:spcAft>
+                <a:spcPts val="0"/>
+              </a:spcAft>
+              <a:buClrTx/>
+              <a:buSzTx/>
+              <a:buFontTx/>
+              <a:buNone/>
+              <a:tabLst/>
+              <a:defRPr/>
+            </a:pPr>
+            <a:endParaRPr kumimoji="0" lang="it-IT" sz="1200" b="0" i="0" u="none" strike="noStrike" kern="1200" cap="none" spc="0" normalizeH="0" baseline="0" noProof="0">
+              <a:ln>
+                <a:noFill/>
+              </a:ln>
+              <a:solidFill>
+                <a:prstClr val="black"/>
+              </a:solidFill>
+              <a:effectLst/>
+              <a:uLnTx/>
+              <a:uFillTx/>
+              <a:latin typeface="Calibri"/>
+              <a:ea typeface="+mn-ea"/>
+              <a:cs typeface="+mn-cs"/>
+            </a:endParaRPr>
+          </a:p>
+        </p:txBody>
+      </p:sp>
+      <p:sp>
+        <p:nvSpPr>
+          <p:cNvPr id="4" name="Freeform 4"/>
+          <p:cNvSpPr/>
+          <p:nvPr/>
+        </p:nvSpPr>
+        <p:spPr>
+          <a:xfrm>
+            <a:off x="-424608" y="3987443"/>
+            <a:ext cx="4816351" cy="4735451"/>
+          </a:xfrm>
+          <a:custGeom>
+            <a:avLst/>
+            <a:gdLst/>
+            <a:ahLst/>
+            <a:cxnLst/>
+            <a:rect l="l" t="t" r="r" b="b"/>
+            <a:pathLst>
+              <a:path w="7224527" h="7103176">
+                <a:moveTo>
+                  <a:pt x="0" y="0"/>
+                </a:moveTo>
+                <a:lnTo>
+                  <a:pt x="7224528" y="0"/>
+                </a:lnTo>
+                <a:lnTo>
+                  <a:pt x="7224528" y="7103176"/>
+                </a:lnTo>
+                <a:lnTo>
+                  <a:pt x="0" y="7103176"/>
+                </a:lnTo>
+                <a:lnTo>
+                  <a:pt x="0" y="0"/>
+                </a:lnTo>
+                <a:close/>
+              </a:path>
+            </a:pathLst>
+          </a:custGeom>
+          <a:blipFill>
+            <a:blip r:embed="rId4"/>
+            <a:stretch>
+              <a:fillRect l="-3058" t="-2409" b="-2409"/>
+            </a:stretch>
+          </a:blipFill>
+        </p:spPr>
+        <p:txBody>
+          <a:bodyPr/>
+          <a:lstStyle/>
+          <a:p>
+            <a:pPr marL="0" marR="0" lvl="0" indent="0" algn="l" defTabSz="609630" rtl="0" eaLnBrk="1" fontAlgn="auto" latinLnBrk="0" hangingPunct="1">
+              <a:lnSpc>
+                <a:spcPct val="100000"/>
+              </a:lnSpc>
+              <a:spcBef>
+                <a:spcPts val="0"/>
+              </a:spcBef>
+              <a:spcAft>
+                <a:spcPts val="0"/>
+              </a:spcAft>
+              <a:buClrTx/>
+              <a:buSzTx/>
+              <a:buFontTx/>
+              <a:buNone/>
+              <a:tabLst/>
+              <a:defRPr/>
+            </a:pPr>
+            <a:endParaRPr kumimoji="0" lang="it-IT" sz="1200" b="0" i="0" u="none" strike="noStrike" kern="1200" cap="none" spc="0" normalizeH="0" baseline="0" noProof="0">
+              <a:ln>
+                <a:noFill/>
+              </a:ln>
+              <a:solidFill>
+                <a:prstClr val="black"/>
+              </a:solidFill>
+              <a:effectLst/>
+              <a:uLnTx/>
+              <a:uFillTx/>
+              <a:latin typeface="Calibri"/>
+              <a:ea typeface="+mn-ea"/>
+              <a:cs typeface="+mn-cs"/>
+            </a:endParaRPr>
+          </a:p>
+        </p:txBody>
+      </p:sp>
+      <p:sp>
+        <p:nvSpPr>
+          <p:cNvPr id="5" name="Freeform 5"/>
+          <p:cNvSpPr/>
+          <p:nvPr/>
+        </p:nvSpPr>
+        <p:spPr>
+          <a:xfrm>
+            <a:off x="-1839463" y="-1674635"/>
+            <a:ext cx="5173213" cy="4271901"/>
+          </a:xfrm>
+          <a:custGeom>
+            <a:avLst/>
+            <a:gdLst/>
+            <a:ahLst/>
+            <a:cxnLst/>
+            <a:rect l="l" t="t" r="r" b="b"/>
+            <a:pathLst>
+              <a:path w="7759819" h="6407851">
+                <a:moveTo>
+                  <a:pt x="0" y="0"/>
+                </a:moveTo>
+                <a:lnTo>
+                  <a:pt x="7759819" y="0"/>
+                </a:lnTo>
+                <a:lnTo>
+                  <a:pt x="7759819" y="6407851"/>
+                </a:lnTo>
+                <a:lnTo>
+                  <a:pt x="0" y="6407851"/>
+                </a:lnTo>
+                <a:lnTo>
+                  <a:pt x="0" y="0"/>
+                </a:lnTo>
+                <a:close/>
+              </a:path>
+            </a:pathLst>
+          </a:custGeom>
+          <a:blipFill>
+            <a:blip r:embed="rId5"/>
+            <a:stretch>
+              <a:fillRect t="-10549" b="-10549"/>
+            </a:stretch>
+          </a:blipFill>
+        </p:spPr>
+        <p:txBody>
+          <a:bodyPr/>
+          <a:lstStyle/>
+          <a:p>
+            <a:pPr marL="0" marR="0" lvl="0" indent="0" algn="l" defTabSz="609630" rtl="0" eaLnBrk="1" fontAlgn="auto" latinLnBrk="0" hangingPunct="1">
+              <a:lnSpc>
+                <a:spcPct val="100000"/>
+              </a:lnSpc>
+              <a:spcBef>
+                <a:spcPts val="0"/>
+              </a:spcBef>
+              <a:spcAft>
+                <a:spcPts val="0"/>
+              </a:spcAft>
+              <a:buClrTx/>
+              <a:buSzTx/>
+              <a:buFontTx/>
+              <a:buNone/>
+              <a:tabLst/>
+              <a:defRPr/>
+            </a:pPr>
+            <a:endParaRPr kumimoji="0" lang="it-IT" sz="1200" b="0" i="0" u="none" strike="noStrike" kern="1200" cap="none" spc="0" normalizeH="0" baseline="0" noProof="0">
+              <a:ln>
+                <a:noFill/>
+              </a:ln>
+              <a:solidFill>
+                <a:prstClr val="black"/>
+              </a:solidFill>
+              <a:effectLst/>
+              <a:uLnTx/>
+              <a:uFillTx/>
+              <a:latin typeface="Calibri"/>
+              <a:ea typeface="+mn-ea"/>
+              <a:cs typeface="+mn-cs"/>
+            </a:endParaRPr>
+          </a:p>
+        </p:txBody>
+      </p:sp>
+      <p:sp>
+        <p:nvSpPr>
+          <p:cNvPr id="6" name="Freeform 6"/>
+          <p:cNvSpPr/>
+          <p:nvPr/>
+        </p:nvSpPr>
+        <p:spPr>
+          <a:xfrm>
+            <a:off x="8858250" y="3590516"/>
+            <a:ext cx="3492377" cy="3492377"/>
+          </a:xfrm>
+          <a:custGeom>
+            <a:avLst/>
+            <a:gdLst/>
+            <a:ahLst/>
+            <a:cxnLst/>
+            <a:rect l="l" t="t" r="r" b="b"/>
+            <a:pathLst>
+              <a:path w="5238565" h="5238565">
+                <a:moveTo>
+                  <a:pt x="0" y="0"/>
+                </a:moveTo>
+                <a:lnTo>
+                  <a:pt x="5238565" y="0"/>
+                </a:lnTo>
+                <a:lnTo>
+                  <a:pt x="5238565" y="5238565"/>
+                </a:lnTo>
+                <a:lnTo>
+                  <a:pt x="0" y="5238565"/>
+                </a:lnTo>
+                <a:lnTo>
+                  <a:pt x="0" y="0"/>
+                </a:lnTo>
+                <a:close/>
+              </a:path>
+            </a:pathLst>
+          </a:custGeom>
+          <a:blipFill>
+            <a:blip r:embed="rId6"/>
+            <a:stretch>
+              <a:fillRect/>
+            </a:stretch>
+          </a:blipFill>
+        </p:spPr>
+        <p:txBody>
+          <a:bodyPr/>
+          <a:lstStyle/>
+          <a:p>
+            <a:pPr marL="0" marR="0" lvl="0" indent="0" algn="l" defTabSz="609630" rtl="0" eaLnBrk="1" fontAlgn="auto" latinLnBrk="0" hangingPunct="1">
+              <a:lnSpc>
+                <a:spcPct val="100000"/>
+              </a:lnSpc>
+              <a:spcBef>
+                <a:spcPts val="0"/>
+              </a:spcBef>
+              <a:spcAft>
+                <a:spcPts val="0"/>
+              </a:spcAft>
+              <a:buClrTx/>
+              <a:buSzTx/>
+              <a:buFontTx/>
+              <a:buNone/>
+              <a:tabLst/>
+              <a:defRPr/>
+            </a:pPr>
+            <a:endParaRPr kumimoji="0" lang="it-IT" sz="1200" b="0" i="0" u="none" strike="noStrike" kern="1200" cap="none" spc="0" normalizeH="0" baseline="0" noProof="0">
+              <a:ln>
+                <a:noFill/>
+              </a:ln>
+              <a:solidFill>
+                <a:prstClr val="black"/>
+              </a:solidFill>
+              <a:effectLst/>
+              <a:uLnTx/>
+              <a:uFillTx/>
+              <a:latin typeface="Calibri"/>
+              <a:ea typeface="+mn-ea"/>
+              <a:cs typeface="+mn-cs"/>
+            </a:endParaRPr>
+          </a:p>
+        </p:txBody>
+      </p:sp>
+      <p:sp>
+        <p:nvSpPr>
+          <p:cNvPr id="7" name="Freeform 7"/>
+          <p:cNvSpPr/>
+          <p:nvPr/>
+        </p:nvSpPr>
+        <p:spPr>
+          <a:xfrm>
+            <a:off x="8296337" y="5231341"/>
+            <a:ext cx="1123827" cy="1123827"/>
+          </a:xfrm>
+          <a:custGeom>
+            <a:avLst/>
+            <a:gdLst/>
+            <a:ahLst/>
+            <a:cxnLst/>
+            <a:rect l="l" t="t" r="r" b="b"/>
+            <a:pathLst>
+              <a:path w="1685740" h="1685740">
+                <a:moveTo>
+                  <a:pt x="0" y="0"/>
+                </a:moveTo>
+                <a:lnTo>
+                  <a:pt x="1685740" y="0"/>
+                </a:lnTo>
+                <a:lnTo>
+                  <a:pt x="1685740" y="1685740"/>
+                </a:lnTo>
+                <a:lnTo>
+                  <a:pt x="0" y="1685740"/>
+                </a:lnTo>
+                <a:lnTo>
+                  <a:pt x="0" y="0"/>
+                </a:lnTo>
+                <a:close/>
+              </a:path>
+            </a:pathLst>
+          </a:custGeom>
+          <a:blipFill>
+            <a:blip r:embed="rId7"/>
+            <a:stretch>
+              <a:fillRect/>
+            </a:stretch>
+          </a:blipFill>
+        </p:spPr>
+        <p:txBody>
+          <a:bodyPr/>
+          <a:lstStyle/>
+          <a:p>
+            <a:pPr marL="0" marR="0" lvl="0" indent="0" algn="l" defTabSz="609630" rtl="0" eaLnBrk="1" fontAlgn="auto" latinLnBrk="0" hangingPunct="1">
+              <a:lnSpc>
+                <a:spcPct val="100000"/>
+              </a:lnSpc>
+              <a:spcBef>
+                <a:spcPts val="0"/>
+              </a:spcBef>
+              <a:spcAft>
+                <a:spcPts val="0"/>
+              </a:spcAft>
+              <a:buClrTx/>
+              <a:buSzTx/>
+              <a:buFontTx/>
+              <a:buNone/>
+              <a:tabLst/>
+              <a:defRPr/>
+            </a:pPr>
+            <a:endParaRPr kumimoji="0" lang="it-IT" sz="1200" b="0" i="0" u="none" strike="noStrike" kern="1200" cap="none" spc="0" normalizeH="0" baseline="0" noProof="0">
+              <a:ln>
+                <a:noFill/>
+              </a:ln>
+              <a:solidFill>
+                <a:prstClr val="black"/>
+              </a:solidFill>
+              <a:effectLst/>
+              <a:uLnTx/>
+              <a:uFillTx/>
+              <a:latin typeface="Calibri"/>
+              <a:ea typeface="+mn-ea"/>
+              <a:cs typeface="+mn-cs"/>
+            </a:endParaRPr>
+          </a:p>
+        </p:txBody>
+      </p:sp>
+      <p:sp>
+        <p:nvSpPr>
+          <p:cNvPr id="8" name="TextBox 8"/>
+          <p:cNvSpPr txBox="1"/>
+          <p:nvPr/>
+        </p:nvSpPr>
+        <p:spPr>
+          <a:xfrm>
+            <a:off x="6092826" y="3166110"/>
+            <a:ext cx="6350" cy="415755"/>
+          </a:xfrm>
+          <a:prstGeom prst="rect">
+            <a:avLst/>
+          </a:prstGeom>
+        </p:spPr>
+        <p:txBody>
+          <a:bodyPr lIns="0" tIns="0" rIns="0" bIns="0" rtlCol="0" anchor="t">
+            <a:spAutoFit/>
+          </a:bodyPr>
+          <a:lstStyle/>
+          <a:p>
+            <a:pPr marL="0" marR="0" lvl="0" indent="0" algn="ctr" defTabSz="609630" rtl="0" eaLnBrk="1" fontAlgn="auto" latinLnBrk="0" hangingPunct="1">
+              <a:lnSpc>
+                <a:spcPts val="3920"/>
+              </a:lnSpc>
+              <a:spcBef>
+                <a:spcPts val="0"/>
+              </a:spcBef>
+              <a:spcAft>
+                <a:spcPts val="0"/>
+              </a:spcAft>
+              <a:buClrTx/>
+              <a:buSzTx/>
+              <a:buFontTx/>
+              <a:buNone/>
+              <a:tabLst/>
+              <a:defRPr/>
+            </a:pPr>
+            <a:endParaRPr kumimoji="0" sz="1200" b="0" i="0" u="none" strike="noStrike" kern="1200" cap="none" spc="0" normalizeH="0" baseline="0" noProof="0">
+              <a:ln>
+                <a:noFill/>
+              </a:ln>
+              <a:solidFill>
+                <a:prstClr val="black"/>
+              </a:solidFill>
+              <a:effectLst/>
+              <a:uLnTx/>
+              <a:uFillTx/>
+              <a:latin typeface="Calibri"/>
+              <a:ea typeface="+mn-ea"/>
+              <a:cs typeface="+mn-cs"/>
+            </a:endParaRPr>
+          </a:p>
+        </p:txBody>
+      </p:sp>
+      <p:sp>
+        <p:nvSpPr>
+          <p:cNvPr id="9" name="TextBox 9"/>
+          <p:cNvSpPr txBox="1"/>
+          <p:nvPr/>
+        </p:nvSpPr>
+        <p:spPr>
+          <a:xfrm>
+            <a:off x="-3174" y="4134288"/>
+            <a:ext cx="12192000" cy="349006"/>
+          </a:xfrm>
+          <a:prstGeom prst="rect">
+            <a:avLst/>
+          </a:prstGeom>
+        </p:spPr>
+        <p:txBody>
+          <a:bodyPr lIns="0" tIns="0" rIns="0" bIns="0" rtlCol="0" anchor="t">
+            <a:spAutoFit/>
+          </a:bodyPr>
+          <a:lstStyle/>
+          <a:p>
+            <a:pPr marL="0" marR="0" lvl="0" indent="0" algn="ctr" defTabSz="609630" rtl="0" eaLnBrk="1" fontAlgn="auto" latinLnBrk="0" hangingPunct="1">
+              <a:lnSpc>
+                <a:spcPts val="2880"/>
+              </a:lnSpc>
+              <a:spcBef>
+                <a:spcPts val="0"/>
+              </a:spcBef>
+              <a:spcAft>
+                <a:spcPts val="0"/>
+              </a:spcAft>
+              <a:buClrTx/>
+              <a:buSzTx/>
+              <a:buFontTx/>
+              <a:buNone/>
+              <a:tabLst/>
+              <a:defRPr/>
+            </a:pPr>
+            <a:r>
+              <a:rPr kumimoji="0" lang="en-US" sz="2400" b="1" i="0" u="none" strike="noStrike" kern="1200" cap="none" spc="0" normalizeH="0" baseline="0" noProof="0" dirty="0">
+                <a:ln>
+                  <a:noFill/>
+                </a:ln>
+                <a:solidFill>
+                  <a:srgbClr val="FFFFFF"/>
+                </a:solidFill>
+                <a:effectLst/>
+                <a:uLnTx/>
+                <a:uFillTx/>
+                <a:latin typeface="Inter Bold"/>
+                <a:ea typeface="Inter Bold"/>
+                <a:cs typeface="Inter Bold"/>
+              </a:rPr>
+              <a:t>CORSO DI MOBILE PROGRAMMING</a:t>
+            </a:r>
+          </a:p>
+        </p:txBody>
+      </p:sp>
+      <p:sp>
+        <p:nvSpPr>
+          <p:cNvPr id="10" name="TextBox 10"/>
+          <p:cNvSpPr txBox="1"/>
+          <p:nvPr/>
+        </p:nvSpPr>
+        <p:spPr>
+          <a:xfrm>
+            <a:off x="0" y="6057900"/>
+            <a:ext cx="12192000" cy="107017"/>
+          </a:xfrm>
+          <a:prstGeom prst="rect">
+            <a:avLst/>
+          </a:prstGeom>
+        </p:spPr>
+        <p:txBody>
+          <a:bodyPr lIns="0" tIns="0" rIns="0" bIns="0" rtlCol="0" anchor="t">
+            <a:spAutoFit/>
+          </a:bodyPr>
+          <a:lstStyle/>
+          <a:p>
+            <a:pPr marL="0" marR="0" lvl="0" indent="0" algn="ctr" defTabSz="609630" rtl="0" eaLnBrk="1" fontAlgn="auto" latinLnBrk="0" hangingPunct="1">
+              <a:lnSpc>
+                <a:spcPts val="879"/>
+              </a:lnSpc>
+              <a:spcBef>
+                <a:spcPts val="0"/>
+              </a:spcBef>
+              <a:spcAft>
+                <a:spcPts val="0"/>
+              </a:spcAft>
+              <a:buClrTx/>
+              <a:buSzTx/>
+              <a:buFontTx/>
+              <a:buNone/>
+              <a:tabLst/>
+              <a:defRPr/>
+            </a:pPr>
+            <a:r>
+              <a:rPr kumimoji="0" lang="en-US" sz="700" b="0" i="0" u="none" strike="noStrike" kern="1200" cap="none" spc="0" normalizeH="0" baseline="0" noProof="0" err="1">
+                <a:ln>
+                  <a:noFill/>
+                </a:ln>
+                <a:solidFill>
+                  <a:srgbClr val="FFFFFF"/>
+                </a:solidFill>
+                <a:effectLst/>
+                <a:uLnTx/>
+                <a:uFillTx/>
+                <a:latin typeface="Inter"/>
+                <a:ea typeface="Inter"/>
+                <a:cs typeface="Inter"/>
+                <a:sym typeface="Inter"/>
+              </a:rPr>
+              <a:t>Virvelle</a:t>
+            </a:r>
+            <a:r>
+              <a:rPr kumimoji="0" lang="en-US" sz="700" b="0" i="0" u="none" strike="noStrike" kern="1200" cap="none" spc="0" normalizeH="0" baseline="0" noProof="0">
+                <a:ln>
+                  <a:noFill/>
+                </a:ln>
+                <a:solidFill>
+                  <a:srgbClr val="FFFFFF"/>
+                </a:solidFill>
+                <a:effectLst/>
+                <a:uLnTx/>
+                <a:uFillTx/>
+                <a:latin typeface="Inter"/>
+                <a:ea typeface="Inter"/>
+                <a:cs typeface="Inter"/>
+                <a:sym typeface="Inter"/>
+              </a:rPr>
+              <a:t> </a:t>
+            </a:r>
+            <a:r>
+              <a:rPr kumimoji="0" lang="en-US" sz="700" b="0" i="0" u="none" strike="noStrike" kern="1200" cap="none" spc="0" normalizeH="0" baseline="0" noProof="0" err="1">
+                <a:ln>
+                  <a:noFill/>
+                </a:ln>
+                <a:solidFill>
+                  <a:srgbClr val="FFFFFF"/>
+                </a:solidFill>
+                <a:effectLst/>
+                <a:uLnTx/>
+                <a:uFillTx/>
+                <a:latin typeface="Inter"/>
+                <a:ea typeface="Inter"/>
+                <a:cs typeface="Inter"/>
+                <a:sym typeface="Inter"/>
+              </a:rPr>
+              <a:t>S.r.l.</a:t>
+            </a:r>
+            <a:r>
+              <a:rPr kumimoji="0" lang="en-US" sz="700" b="0" i="0" u="none" strike="noStrike" kern="1200" cap="none" spc="0" normalizeH="0" baseline="0" noProof="0">
+                <a:ln>
+                  <a:noFill/>
+                </a:ln>
+                <a:solidFill>
+                  <a:srgbClr val="FFFFFF"/>
+                </a:solidFill>
+                <a:effectLst/>
+                <a:uLnTx/>
+                <a:uFillTx/>
+                <a:latin typeface="Inter"/>
+                <a:ea typeface="Inter"/>
+                <a:cs typeface="Inter"/>
+                <a:sym typeface="Inter"/>
+              </a:rPr>
+              <a:t> – Società Benefit 2025. All rights reserved. Confidential and proprietary</a:t>
+            </a:r>
+          </a:p>
+        </p:txBody>
+      </p:sp>
+      <p:sp>
+        <p:nvSpPr>
+          <p:cNvPr id="11" name="Freeform 11"/>
+          <p:cNvSpPr/>
+          <p:nvPr/>
+        </p:nvSpPr>
+        <p:spPr>
+          <a:xfrm>
+            <a:off x="3333750" y="2611154"/>
+            <a:ext cx="5524500" cy="1345969"/>
+          </a:xfrm>
+          <a:custGeom>
+            <a:avLst/>
+            <a:gdLst/>
+            <a:ahLst/>
+            <a:cxnLst/>
+            <a:rect l="l" t="t" r="r" b="b"/>
+            <a:pathLst>
+              <a:path w="8286750" h="2018954">
+                <a:moveTo>
+                  <a:pt x="0" y="0"/>
+                </a:moveTo>
+                <a:lnTo>
+                  <a:pt x="8286750" y="0"/>
+                </a:lnTo>
+                <a:lnTo>
+                  <a:pt x="8286750" y="2018953"/>
+                </a:lnTo>
+                <a:lnTo>
+                  <a:pt x="0" y="2018953"/>
+                </a:lnTo>
+                <a:lnTo>
+                  <a:pt x="0" y="0"/>
+                </a:lnTo>
+                <a:close/>
+              </a:path>
+            </a:pathLst>
+          </a:custGeom>
+          <a:blipFill>
+            <a:blip>
+              <a:extLst>
+                <a:ext uri="{96DAC541-7B7A-43D3-8B79-37D633B846F1}">
+                  <asvg:svgBlip xmlns:asvg="http://schemas.microsoft.com/office/drawing/2016/SVG/main" r:embed="rId8"/>
+                </a:ext>
+              </a:extLst>
+            </a:blip>
+            <a:stretch>
+              <a:fillRect/>
+            </a:stretch>
+          </a:blipFill>
+        </p:spPr>
+        <p:txBody>
+          <a:bodyPr/>
+          <a:lstStyle/>
+          <a:p>
+            <a:pPr marL="0" marR="0" lvl="0" indent="0" algn="l" defTabSz="609630" rtl="0" eaLnBrk="1" fontAlgn="auto" latinLnBrk="0" hangingPunct="1">
+              <a:lnSpc>
+                <a:spcPct val="100000"/>
+              </a:lnSpc>
+              <a:spcBef>
+                <a:spcPts val="0"/>
+              </a:spcBef>
+              <a:spcAft>
+                <a:spcPts val="0"/>
+              </a:spcAft>
+              <a:buClrTx/>
+              <a:buSzTx/>
+              <a:buFontTx/>
+              <a:buNone/>
+              <a:tabLst/>
+              <a:defRPr/>
+            </a:pPr>
+            <a:endParaRPr kumimoji="0" lang="it-IT" sz="1200" b="0" i="0" u="none" strike="noStrike" kern="1200" cap="none" spc="0" normalizeH="0" baseline="0" noProof="0">
+              <a:ln>
+                <a:noFill/>
+              </a:ln>
+              <a:solidFill>
+                <a:prstClr val="black"/>
+              </a:solidFill>
+              <a:effectLst/>
+              <a:uLnTx/>
+              <a:uFillTx/>
+              <a:latin typeface="Calibri"/>
+              <a:ea typeface="+mn-ea"/>
+              <a:cs typeface="+mn-cs"/>
+            </a:endParaRPr>
+          </a:p>
+        </p:txBody>
+      </p:sp>
+      <p:pic>
+        <p:nvPicPr>
+          <p:cNvPr id="13" name="Immagine 12">
+            <a:extLst>
+              <a:ext uri="{FF2B5EF4-FFF2-40B4-BE49-F238E27FC236}">
+                <a16:creationId xmlns:a16="http://schemas.microsoft.com/office/drawing/2014/main" id="{D384CB68-9051-8446-EAA1-BF71C3EB8533}"/>
+              </a:ext>
+            </a:extLst>
+          </p:cNvPr>
+          <p:cNvPicPr>
+            <a:picLocks noChangeAspect="1"/>
+          </p:cNvPicPr>
+          <p:nvPr/>
+        </p:nvPicPr>
+        <p:blipFill>
+          <a:blip r:embed="rId9">
+            <a:extLst>
+              <a:ext uri="{28A0092B-C50C-407E-A947-70E740481C1C}">
+                <a14:useLocalDpi xmlns:a14="http://schemas.microsoft.com/office/drawing/2010/main" val="0"/>
+              </a:ext>
+            </a:extLst>
+          </a:blip>
+          <a:stretch>
+            <a:fillRect/>
+          </a:stretch>
+        </p:blipFill>
+        <p:spPr>
+          <a:xfrm>
+            <a:off x="1855522" y="6162759"/>
+            <a:ext cx="8356281" cy="727091"/>
+          </a:xfrm>
+          <a:prstGeom prst="rect">
+            <a:avLst/>
+          </a:prstGeom>
+        </p:spPr>
+      </p:pic>
+      <p:sp>
+        <p:nvSpPr>
+          <p:cNvPr id="12" name="TextBox 9">
+            <a:extLst>
+              <a:ext uri="{FF2B5EF4-FFF2-40B4-BE49-F238E27FC236}">
+                <a16:creationId xmlns:a16="http://schemas.microsoft.com/office/drawing/2014/main" id="{E6A88552-F1E4-32C7-102E-334A7D6EE115}"/>
+              </a:ext>
+            </a:extLst>
+          </p:cNvPr>
+          <p:cNvSpPr txBox="1"/>
+          <p:nvPr/>
+        </p:nvSpPr>
+        <p:spPr>
+          <a:xfrm>
+            <a:off x="5119425" y="4609302"/>
+            <a:ext cx="1959502" cy="319831"/>
+          </a:xfrm>
+          <a:prstGeom prst="rect">
+            <a:avLst/>
+          </a:prstGeom>
+        </p:spPr>
+        <p:txBody>
+          <a:bodyPr wrap="square" lIns="0" tIns="0" rIns="0" bIns="0" rtlCol="0" anchor="t">
+            <a:spAutoFit/>
+          </a:bodyPr>
+          <a:lstStyle/>
+          <a:p>
+            <a:pPr marL="0" marR="0" lvl="0" indent="0" algn="ctr" defTabSz="609630" rtl="0" eaLnBrk="1" fontAlgn="auto" latinLnBrk="0" hangingPunct="1">
+              <a:lnSpc>
+                <a:spcPts val="2880"/>
+              </a:lnSpc>
+              <a:spcBef>
+                <a:spcPts val="0"/>
+              </a:spcBef>
+              <a:spcAft>
+                <a:spcPts val="0"/>
+              </a:spcAft>
+              <a:buClrTx/>
+              <a:buSzTx/>
+              <a:buFontTx/>
+              <a:buNone/>
+              <a:tabLst/>
+              <a:defRPr/>
+            </a:pPr>
+            <a:r>
+              <a:rPr kumimoji="0" lang="en-US" sz="1400" b="1" i="0" u="none" strike="noStrike" kern="1200" cap="none" spc="0" normalizeH="0" baseline="0" noProof="0" dirty="0">
+                <a:ln>
+                  <a:noFill/>
+                </a:ln>
+                <a:solidFill>
+                  <a:srgbClr val="FFFFFF"/>
+                </a:solidFill>
+                <a:effectLst/>
+                <a:uLnTx/>
+                <a:uFillTx/>
+                <a:latin typeface="Inter Bold"/>
+                <a:ea typeface="Inter Bold"/>
+                <a:cs typeface="Inter Bold"/>
+              </a:rPr>
+              <a:t>PROGRAMMA GOL</a:t>
+            </a:r>
+          </a:p>
+        </p:txBody>
+      </p:sp>
     </p:spTree>
   </p:cSld>
   <p:clrMapOvr>
@@ -2049,11 +5571,11 @@
 
 <file path=ppt/slides/slide10.xml><?xml version="1.0" encoding="utf-8"?>
 <p:sld xmlns:a="http://schemas.openxmlformats.org/drawingml/2006/main" xmlns:r="http://schemas.openxmlformats.org/officeDocument/2006/relationships" xmlns:p="http://schemas.openxmlformats.org/presentationml/2006/main">
-  <p:cSld name="Slide 10">
+  <p:cSld name="Slide 9">
     <p:bg>
       <p:bgPr>
         <a:blipFill dpi="0" rotWithShape="1">
-          <a:blip r:embed="rId1">
+          <a:blip r:embed="rId3">
             <a:lum/>
           </a:blip>
           <a:srcRect/>
@@ -2088,11 +5610,11 @@
 
 <file path=ppt/slides/slide11.xml><?xml version="1.0" encoding="utf-8"?>
 <p:sld xmlns:a="http://schemas.openxmlformats.org/drawingml/2006/main" xmlns:r="http://schemas.openxmlformats.org/officeDocument/2006/relationships" xmlns:p="http://schemas.openxmlformats.org/presentationml/2006/main">
-  <p:cSld name="Slide 11">
+  <p:cSld name="Slide 10">
     <p:bg>
       <p:bgPr>
         <a:blipFill dpi="0" rotWithShape="1">
-          <a:blip r:embed="rId1">
+          <a:blip r:embed="rId3">
             <a:lum/>
           </a:blip>
           <a:srcRect/>
@@ -2127,11 +5649,11 @@
 
 <file path=ppt/slides/slide12.xml><?xml version="1.0" encoding="utf-8"?>
 <p:sld xmlns:a="http://schemas.openxmlformats.org/drawingml/2006/main" xmlns:r="http://schemas.openxmlformats.org/officeDocument/2006/relationships" xmlns:p="http://schemas.openxmlformats.org/presentationml/2006/main">
-  <p:cSld name="Slide 12">
+  <p:cSld name="Slide 11">
     <p:bg>
       <p:bgPr>
         <a:blipFill dpi="0" rotWithShape="1">
-          <a:blip r:embed="rId1">
+          <a:blip r:embed="rId3">
             <a:lum/>
           </a:blip>
           <a:srcRect/>
@@ -2166,11 +5688,11 @@
 
 <file path=ppt/slides/slide13.xml><?xml version="1.0" encoding="utf-8"?>
 <p:sld xmlns:a="http://schemas.openxmlformats.org/drawingml/2006/main" xmlns:r="http://schemas.openxmlformats.org/officeDocument/2006/relationships" xmlns:p="http://schemas.openxmlformats.org/presentationml/2006/main">
-  <p:cSld name="Slide 13">
+  <p:cSld name="Slide 12">
     <p:bg>
       <p:bgPr>
         <a:blipFill dpi="0" rotWithShape="1">
-          <a:blip r:embed="rId1">
+          <a:blip r:embed="rId3">
             <a:lum/>
           </a:blip>
           <a:srcRect/>
@@ -2205,11 +5727,11 @@
 
 <file path=ppt/slides/slide14.xml><?xml version="1.0" encoding="utf-8"?>
 <p:sld xmlns:a="http://schemas.openxmlformats.org/drawingml/2006/main" xmlns:r="http://schemas.openxmlformats.org/officeDocument/2006/relationships" xmlns:p="http://schemas.openxmlformats.org/presentationml/2006/main">
-  <p:cSld name="Slide 14">
+  <p:cSld name="Slide 13">
     <p:bg>
       <p:bgPr>
         <a:blipFill dpi="0" rotWithShape="1">
-          <a:blip r:embed="rId1">
+          <a:blip r:embed="rId3">
             <a:lum/>
           </a:blip>
           <a:srcRect/>
@@ -2242,13 +5764,13 @@
 </p:sld>
 </file>
 
-<file path=ppt/slides/slide2.xml><?xml version="1.0" encoding="utf-8"?>
+<file path=ppt/slides/slide15.xml><?xml version="1.0" encoding="utf-8"?>
 <p:sld xmlns:a="http://schemas.openxmlformats.org/drawingml/2006/main" xmlns:r="http://schemas.openxmlformats.org/officeDocument/2006/relationships" xmlns:p="http://schemas.openxmlformats.org/presentationml/2006/main">
-  <p:cSld name="Slide 2">
+  <p:cSld name="Slide 14">
     <p:bg>
       <p:bgPr>
         <a:blipFill dpi="0" rotWithShape="1">
-          <a:blip r:embed="rId1">
+          <a:blip r:embed="rId3">
             <a:lum/>
           </a:blip>
           <a:srcRect/>
@@ -2281,13 +5803,850 @@
 </p:sld>
 </file>
 
+<file path=ppt/slides/slide16.xml><?xml version="1.0" encoding="utf-8"?>
+<p:sld xmlns:a="http://schemas.openxmlformats.org/drawingml/2006/main" xmlns:r="http://schemas.openxmlformats.org/officeDocument/2006/relationships" xmlns:p="http://schemas.openxmlformats.org/presentationml/2006/main">
+  <p:cSld>
+    <p:bg>
+      <p:bgPr>
+        <a:solidFill>
+          <a:srgbClr val="EDEFF0"/>
+        </a:solidFill>
+        <a:effectLst/>
+      </p:bgPr>
+    </p:bg>
+    <p:spTree>
+      <p:nvGrpSpPr>
+        <p:cNvPr id="1" name=""/>
+        <p:cNvGrpSpPr/>
+        <p:nvPr/>
+      </p:nvGrpSpPr>
+      <p:grpSpPr>
+        <a:xfrm>
+          <a:off x="0" y="0"/>
+          <a:ext cx="0" cy="0"/>
+          <a:chOff x="0" y="0"/>
+          <a:chExt cx="0" cy="0"/>
+        </a:xfrm>
+      </p:grpSpPr>
+      <p:sp>
+        <p:nvSpPr>
+          <p:cNvPr id="2" name="Freeform 2"/>
+          <p:cNvSpPr/>
+          <p:nvPr/>
+        </p:nvSpPr>
+        <p:spPr>
+          <a:xfrm>
+            <a:off x="8477436" y="273051"/>
+            <a:ext cx="1768351" cy="1768351"/>
+          </a:xfrm>
+          <a:custGeom>
+            <a:avLst/>
+            <a:gdLst/>
+            <a:ahLst/>
+            <a:cxnLst/>
+            <a:rect l="l" t="t" r="r" b="b"/>
+            <a:pathLst>
+              <a:path w="2652527" h="2652527">
+                <a:moveTo>
+                  <a:pt x="0" y="0"/>
+                </a:moveTo>
+                <a:lnTo>
+                  <a:pt x="2652527" y="0"/>
+                </a:lnTo>
+                <a:lnTo>
+                  <a:pt x="2652527" y="2652527"/>
+                </a:lnTo>
+                <a:lnTo>
+                  <a:pt x="0" y="2652527"/>
+                </a:lnTo>
+                <a:lnTo>
+                  <a:pt x="0" y="0"/>
+                </a:lnTo>
+                <a:close/>
+              </a:path>
+            </a:pathLst>
+          </a:custGeom>
+          <a:blipFill>
+            <a:blip r:embed="rId2"/>
+            <a:stretch>
+              <a:fillRect/>
+            </a:stretch>
+          </a:blipFill>
+        </p:spPr>
+        <p:txBody>
+          <a:bodyPr/>
+          <a:lstStyle/>
+          <a:p>
+            <a:pPr defTabSz="609630"/>
+            <a:endParaRPr lang="it-IT" sz="1200">
+              <a:solidFill>
+                <a:prstClr val="black"/>
+              </a:solidFill>
+              <a:latin typeface="Calibri"/>
+            </a:endParaRPr>
+          </a:p>
+        </p:txBody>
+      </p:sp>
+      <p:sp>
+        <p:nvSpPr>
+          <p:cNvPr id="3" name="Freeform 3"/>
+          <p:cNvSpPr/>
+          <p:nvPr/>
+        </p:nvSpPr>
+        <p:spPr>
+          <a:xfrm>
+            <a:off x="-152524" y="3987443"/>
+            <a:ext cx="4816351" cy="4735451"/>
+          </a:xfrm>
+          <a:custGeom>
+            <a:avLst/>
+            <a:gdLst/>
+            <a:ahLst/>
+            <a:cxnLst/>
+            <a:rect l="l" t="t" r="r" b="b"/>
+            <a:pathLst>
+              <a:path w="7224527" h="7103176">
+                <a:moveTo>
+                  <a:pt x="0" y="0"/>
+                </a:moveTo>
+                <a:lnTo>
+                  <a:pt x="7224527" y="0"/>
+                </a:lnTo>
+                <a:lnTo>
+                  <a:pt x="7224527" y="7103176"/>
+                </a:lnTo>
+                <a:lnTo>
+                  <a:pt x="0" y="7103176"/>
+                </a:lnTo>
+                <a:lnTo>
+                  <a:pt x="0" y="0"/>
+                </a:lnTo>
+                <a:close/>
+              </a:path>
+            </a:pathLst>
+          </a:custGeom>
+          <a:blipFill>
+            <a:blip r:embed="rId3"/>
+            <a:stretch>
+              <a:fillRect l="-3058" t="-2409" b="-2409"/>
+            </a:stretch>
+          </a:blipFill>
+        </p:spPr>
+        <p:txBody>
+          <a:bodyPr/>
+          <a:lstStyle/>
+          <a:p>
+            <a:pPr defTabSz="609630"/>
+            <a:endParaRPr lang="it-IT" sz="1200">
+              <a:solidFill>
+                <a:prstClr val="black"/>
+              </a:solidFill>
+              <a:latin typeface="Calibri"/>
+            </a:endParaRPr>
+          </a:p>
+        </p:txBody>
+      </p:sp>
+      <p:sp>
+        <p:nvSpPr>
+          <p:cNvPr id="4" name="Freeform 4"/>
+          <p:cNvSpPr/>
+          <p:nvPr/>
+        </p:nvSpPr>
+        <p:spPr>
+          <a:xfrm>
+            <a:off x="-1839463" y="-1674635"/>
+            <a:ext cx="5173213" cy="4271901"/>
+          </a:xfrm>
+          <a:custGeom>
+            <a:avLst/>
+            <a:gdLst/>
+            <a:ahLst/>
+            <a:cxnLst/>
+            <a:rect l="l" t="t" r="r" b="b"/>
+            <a:pathLst>
+              <a:path w="7759819" h="6407851">
+                <a:moveTo>
+                  <a:pt x="0" y="0"/>
+                </a:moveTo>
+                <a:lnTo>
+                  <a:pt x="7759819" y="0"/>
+                </a:lnTo>
+                <a:lnTo>
+                  <a:pt x="7759819" y="6407851"/>
+                </a:lnTo>
+                <a:lnTo>
+                  <a:pt x="0" y="6407851"/>
+                </a:lnTo>
+                <a:lnTo>
+                  <a:pt x="0" y="0"/>
+                </a:lnTo>
+                <a:close/>
+              </a:path>
+            </a:pathLst>
+          </a:custGeom>
+          <a:blipFill>
+            <a:blip r:embed="rId4"/>
+            <a:stretch>
+              <a:fillRect t="-10549" b="-10549"/>
+            </a:stretch>
+          </a:blipFill>
+        </p:spPr>
+        <p:txBody>
+          <a:bodyPr/>
+          <a:lstStyle/>
+          <a:p>
+            <a:pPr defTabSz="609630"/>
+            <a:endParaRPr lang="it-IT" sz="1200">
+              <a:solidFill>
+                <a:prstClr val="black"/>
+              </a:solidFill>
+              <a:latin typeface="Calibri"/>
+            </a:endParaRPr>
+          </a:p>
+        </p:txBody>
+      </p:sp>
+      <p:sp>
+        <p:nvSpPr>
+          <p:cNvPr id="5" name="Freeform 5"/>
+          <p:cNvSpPr/>
+          <p:nvPr/>
+        </p:nvSpPr>
+        <p:spPr>
+          <a:xfrm>
+            <a:off x="8648824" y="3581400"/>
+            <a:ext cx="3492377" cy="3492377"/>
+          </a:xfrm>
+          <a:custGeom>
+            <a:avLst/>
+            <a:gdLst/>
+            <a:ahLst/>
+            <a:cxnLst/>
+            <a:rect l="l" t="t" r="r" b="b"/>
+            <a:pathLst>
+              <a:path w="5238565" h="5238565">
+                <a:moveTo>
+                  <a:pt x="0" y="0"/>
+                </a:moveTo>
+                <a:lnTo>
+                  <a:pt x="5238565" y="0"/>
+                </a:lnTo>
+                <a:lnTo>
+                  <a:pt x="5238565" y="5238565"/>
+                </a:lnTo>
+                <a:lnTo>
+                  <a:pt x="0" y="5238565"/>
+                </a:lnTo>
+                <a:lnTo>
+                  <a:pt x="0" y="0"/>
+                </a:lnTo>
+                <a:close/>
+              </a:path>
+            </a:pathLst>
+          </a:custGeom>
+          <a:blipFill>
+            <a:blip r:embed="rId5"/>
+            <a:stretch>
+              <a:fillRect/>
+            </a:stretch>
+          </a:blipFill>
+        </p:spPr>
+        <p:txBody>
+          <a:bodyPr/>
+          <a:lstStyle/>
+          <a:p>
+            <a:pPr defTabSz="609630"/>
+            <a:endParaRPr lang="it-IT" sz="1200">
+              <a:solidFill>
+                <a:prstClr val="black"/>
+              </a:solidFill>
+              <a:latin typeface="Calibri"/>
+            </a:endParaRPr>
+          </a:p>
+        </p:txBody>
+      </p:sp>
+      <p:sp>
+        <p:nvSpPr>
+          <p:cNvPr id="6" name="Freeform 6"/>
+          <p:cNvSpPr/>
+          <p:nvPr/>
+        </p:nvSpPr>
+        <p:spPr>
+          <a:xfrm>
+            <a:off x="8145524" y="5231341"/>
+            <a:ext cx="1123827" cy="1123827"/>
+          </a:xfrm>
+          <a:custGeom>
+            <a:avLst/>
+            <a:gdLst/>
+            <a:ahLst/>
+            <a:cxnLst/>
+            <a:rect l="l" t="t" r="r" b="b"/>
+            <a:pathLst>
+              <a:path w="1685740" h="1685740">
+                <a:moveTo>
+                  <a:pt x="0" y="0"/>
+                </a:moveTo>
+                <a:lnTo>
+                  <a:pt x="1685740" y="0"/>
+                </a:lnTo>
+                <a:lnTo>
+                  <a:pt x="1685740" y="1685740"/>
+                </a:lnTo>
+                <a:lnTo>
+                  <a:pt x="0" y="1685740"/>
+                </a:lnTo>
+                <a:lnTo>
+                  <a:pt x="0" y="0"/>
+                </a:lnTo>
+                <a:close/>
+              </a:path>
+            </a:pathLst>
+          </a:custGeom>
+          <a:blipFill>
+            <a:blip r:embed="rId6"/>
+            <a:stretch>
+              <a:fillRect/>
+            </a:stretch>
+          </a:blipFill>
+        </p:spPr>
+        <p:txBody>
+          <a:bodyPr/>
+          <a:lstStyle/>
+          <a:p>
+            <a:pPr defTabSz="609630"/>
+            <a:endParaRPr lang="it-IT" sz="1200">
+              <a:solidFill>
+                <a:prstClr val="black"/>
+              </a:solidFill>
+              <a:latin typeface="Calibri"/>
+            </a:endParaRPr>
+          </a:p>
+        </p:txBody>
+      </p:sp>
+      <p:sp>
+        <p:nvSpPr>
+          <p:cNvPr id="7" name="TextBox 7"/>
+          <p:cNvSpPr txBox="1"/>
+          <p:nvPr/>
+        </p:nvSpPr>
+        <p:spPr>
+          <a:xfrm>
+            <a:off x="6092826" y="3166110"/>
+            <a:ext cx="6350" cy="415755"/>
+          </a:xfrm>
+          <a:prstGeom prst="rect">
+            <a:avLst/>
+          </a:prstGeom>
+        </p:spPr>
+        <p:txBody>
+          <a:bodyPr lIns="0" tIns="0" rIns="0" bIns="0" rtlCol="0" anchor="t">
+            <a:spAutoFit/>
+          </a:bodyPr>
+          <a:lstStyle/>
+          <a:p>
+            <a:pPr algn="ctr" defTabSz="609630">
+              <a:lnSpc>
+                <a:spcPts val="3920"/>
+              </a:lnSpc>
+            </a:pPr>
+            <a:endParaRPr sz="1200">
+              <a:solidFill>
+                <a:prstClr val="black"/>
+              </a:solidFill>
+              <a:latin typeface="Calibri"/>
+            </a:endParaRPr>
+          </a:p>
+        </p:txBody>
+      </p:sp>
+      <p:grpSp>
+        <p:nvGrpSpPr>
+          <p:cNvPr id="8" name="Group 8"/>
+          <p:cNvGrpSpPr/>
+          <p:nvPr/>
+        </p:nvGrpSpPr>
+        <p:grpSpPr>
+          <a:xfrm>
+            <a:off x="3333750" y="2521537"/>
+            <a:ext cx="5524500" cy="1808200"/>
+            <a:chOff x="0" y="0"/>
+            <a:chExt cx="11049000" cy="3616399"/>
+          </a:xfrm>
+        </p:grpSpPr>
+        <p:sp>
+          <p:nvSpPr>
+            <p:cNvPr id="9" name="Freeform 9"/>
+            <p:cNvSpPr/>
+            <p:nvPr/>
+          </p:nvSpPr>
+          <p:spPr>
+            <a:xfrm>
+              <a:off x="0" y="0"/>
+              <a:ext cx="11049000" cy="2691938"/>
+            </a:xfrm>
+            <a:custGeom>
+              <a:avLst/>
+              <a:gdLst/>
+              <a:ahLst/>
+              <a:cxnLst/>
+              <a:rect l="l" t="t" r="r" b="b"/>
+              <a:pathLst>
+                <a:path w="11049000" h="2691938">
+                  <a:moveTo>
+                    <a:pt x="0" y="0"/>
+                  </a:moveTo>
+                  <a:lnTo>
+                    <a:pt x="11049000" y="0"/>
+                  </a:lnTo>
+                  <a:lnTo>
+                    <a:pt x="11049000" y="2691938"/>
+                  </a:lnTo>
+                  <a:lnTo>
+                    <a:pt x="0" y="2691938"/>
+                  </a:lnTo>
+                  <a:lnTo>
+                    <a:pt x="0" y="0"/>
+                  </a:lnTo>
+                  <a:close/>
+                </a:path>
+              </a:pathLst>
+            </a:custGeom>
+            <a:blipFill>
+              <a:blip>
+                <a:extLst>
+                  <a:ext uri="{96DAC541-7B7A-43D3-8B79-37D633B846F1}">
+                    <asvg:svgBlip xmlns:asvg="http://schemas.microsoft.com/office/drawing/2016/SVG/main" r:embed="rId7"/>
+                  </a:ext>
+                </a:extLst>
+              </a:blip>
+              <a:stretch>
+                <a:fillRect/>
+              </a:stretch>
+            </a:blipFill>
+          </p:spPr>
+          <p:txBody>
+            <a:bodyPr/>
+            <a:lstStyle/>
+            <a:p>
+              <a:pPr defTabSz="609630"/>
+              <a:endParaRPr lang="it-IT" sz="1200">
+                <a:solidFill>
+                  <a:prstClr val="black"/>
+                </a:solidFill>
+                <a:latin typeface="Calibri"/>
+              </a:endParaRPr>
+            </a:p>
+          </p:txBody>
+        </p:sp>
+        <p:sp>
+          <p:nvSpPr>
+            <p:cNvPr id="10" name="TextBox 10"/>
+            <p:cNvSpPr txBox="1"/>
+            <p:nvPr/>
+          </p:nvSpPr>
+          <p:spPr>
+            <a:xfrm>
+              <a:off x="2304556" y="3007129"/>
+              <a:ext cx="7430492" cy="609270"/>
+            </a:xfrm>
+            <a:prstGeom prst="rect">
+              <a:avLst/>
+            </a:prstGeom>
+          </p:spPr>
+          <p:txBody>
+            <a:bodyPr lIns="0" tIns="0" rIns="0" bIns="0" rtlCol="0" anchor="t">
+              <a:spAutoFit/>
+            </a:bodyPr>
+            <a:lstStyle/>
+            <a:p>
+              <a:pPr algn="ctr" defTabSz="609630">
+                <a:lnSpc>
+                  <a:spcPts val="2613"/>
+                </a:lnSpc>
+              </a:pPr>
+              <a:r>
+                <a:rPr lang="en-US" sz="1867" b="1">
+                  <a:solidFill>
+                    <a:srgbClr val="1E2D56"/>
+                  </a:solidFill>
+                  <a:latin typeface="Inter Bold"/>
+                  <a:ea typeface="Inter Bold"/>
+                  <a:cs typeface="Inter Bold"/>
+                  <a:sym typeface="Inter Bold"/>
+                </a:rPr>
+                <a:t>Learn Your Way, Grow With Us.</a:t>
+              </a:r>
+            </a:p>
+          </p:txBody>
+        </p:sp>
+      </p:grpSp>
+      <p:sp>
+        <p:nvSpPr>
+          <p:cNvPr id="11" name="TextBox 11"/>
+          <p:cNvSpPr txBox="1"/>
+          <p:nvPr/>
+        </p:nvSpPr>
+        <p:spPr>
+          <a:xfrm>
+            <a:off x="0" y="6057900"/>
+            <a:ext cx="12192000" cy="109582"/>
+          </a:xfrm>
+          <a:prstGeom prst="rect">
+            <a:avLst/>
+          </a:prstGeom>
+        </p:spPr>
+        <p:txBody>
+          <a:bodyPr lIns="0" tIns="0" rIns="0" bIns="0" rtlCol="0" anchor="t">
+            <a:spAutoFit/>
+          </a:bodyPr>
+          <a:lstStyle/>
+          <a:p>
+            <a:pPr algn="ctr" defTabSz="609630">
+              <a:lnSpc>
+                <a:spcPts val="879"/>
+              </a:lnSpc>
+            </a:pPr>
+            <a:r>
+              <a:rPr lang="en-US" sz="700" err="1">
+                <a:solidFill>
+                  <a:srgbClr val="1E2D56"/>
+                </a:solidFill>
+                <a:latin typeface="Inter"/>
+                <a:ea typeface="Inter"/>
+                <a:cs typeface="Inter"/>
+                <a:sym typeface="Inter"/>
+              </a:rPr>
+              <a:t>Virvelle</a:t>
+            </a:r>
+            <a:r>
+              <a:rPr lang="en-US" sz="700">
+                <a:solidFill>
+                  <a:srgbClr val="1E2D56"/>
+                </a:solidFill>
+                <a:latin typeface="Inter"/>
+                <a:ea typeface="Inter"/>
+                <a:cs typeface="Inter"/>
+                <a:sym typeface="Inter"/>
+              </a:rPr>
+              <a:t> </a:t>
+            </a:r>
+            <a:r>
+              <a:rPr lang="en-US" sz="700" err="1">
+                <a:solidFill>
+                  <a:srgbClr val="1E2D56"/>
+                </a:solidFill>
+                <a:latin typeface="Inter"/>
+                <a:ea typeface="Inter"/>
+                <a:cs typeface="Inter"/>
+                <a:sym typeface="Inter"/>
+              </a:rPr>
+              <a:t>S.r.l.</a:t>
+            </a:r>
+            <a:r>
+              <a:rPr lang="en-US" sz="700">
+                <a:solidFill>
+                  <a:srgbClr val="1E2D56"/>
+                </a:solidFill>
+                <a:latin typeface="Inter"/>
+                <a:ea typeface="Inter"/>
+                <a:cs typeface="Inter"/>
+                <a:sym typeface="Inter"/>
+              </a:rPr>
+              <a:t> – Società Benefit 2025. All rights reserved. Confidential and proprietary</a:t>
+            </a:r>
+            <a:endParaRPr lang="it-IT" sz="1200">
+              <a:solidFill>
+                <a:prstClr val="black"/>
+              </a:solidFill>
+              <a:latin typeface="Calibri"/>
+              <a:ea typeface="Calibri"/>
+              <a:cs typeface="Calibri"/>
+            </a:endParaRPr>
+          </a:p>
+        </p:txBody>
+      </p:sp>
+    </p:spTree>
+  </p:cSld>
+  <p:clrMapOvr>
+    <a:masterClrMapping/>
+  </p:clrMapOvr>
+</p:sld>
+</file>
+
+<file path=ppt/slides/slide2.xml><?xml version="1.0" encoding="utf-8"?>
+<p:sld xmlns:a="http://schemas.openxmlformats.org/drawingml/2006/main" xmlns:r="http://schemas.openxmlformats.org/officeDocument/2006/relationships" xmlns:p="http://schemas.openxmlformats.org/presentationml/2006/main">
+  <p:cSld>
+    <p:bg>
+      <p:bgPr>
+        <a:solidFill>
+          <a:srgbClr val="1E2D56"/>
+        </a:solidFill>
+        <a:effectLst/>
+      </p:bgPr>
+    </p:bg>
+    <p:spTree>
+      <p:nvGrpSpPr>
+        <p:cNvPr id="1" name=""/>
+        <p:cNvGrpSpPr/>
+        <p:nvPr/>
+      </p:nvGrpSpPr>
+      <p:grpSpPr>
+        <a:xfrm>
+          <a:off x="0" y="0"/>
+          <a:ext cx="0" cy="0"/>
+          <a:chOff x="0" y="0"/>
+          <a:chExt cx="0" cy="0"/>
+        </a:xfrm>
+      </p:grpSpPr>
+      <p:sp>
+        <p:nvSpPr>
+          <p:cNvPr id="3" name="Freeform 3"/>
+          <p:cNvSpPr/>
+          <p:nvPr/>
+        </p:nvSpPr>
+        <p:spPr>
+          <a:xfrm>
+            <a:off x="685800" y="480281"/>
+            <a:ext cx="924535" cy="225250"/>
+          </a:xfrm>
+          <a:custGeom>
+            <a:avLst/>
+            <a:gdLst/>
+            <a:ahLst/>
+            <a:cxnLst/>
+            <a:rect l="l" t="t" r="r" b="b"/>
+            <a:pathLst>
+              <a:path w="1386802" h="337875">
+                <a:moveTo>
+                  <a:pt x="0" y="0"/>
+                </a:moveTo>
+                <a:lnTo>
+                  <a:pt x="1386802" y="0"/>
+                </a:lnTo>
+                <a:lnTo>
+                  <a:pt x="1386802" y="337875"/>
+                </a:lnTo>
+                <a:lnTo>
+                  <a:pt x="0" y="337875"/>
+                </a:lnTo>
+                <a:lnTo>
+                  <a:pt x="0" y="0"/>
+                </a:lnTo>
+                <a:close/>
+              </a:path>
+            </a:pathLst>
+          </a:custGeom>
+          <a:blipFill>
+            <a:blip>
+              <a:extLst>
+                <a:ext uri="{96DAC541-7B7A-43D3-8B79-37D633B846F1}">
+                  <asvg:svgBlip xmlns:asvg="http://schemas.microsoft.com/office/drawing/2016/SVG/main" r:embed="rId2"/>
+                </a:ext>
+              </a:extLst>
+            </a:blip>
+            <a:stretch>
+              <a:fillRect/>
+            </a:stretch>
+          </a:blipFill>
+        </p:spPr>
+        <p:txBody>
+          <a:bodyPr/>
+          <a:lstStyle/>
+          <a:p>
+            <a:pPr defTabSz="609630">
+              <a:defRPr/>
+            </a:pPr>
+            <a:endParaRPr lang="it-IT" sz="1200">
+              <a:solidFill>
+                <a:prstClr val="black"/>
+              </a:solidFill>
+              <a:latin typeface="Calibri"/>
+            </a:endParaRPr>
+          </a:p>
+        </p:txBody>
+      </p:sp>
+      <p:sp>
+        <p:nvSpPr>
+          <p:cNvPr id="4" name="TextBox 4"/>
+          <p:cNvSpPr txBox="1"/>
+          <p:nvPr/>
+        </p:nvSpPr>
+        <p:spPr>
+          <a:xfrm>
+            <a:off x="685800" y="1760098"/>
+            <a:ext cx="9361714" cy="1718419"/>
+          </a:xfrm>
+          <a:prstGeom prst="rect">
+            <a:avLst/>
+          </a:prstGeom>
+        </p:spPr>
+        <p:txBody>
+          <a:bodyPr wrap="square" lIns="0" tIns="0" rIns="0" bIns="0" rtlCol="0" anchor="t">
+            <a:spAutoFit/>
+          </a:bodyPr>
+          <a:lstStyle/>
+          <a:p>
+            <a:pPr defTabSz="609630">
+              <a:lnSpc>
+                <a:spcPts val="6650"/>
+              </a:lnSpc>
+              <a:defRPr/>
+            </a:pPr>
+            <a:r>
+              <a:rPr lang="en-US" sz="6333" b="1" spc="-31" dirty="0" err="1">
+                <a:solidFill>
+                  <a:srgbClr val="FFFFFF"/>
+                </a:solidFill>
+                <a:latin typeface="Inter Bold"/>
+                <a:ea typeface="Inter Bold"/>
+                <a:cs typeface="Inter Bold"/>
+                <a:sym typeface="Inter Bold"/>
+              </a:rPr>
+              <a:t>Introduzione</a:t>
+            </a:r>
+            <a:r>
+              <a:rPr lang="en-US" sz="6333" b="1" spc="-31" dirty="0">
+                <a:solidFill>
+                  <a:srgbClr val="FFFFFF"/>
+                </a:solidFill>
+                <a:latin typeface="Inter Bold"/>
+                <a:ea typeface="Inter Bold"/>
+                <a:cs typeface="Inter Bold"/>
+                <a:sym typeface="Inter Bold"/>
+              </a:rPr>
+              <a:t> alla </a:t>
+            </a:r>
+            <a:r>
+              <a:rPr lang="en-US" sz="6333" b="1" spc="-31" dirty="0" err="1">
+                <a:solidFill>
+                  <a:srgbClr val="FFFFFF"/>
+                </a:solidFill>
+                <a:latin typeface="Inter Bold"/>
+                <a:ea typeface="Inter Bold"/>
+                <a:cs typeface="Inter Bold"/>
+                <a:sym typeface="Inter Bold"/>
+              </a:rPr>
+              <a:t>piattaforma</a:t>
+            </a:r>
+            <a:r>
+              <a:rPr lang="en-US" sz="6333" b="1" spc="-31" dirty="0">
+                <a:solidFill>
+                  <a:srgbClr val="FFFFFF"/>
+                </a:solidFill>
+                <a:latin typeface="Inter Bold"/>
+                <a:ea typeface="Inter Bold"/>
+                <a:cs typeface="Inter Bold"/>
+                <a:sym typeface="Inter Bold"/>
+              </a:rPr>
+              <a:t> Android</a:t>
+            </a:r>
+          </a:p>
+        </p:txBody>
+      </p:sp>
+      <p:sp>
+        <p:nvSpPr>
+          <p:cNvPr id="5" name="TextBox 5"/>
+          <p:cNvSpPr txBox="1"/>
+          <p:nvPr/>
+        </p:nvSpPr>
+        <p:spPr>
+          <a:xfrm>
+            <a:off x="685800" y="1320377"/>
+            <a:ext cx="174873" cy="152286"/>
+          </a:xfrm>
+          <a:prstGeom prst="rect">
+            <a:avLst/>
+          </a:prstGeom>
+        </p:spPr>
+        <p:txBody>
+          <a:bodyPr lIns="0" tIns="0" rIns="0" bIns="0" rtlCol="0" anchor="t">
+            <a:spAutoFit/>
+          </a:bodyPr>
+          <a:lstStyle/>
+          <a:p>
+            <a:pPr defTabSz="609630">
+              <a:lnSpc>
+                <a:spcPts val="1307"/>
+              </a:lnSpc>
+              <a:defRPr/>
+            </a:pPr>
+            <a:r>
+              <a:rPr lang="en-US" sz="933" b="1">
+                <a:solidFill>
+                  <a:srgbClr val="FFFFFF"/>
+                </a:solidFill>
+                <a:latin typeface="Inter Bold"/>
+                <a:ea typeface="Inter Bold"/>
+                <a:cs typeface="Inter Bold"/>
+                <a:sym typeface="Inter Bold"/>
+              </a:rPr>
+              <a:t>01.</a:t>
+            </a:r>
+          </a:p>
+        </p:txBody>
+      </p:sp>
+      <p:sp>
+        <p:nvSpPr>
+          <p:cNvPr id="2" name="TextBox 4">
+            <a:extLst>
+              <a:ext uri="{FF2B5EF4-FFF2-40B4-BE49-F238E27FC236}">
+                <a16:creationId xmlns:a16="http://schemas.microsoft.com/office/drawing/2014/main" id="{3A0ECB52-26B7-592C-29E6-26C85AA5D3C2}"/>
+              </a:ext>
+            </a:extLst>
+          </p:cNvPr>
+          <p:cNvSpPr txBox="1"/>
+          <p:nvPr/>
+        </p:nvSpPr>
+        <p:spPr>
+          <a:xfrm>
+            <a:off x="685800" y="5537623"/>
+            <a:ext cx="4942840" cy="702821"/>
+          </a:xfrm>
+          <a:prstGeom prst="rect">
+            <a:avLst/>
+          </a:prstGeom>
+        </p:spPr>
+        <p:txBody>
+          <a:bodyPr wrap="square" lIns="0" tIns="0" rIns="0" bIns="0" rtlCol="0" anchor="t">
+            <a:spAutoFit/>
+          </a:bodyPr>
+          <a:lstStyle/>
+          <a:p>
+            <a:pPr defTabSz="609630">
+              <a:lnSpc>
+                <a:spcPts val="6650"/>
+              </a:lnSpc>
+              <a:defRPr/>
+            </a:pPr>
+            <a:r>
+              <a:rPr lang="en-US" sz="2000" b="1" i="1" spc="-31" dirty="0">
+                <a:solidFill>
+                  <a:srgbClr val="FFFFFF"/>
+                </a:solidFill>
+                <a:latin typeface="Inter Bold"/>
+                <a:ea typeface="Inter Bold"/>
+                <a:cs typeface="Inter Bold"/>
+                <a:sym typeface="Inter Bold"/>
+              </a:rPr>
+              <a:t>Dott. Alfonso Zappia</a:t>
+            </a:r>
+          </a:p>
+        </p:txBody>
+      </p:sp>
+    </p:spTree>
+  </p:cSld>
+  <p:clrMapOvr>
+    <a:masterClrMapping/>
+  </p:clrMapOvr>
+</p:sld>
+</file>
+
 <file path=ppt/slides/slide3.xml><?xml version="1.0" encoding="utf-8"?>
 <p:sld xmlns:a="http://schemas.openxmlformats.org/drawingml/2006/main" xmlns:r="http://schemas.openxmlformats.org/officeDocument/2006/relationships" xmlns:p="http://schemas.openxmlformats.org/presentationml/2006/main">
-  <p:cSld name="Slide 3">
+  <p:cSld name="Slide 2">
     <p:bg>
       <p:bgPr>
         <a:blipFill dpi="0" rotWithShape="1">
-          <a:blip r:embed="rId1">
+          <a:blip r:embed="rId3">
             <a:lum/>
           </a:blip>
           <a:srcRect/>
@@ -2322,11 +6681,11 @@
 
 <file path=ppt/slides/slide4.xml><?xml version="1.0" encoding="utf-8"?>
 <p:sld xmlns:a="http://schemas.openxmlformats.org/drawingml/2006/main" xmlns:r="http://schemas.openxmlformats.org/officeDocument/2006/relationships" xmlns:p="http://schemas.openxmlformats.org/presentationml/2006/main">
-  <p:cSld name="Slide 4">
+  <p:cSld name="Slide 3">
     <p:bg>
       <p:bgPr>
         <a:blipFill dpi="0" rotWithShape="1">
-          <a:blip r:embed="rId1">
+          <a:blip r:embed="rId3">
             <a:lum/>
           </a:blip>
           <a:srcRect/>
@@ -2361,11 +6720,11 @@
 
 <file path=ppt/slides/slide5.xml><?xml version="1.0" encoding="utf-8"?>
 <p:sld xmlns:a="http://schemas.openxmlformats.org/drawingml/2006/main" xmlns:r="http://schemas.openxmlformats.org/officeDocument/2006/relationships" xmlns:p="http://schemas.openxmlformats.org/presentationml/2006/main">
-  <p:cSld name="Slide 5">
+  <p:cSld name="Slide 4">
     <p:bg>
       <p:bgPr>
         <a:blipFill dpi="0" rotWithShape="1">
-          <a:blip r:embed="rId1">
+          <a:blip r:embed="rId3">
             <a:lum/>
           </a:blip>
           <a:srcRect/>
@@ -2400,11 +6759,11 @@
 
 <file path=ppt/slides/slide6.xml><?xml version="1.0" encoding="utf-8"?>
 <p:sld xmlns:a="http://schemas.openxmlformats.org/drawingml/2006/main" xmlns:r="http://schemas.openxmlformats.org/officeDocument/2006/relationships" xmlns:p="http://schemas.openxmlformats.org/presentationml/2006/main">
-  <p:cSld name="Slide 6">
+  <p:cSld name="Slide 5">
     <p:bg>
       <p:bgPr>
         <a:blipFill dpi="0" rotWithShape="1">
-          <a:blip r:embed="rId1">
+          <a:blip r:embed="rId3">
             <a:lum/>
           </a:blip>
           <a:srcRect/>
@@ -2439,11 +6798,11 @@
 
 <file path=ppt/slides/slide7.xml><?xml version="1.0" encoding="utf-8"?>
 <p:sld xmlns:a="http://schemas.openxmlformats.org/drawingml/2006/main" xmlns:r="http://schemas.openxmlformats.org/officeDocument/2006/relationships" xmlns:p="http://schemas.openxmlformats.org/presentationml/2006/main">
-  <p:cSld name="Slide 7">
+  <p:cSld name="Slide 6">
     <p:bg>
       <p:bgPr>
         <a:blipFill dpi="0" rotWithShape="1">
-          <a:blip r:embed="rId1">
+          <a:blip r:embed="rId3">
             <a:lum/>
           </a:blip>
           <a:srcRect/>
@@ -2478,11 +6837,11 @@
 
 <file path=ppt/slides/slide8.xml><?xml version="1.0" encoding="utf-8"?>
 <p:sld xmlns:a="http://schemas.openxmlformats.org/drawingml/2006/main" xmlns:r="http://schemas.openxmlformats.org/officeDocument/2006/relationships" xmlns:p="http://schemas.openxmlformats.org/presentationml/2006/main">
-  <p:cSld name="Slide 8">
+  <p:cSld name="Slide 7">
     <p:bg>
       <p:bgPr>
         <a:blipFill dpi="0" rotWithShape="1">
-          <a:blip r:embed="rId1">
+          <a:blip r:embed="rId3">
             <a:lum/>
           </a:blip>
           <a:srcRect/>
@@ -2517,11 +6876,11 @@
 
 <file path=ppt/slides/slide9.xml><?xml version="1.0" encoding="utf-8"?>
 <p:sld xmlns:a="http://schemas.openxmlformats.org/drawingml/2006/main" xmlns:r="http://schemas.openxmlformats.org/officeDocument/2006/relationships" xmlns:p="http://schemas.openxmlformats.org/presentationml/2006/main">
-  <p:cSld name="Slide 9">
+  <p:cSld name="Slide 8">
     <p:bg>
       <p:bgPr>
         <a:blipFill dpi="0" rotWithShape="1">
-          <a:blip r:embed="rId1">
+          <a:blip r:embed="rId3">
             <a:lum/>
           </a:blip>
           <a:srcRect/>
@@ -2847,4 +7206,602 @@
     </a:ext>
   </a:extLst>
 </a:theme>
+</file>
+
+<file path=ppt/theme/theme2.xml><?xml version="1.0" encoding="utf-8"?>
+<a:theme xmlns:a="http://schemas.openxmlformats.org/drawingml/2006/main" name="1_Office Theme">
+  <a:themeElements>
+    <a:clrScheme name="Office">
+      <a:dk1>
+        <a:sysClr val="windowText" lastClr="000000"/>
+      </a:dk1>
+      <a:lt1>
+        <a:sysClr val="window" lastClr="FFFFFF"/>
+      </a:lt1>
+      <a:dk2>
+        <a:srgbClr val="1F497D"/>
+      </a:dk2>
+      <a:lt2>
+        <a:srgbClr val="EEECE1"/>
+      </a:lt2>
+      <a:accent1>
+        <a:srgbClr val="4F81BD"/>
+      </a:accent1>
+      <a:accent2>
+        <a:srgbClr val="C0504D"/>
+      </a:accent2>
+      <a:accent3>
+        <a:srgbClr val="9BBB59"/>
+      </a:accent3>
+      <a:accent4>
+        <a:srgbClr val="8064A2"/>
+      </a:accent4>
+      <a:accent5>
+        <a:srgbClr val="4BACC6"/>
+      </a:accent5>
+      <a:accent6>
+        <a:srgbClr val="F79646"/>
+      </a:accent6>
+      <a:hlink>
+        <a:srgbClr val="0000FF"/>
+      </a:hlink>
+      <a:folHlink>
+        <a:srgbClr val="800080"/>
+      </a:folHlink>
+    </a:clrScheme>
+    <a:fontScheme name="Office">
+      <a:majorFont>
+        <a:latin typeface="Calibri"/>
+        <a:ea typeface=""/>
+        <a:cs typeface=""/>
+        <a:font script="Jpan" typeface="ＭＳ Ｐゴシック"/>
+        <a:font script="Hang" typeface="맑은 고딕"/>
+        <a:font script="Hans" typeface="宋体"/>
+        <a:font script="Hant" typeface="新細明體"/>
+        <a:font script="Arab" typeface="Times New Roman"/>
+        <a:font script="Hebr" typeface="Times New Roman"/>
+        <a:font script="Thai" typeface="Angsana New"/>
+        <a:font script="Ethi" typeface="Nyala"/>
+        <a:font script="Beng" typeface="Vrinda"/>
+        <a:font script="Gujr" typeface="Shruti"/>
+        <a:font script="Khmr" typeface="MoolBoran"/>
+        <a:font script="Knda" typeface="Tunga"/>
+        <a:font script="Guru" typeface="Raavi"/>
+        <a:font script="Cans" typeface="Euphemia"/>
+        <a:font script="Cher" typeface="Plantagenet Cherokee"/>
+        <a:font script="Yiii" typeface="Microsoft Yi Baiti"/>
+        <a:font script="Tibt" typeface="Microsoft Himalaya"/>
+        <a:font script="Thaa" typeface="MV Boli"/>
+        <a:font script="Deva" typeface="Mangal"/>
+        <a:font script="Telu" typeface="Gautami"/>
+        <a:font script="Taml" typeface="Latha"/>
+        <a:font script="Syrc" typeface="Estrangelo Edessa"/>
+        <a:font script="Orya" typeface="Kalinga"/>
+        <a:font script="Mlym" typeface="Kartika"/>
+        <a:font script="Laoo" typeface="DokChampa"/>
+        <a:font script="Sinh" typeface="Iskoola Pota"/>
+        <a:font script="Mong" typeface="Mongolian Baiti"/>
+        <a:font script="Viet" typeface="Times New Roman"/>
+        <a:font script="Uigh" typeface="Microsoft Uighur"/>
+      </a:majorFont>
+      <a:minorFont>
+        <a:latin typeface="Calibri"/>
+        <a:ea typeface=""/>
+        <a:cs typeface=""/>
+        <a:font script="Jpan" typeface="ＭＳ Ｐゴシック"/>
+        <a:font script="Hang" typeface="맑은 고딕"/>
+        <a:font script="Hans" typeface="宋体"/>
+        <a:font script="Hant" typeface="新細明體"/>
+        <a:font script="Arab" typeface="Arial"/>
+        <a:font script="Hebr" typeface="Arial"/>
+        <a:font script="Thai" typeface="Cordia New"/>
+        <a:font script="Ethi" typeface="Nyala"/>
+        <a:font script="Beng" typeface="Vrinda"/>
+        <a:font script="Gujr" typeface="Shruti"/>
+        <a:font script="Khmr" typeface="DaunPenh"/>
+        <a:font script="Knda" typeface="Tunga"/>
+        <a:font script="Guru" typeface="Raavi"/>
+        <a:font script="Cans" typeface="Euphemia"/>
+        <a:font script="Cher" typeface="Plantagenet Cherokee"/>
+        <a:font script="Yiii" typeface="Microsoft Yi Baiti"/>
+        <a:font script="Tibt" typeface="Microsoft Himalaya"/>
+        <a:font script="Thaa" typeface="MV Boli"/>
+        <a:font script="Deva" typeface="Mangal"/>
+        <a:font script="Telu" typeface="Gautami"/>
+        <a:font script="Taml" typeface="Latha"/>
+        <a:font script="Syrc" typeface="Estrangelo Edessa"/>
+        <a:font script="Orya" typeface="Kalinga"/>
+        <a:font script="Mlym" typeface="Kartika"/>
+        <a:font script="Laoo" typeface="DokChampa"/>
+        <a:font script="Sinh" typeface="Iskoola Pota"/>
+        <a:font script="Mong" typeface="Mongolian Baiti"/>
+        <a:font script="Viet" typeface="Arial"/>
+        <a:font script="Uigh" typeface="Microsoft Uighur"/>
+      </a:minorFont>
+    </a:fontScheme>
+    <a:fmtScheme name="Office">
+      <a:fillStyleLst>
+        <a:solidFill>
+          <a:schemeClr val="phClr"/>
+        </a:solidFill>
+        <a:gradFill rotWithShape="1">
+          <a:gsLst>
+            <a:gs pos="0">
+              <a:schemeClr val="phClr">
+                <a:tint val="50000"/>
+                <a:satMod val="300000"/>
+              </a:schemeClr>
+            </a:gs>
+            <a:gs pos="35000">
+              <a:schemeClr val="phClr">
+                <a:tint val="37000"/>
+                <a:satMod val="300000"/>
+              </a:schemeClr>
+            </a:gs>
+            <a:gs pos="100000">
+              <a:schemeClr val="phClr">
+                <a:tint val="15000"/>
+                <a:satMod val="350000"/>
+              </a:schemeClr>
+            </a:gs>
+          </a:gsLst>
+          <a:lin ang="16200000" scaled="1"/>
+        </a:gradFill>
+        <a:gradFill rotWithShape="1">
+          <a:gsLst>
+            <a:gs pos="0">
+              <a:schemeClr val="phClr">
+                <a:shade val="51000"/>
+                <a:satMod val="130000"/>
+              </a:schemeClr>
+            </a:gs>
+            <a:gs pos="80000">
+              <a:schemeClr val="phClr">
+                <a:shade val="93000"/>
+                <a:satMod val="130000"/>
+              </a:schemeClr>
+            </a:gs>
+            <a:gs pos="100000">
+              <a:schemeClr val="phClr">
+                <a:shade val="94000"/>
+                <a:satMod val="135000"/>
+              </a:schemeClr>
+            </a:gs>
+          </a:gsLst>
+          <a:lin ang="16200000" scaled="0"/>
+        </a:gradFill>
+      </a:fillStyleLst>
+      <a:lnStyleLst>
+        <a:ln w="9525" cap="flat" cmpd="sng" algn="ctr">
+          <a:solidFill>
+            <a:schemeClr val="phClr">
+              <a:shade val="95000"/>
+              <a:satMod val="105000"/>
+            </a:schemeClr>
+          </a:solidFill>
+          <a:prstDash val="solid"/>
+        </a:ln>
+        <a:ln w="25400" cap="flat" cmpd="sng" algn="ctr">
+          <a:solidFill>
+            <a:schemeClr val="phClr"/>
+          </a:solidFill>
+          <a:prstDash val="solid"/>
+        </a:ln>
+        <a:ln w="38100" cap="flat" cmpd="sng" algn="ctr">
+          <a:solidFill>
+            <a:schemeClr val="phClr"/>
+          </a:solidFill>
+          <a:prstDash val="solid"/>
+        </a:ln>
+      </a:lnStyleLst>
+      <a:effectStyleLst>
+        <a:effectStyle>
+          <a:effectLst>
+            <a:outerShdw blurRad="40000" dist="20000" dir="5400000" rotWithShape="0">
+              <a:srgbClr val="000000">
+                <a:alpha val="38000"/>
+              </a:srgbClr>
+            </a:outerShdw>
+          </a:effectLst>
+        </a:effectStyle>
+        <a:effectStyle>
+          <a:effectLst>
+            <a:outerShdw blurRad="40000" dist="23000" dir="5400000" rotWithShape="0">
+              <a:srgbClr val="000000">
+                <a:alpha val="35000"/>
+              </a:srgbClr>
+            </a:outerShdw>
+          </a:effectLst>
+        </a:effectStyle>
+        <a:effectStyle>
+          <a:effectLst>
+            <a:outerShdw blurRad="40000" dist="23000" dir="5400000" rotWithShape="0">
+              <a:srgbClr val="000000">
+                <a:alpha val="35000"/>
+              </a:srgbClr>
+            </a:outerShdw>
+          </a:effectLst>
+          <a:scene3d>
+            <a:camera prst="orthographicFront">
+              <a:rot lat="0" lon="0" rev="0"/>
+            </a:camera>
+            <a:lightRig rig="threePt" dir="t">
+              <a:rot lat="0" lon="0" rev="1200000"/>
+            </a:lightRig>
+          </a:scene3d>
+          <a:sp3d>
+            <a:bevelT w="63500" h="25400"/>
+          </a:sp3d>
+        </a:effectStyle>
+      </a:effectStyleLst>
+      <a:bgFillStyleLst>
+        <a:solidFill>
+          <a:schemeClr val="phClr"/>
+        </a:solidFill>
+        <a:gradFill rotWithShape="1">
+          <a:gsLst>
+            <a:gs pos="0">
+              <a:schemeClr val="phClr">
+                <a:tint val="40000"/>
+                <a:satMod val="350000"/>
+              </a:schemeClr>
+            </a:gs>
+            <a:gs pos="40000">
+              <a:schemeClr val="phClr">
+                <a:tint val="45000"/>
+                <a:shade val="99000"/>
+                <a:satMod val="350000"/>
+              </a:schemeClr>
+            </a:gs>
+            <a:gs pos="100000">
+              <a:schemeClr val="phClr">
+                <a:shade val="20000"/>
+                <a:satMod val="255000"/>
+              </a:schemeClr>
+            </a:gs>
+          </a:gsLst>
+          <a:path path="circle">
+            <a:fillToRect l="50000" t="-80000" r="50000" b="180000"/>
+          </a:path>
+        </a:gradFill>
+        <a:gradFill rotWithShape="1">
+          <a:gsLst>
+            <a:gs pos="0">
+              <a:schemeClr val="phClr">
+                <a:tint val="80000"/>
+                <a:satMod val="300000"/>
+              </a:schemeClr>
+            </a:gs>
+            <a:gs pos="100000">
+              <a:schemeClr val="phClr">
+                <a:shade val="30000"/>
+                <a:satMod val="200000"/>
+              </a:schemeClr>
+            </a:gs>
+          </a:gsLst>
+          <a:path path="circle">
+            <a:fillToRect l="50000" t="50000" r="50000" b="50000"/>
+          </a:path>
+        </a:gradFill>
+      </a:bgFillStyleLst>
+    </a:fmtScheme>
+  </a:themeElements>
+  <a:objectDefaults/>
+  <a:extraClrSchemeLst/>
+</a:theme>
+</file>
+
+<file path=ppt/theme/theme3.xml><?xml version="1.0" encoding="utf-8"?>
+<a:theme xmlns:a="http://schemas.openxmlformats.org/drawingml/2006/main" name="Tema di Office">
+  <a:themeElements>
+    <a:clrScheme name="Office">
+      <a:dk1>
+        <a:sysClr val="windowText" lastClr="000000"/>
+      </a:dk1>
+      <a:lt1>
+        <a:sysClr val="window" lastClr="FFFFFF"/>
+      </a:lt1>
+      <a:dk2>
+        <a:srgbClr val="0E2841"/>
+      </a:dk2>
+      <a:lt2>
+        <a:srgbClr val="E8E8E8"/>
+      </a:lt2>
+      <a:accent1>
+        <a:srgbClr val="156082"/>
+      </a:accent1>
+      <a:accent2>
+        <a:srgbClr val="E97132"/>
+      </a:accent2>
+      <a:accent3>
+        <a:srgbClr val="196B24"/>
+      </a:accent3>
+      <a:accent4>
+        <a:srgbClr val="0F9ED5"/>
+      </a:accent4>
+      <a:accent5>
+        <a:srgbClr val="A02B93"/>
+      </a:accent5>
+      <a:accent6>
+        <a:srgbClr val="4EA72E"/>
+      </a:accent6>
+      <a:hlink>
+        <a:srgbClr val="467886"/>
+      </a:hlink>
+      <a:folHlink>
+        <a:srgbClr val="96607D"/>
+      </a:folHlink>
+    </a:clrScheme>
+    <a:fontScheme name="Office">
+      <a:majorFont>
+        <a:latin typeface="Aptos Display" panose="02110004020202020204"/>
+        <a:ea typeface=""/>
+        <a:cs typeface=""/>
+        <a:font script="Jpan" typeface="游ゴシック Light"/>
+        <a:font script="Hang" typeface="맑은 고딕"/>
+        <a:font script="Hans" typeface="等线 Light"/>
+        <a:font script="Hant" typeface="新細明體"/>
+        <a:font script="Arab" typeface="Times New Roman"/>
+        <a:font script="Hebr" typeface="Times New Roman"/>
+        <a:font script="Thai" typeface="Angsana New"/>
+        <a:font script="Ethi" typeface="Nyala"/>
+        <a:font script="Beng" typeface="Vrinda"/>
+        <a:font script="Gujr" typeface="Shruti"/>
+        <a:font script="Khmr" typeface="MoolBoran"/>
+        <a:font script="Knda" typeface="Tunga"/>
+        <a:font script="Guru" typeface="Raavi"/>
+        <a:font script="Cans" typeface="Euphemia"/>
+        <a:font script="Cher" typeface="Plantagenet Cherokee"/>
+        <a:font script="Yiii" typeface="Microsoft Yi Baiti"/>
+        <a:font script="Tibt" typeface="Microsoft Himalaya"/>
+        <a:font script="Thaa" typeface="MV Boli"/>
+        <a:font script="Deva" typeface="Mangal"/>
+        <a:font script="Telu" typeface="Gautami"/>
+        <a:font script="Taml" typeface="Latha"/>
+        <a:font script="Syrc" typeface="Estrangelo Edessa"/>
+        <a:font script="Orya" typeface="Kalinga"/>
+        <a:font script="Mlym" typeface="Kartika"/>
+        <a:font script="Laoo" typeface="DokChampa"/>
+        <a:font script="Sinh" typeface="Iskoola Pota"/>
+        <a:font script="Mong" typeface="Mongolian Baiti"/>
+        <a:font script="Viet" typeface="Times New Roman"/>
+        <a:font script="Uigh" typeface="Microsoft Uighur"/>
+        <a:font script="Geor" typeface="Sylfaen"/>
+        <a:font script="Armn" typeface="Arial"/>
+        <a:font script="Bugi" typeface="Leelawadee UI"/>
+        <a:font script="Bopo" typeface="Microsoft JhengHei"/>
+        <a:font script="Java" typeface="Javanese Text"/>
+        <a:font script="Lisu" typeface="Segoe UI"/>
+        <a:font script="Mymr" typeface="Myanmar Text"/>
+        <a:font script="Nkoo" typeface="Ebrima"/>
+        <a:font script="Olck" typeface="Nirmala UI"/>
+        <a:font script="Osma" typeface="Ebrima"/>
+        <a:font script="Phag" typeface="Phagspa"/>
+        <a:font script="Syrn" typeface="Estrangelo Edessa"/>
+        <a:font script="Syrj" typeface="Estrangelo Edessa"/>
+        <a:font script="Syre" typeface="Estrangelo Edessa"/>
+        <a:font script="Sora" typeface="Nirmala UI"/>
+        <a:font script="Tale" typeface="Microsoft Tai Le"/>
+        <a:font script="Talu" typeface="Microsoft New Tai Lue"/>
+        <a:font script="Tfng" typeface="Ebrima"/>
+      </a:majorFont>
+      <a:minorFont>
+        <a:latin typeface="Aptos" panose="02110004020202020204"/>
+        <a:ea typeface=""/>
+        <a:cs typeface=""/>
+        <a:font script="Jpan" typeface="游ゴシック"/>
+        <a:font script="Hang" typeface="맑은 고딕"/>
+        <a:font script="Hans" typeface="等线"/>
+        <a:font script="Hant" typeface="新細明體"/>
+        <a:font script="Arab" typeface="Arial"/>
+        <a:font script="Hebr" typeface="Arial"/>
+        <a:font script="Thai" typeface="Cordia New"/>
+        <a:font script="Ethi" typeface="Nyala"/>
+        <a:font script="Beng" typeface="Vrinda"/>
+        <a:font script="Gujr" typeface="Shruti"/>
+        <a:font script="Khmr" typeface="DaunPenh"/>
+        <a:font script="Knda" typeface="Tunga"/>
+        <a:font script="Guru" typeface="Raavi"/>
+        <a:font script="Cans" typeface="Euphemia"/>
+        <a:font script="Cher" typeface="Plantagenet Cherokee"/>
+        <a:font script="Yiii" typeface="Microsoft Yi Baiti"/>
+        <a:font script="Tibt" typeface="Microsoft Himalaya"/>
+        <a:font script="Thaa" typeface="MV Boli"/>
+        <a:font script="Deva" typeface="Mangal"/>
+        <a:font script="Telu" typeface="Gautami"/>
+        <a:font script="Taml" typeface="Latha"/>
+        <a:font script="Syrc" typeface="Estrangelo Edessa"/>
+        <a:font script="Orya" typeface="Kalinga"/>
+        <a:font script="Mlym" typeface="Kartika"/>
+        <a:font script="Laoo" typeface="DokChampa"/>
+        <a:font script="Sinh" typeface="Iskoola Pota"/>
+        <a:font script="Mong" typeface="Mongolian Baiti"/>
+        <a:font script="Viet" typeface="Arial"/>
+        <a:font script="Uigh" typeface="Microsoft Uighur"/>
+        <a:font script="Geor" typeface="Sylfaen"/>
+        <a:font script="Armn" typeface="Arial"/>
+        <a:font script="Bugi" typeface="Leelawadee UI"/>
+        <a:font script="Bopo" typeface="Microsoft JhengHei"/>
+        <a:font script="Java" typeface="Javanese Text"/>
+        <a:font script="Lisu" typeface="Segoe UI"/>
+        <a:font script="Mymr" typeface="Myanmar Text"/>
+        <a:font script="Nkoo" typeface="Ebrima"/>
+        <a:font script="Olck" typeface="Nirmala UI"/>
+        <a:font script="Osma" typeface="Ebrima"/>
+        <a:font script="Phag" typeface="Phagspa"/>
+        <a:font script="Syrn" typeface="Estrangelo Edessa"/>
+        <a:font script="Syrj" typeface="Estrangelo Edessa"/>
+        <a:font script="Syre" typeface="Estrangelo Edessa"/>
+        <a:font script="Sora" typeface="Nirmala UI"/>
+        <a:font script="Tale" typeface="Microsoft Tai Le"/>
+        <a:font script="Talu" typeface="Microsoft New Tai Lue"/>
+        <a:font script="Tfng" typeface="Ebrima"/>
+      </a:minorFont>
+    </a:fontScheme>
+    <a:fmtScheme name="Office">
+      <a:fillStyleLst>
+        <a:solidFill>
+          <a:schemeClr val="phClr"/>
+        </a:solidFill>
+        <a:gradFill rotWithShape="1">
+          <a:gsLst>
+            <a:gs pos="0">
+              <a:schemeClr val="phClr">
+                <a:lumMod val="110000"/>
+                <a:satMod val="105000"/>
+                <a:tint val="67000"/>
+              </a:schemeClr>
+            </a:gs>
+            <a:gs pos="50000">
+              <a:schemeClr val="phClr">
+                <a:lumMod val="105000"/>
+                <a:satMod val="103000"/>
+                <a:tint val="73000"/>
+              </a:schemeClr>
+            </a:gs>
+            <a:gs pos="100000">
+              <a:schemeClr val="phClr">
+                <a:lumMod val="105000"/>
+                <a:satMod val="109000"/>
+                <a:tint val="81000"/>
+              </a:schemeClr>
+            </a:gs>
+          </a:gsLst>
+          <a:lin ang="5400000" scaled="0"/>
+        </a:gradFill>
+        <a:gradFill rotWithShape="1">
+          <a:gsLst>
+            <a:gs pos="0">
+              <a:schemeClr val="phClr">
+                <a:satMod val="103000"/>
+                <a:lumMod val="102000"/>
+                <a:tint val="94000"/>
+              </a:schemeClr>
+            </a:gs>
+            <a:gs pos="50000">
+              <a:schemeClr val="phClr">
+                <a:satMod val="110000"/>
+                <a:lumMod val="100000"/>
+                <a:shade val="100000"/>
+              </a:schemeClr>
+            </a:gs>
+            <a:gs pos="100000">
+              <a:schemeClr val="phClr">
+                <a:lumMod val="99000"/>
+                <a:satMod val="120000"/>
+                <a:shade val="78000"/>
+              </a:schemeClr>
+            </a:gs>
+          </a:gsLst>
+          <a:lin ang="5400000" scaled="0"/>
+        </a:gradFill>
+      </a:fillStyleLst>
+      <a:lnStyleLst>
+        <a:ln w="12700" cap="flat" cmpd="sng" algn="ctr">
+          <a:solidFill>
+            <a:schemeClr val="phClr"/>
+          </a:solidFill>
+          <a:prstDash val="solid"/>
+          <a:miter lim="800000"/>
+        </a:ln>
+        <a:ln w="19050" cap="flat" cmpd="sng" algn="ctr">
+          <a:solidFill>
+            <a:schemeClr val="phClr"/>
+          </a:solidFill>
+          <a:prstDash val="solid"/>
+          <a:miter lim="800000"/>
+        </a:ln>
+        <a:ln w="25400" cap="flat" cmpd="sng" algn="ctr">
+          <a:solidFill>
+            <a:schemeClr val="phClr"/>
+          </a:solidFill>
+          <a:prstDash val="solid"/>
+          <a:miter lim="800000"/>
+        </a:ln>
+      </a:lnStyleLst>
+      <a:effectStyleLst>
+        <a:effectStyle>
+          <a:effectLst/>
+        </a:effectStyle>
+        <a:effectStyle>
+          <a:effectLst/>
+        </a:effectStyle>
+        <a:effectStyle>
+          <a:effectLst>
+            <a:outerShdw blurRad="57150" dist="19050" dir="5400000" algn="ctr" rotWithShape="0">
+              <a:srgbClr val="000000">
+                <a:alpha val="63000"/>
+              </a:srgbClr>
+            </a:outerShdw>
+          </a:effectLst>
+        </a:effectStyle>
+      </a:effectStyleLst>
+      <a:bgFillStyleLst>
+        <a:solidFill>
+          <a:schemeClr val="phClr"/>
+        </a:solidFill>
+        <a:solidFill>
+          <a:schemeClr val="phClr">
+            <a:tint val="95000"/>
+            <a:satMod val="170000"/>
+          </a:schemeClr>
+        </a:solidFill>
+        <a:gradFill rotWithShape="1">
+          <a:gsLst>
+            <a:gs pos="0">
+              <a:schemeClr val="phClr">
+                <a:tint val="93000"/>
+                <a:satMod val="150000"/>
+                <a:shade val="98000"/>
+                <a:lumMod val="102000"/>
+              </a:schemeClr>
+            </a:gs>
+            <a:gs pos="50000">
+              <a:schemeClr val="phClr">
+                <a:tint val="98000"/>
+                <a:satMod val="130000"/>
+                <a:shade val="90000"/>
+                <a:lumMod val="103000"/>
+              </a:schemeClr>
+            </a:gs>
+            <a:gs pos="100000">
+              <a:schemeClr val="phClr">
+                <a:shade val="63000"/>
+                <a:satMod val="120000"/>
+              </a:schemeClr>
+            </a:gs>
+          </a:gsLst>
+          <a:lin ang="5400000" scaled="0"/>
+        </a:gradFill>
+      </a:bgFillStyleLst>
+    </a:fmtScheme>
+  </a:themeElements>
+  <a:objectDefaults>
+    <a:lnDef>
+      <a:spPr/>
+      <a:bodyPr/>
+      <a:lstStyle/>
+      <a:style>
+        <a:lnRef idx="2">
+          <a:schemeClr val="accent1"/>
+        </a:lnRef>
+        <a:fillRef idx="0">
+          <a:schemeClr val="accent1"/>
+        </a:fillRef>
+        <a:effectRef idx="1">
+          <a:schemeClr val="accent1"/>
+        </a:effectRef>
+        <a:fontRef idx="minor">
+          <a:schemeClr val="tx1"/>
+        </a:fontRef>
+      </a:style>
+    </a:lnDef>
+  </a:objectDefaults>
+  <a:extraClrSchemeLst/>
+  <a:extLst>
+    <a:ext uri="{05A4C25C-085E-4340-85A3-A5531E510DB2}">
+      <thm15:themeFamily xmlns:thm15="http://schemas.microsoft.com/office/thememl/2012/main" name="Office Theme" id="{2E142A2C-CD16-42D6-873A-C26D2A0506FA}" vid="{1BDDFF52-6CD6-40A5-AB3C-68EB2F1E4D0A}"/>
+    </a:ext>
+  </a:extLst>
+</a:theme>
 </file>